--- a/assets/figures-editable/c1-c2/c2-e17.pptx
+++ b/assets/figures-editable/c1-c2/c2-e17.pptx
@@ -7,7 +7,7 @@
   <p:sldIdLst>
     <p:sldId id="256" r:id="rId7"/>
   </p:sldIdLst>
-  <p:sldSz cx="11948160" cy="8095488" type="screen4x3"/>
+  <p:sldSz cx="12191695" cy="6858000" type="screen4x3"/>
   <p:notesSz cx="6858000" cy="9144000"/>
   <p:defaultTextStyle>
     <a:defPPr>
@@ -3098,14 +3098,14 @@
       <p:grpSpPr/>
       <p:sp>
         <p:nvSpPr>
-          <p:cNvPr id="2" name="text1" descr="sci-ppt:C2-E17-001"/>
+          <p:cNvPr id="2" name="C2-E17 text 0" descr="sci-ppt:o000"/>
           <p:cNvSpPr txBox="1"/>
           <p:nvPr/>
         </p:nvSpPr>
         <p:spPr>
           <a:xfrm>
-            <a:off x="316992" y="268224"/>
-            <a:ext cx="11277600" cy="359054"/>
+            <a:off x="274320" y="118872"/>
+            <a:ext cx="11612880" cy="340105"/>
           </a:xfrm>
           <a:prstGeom prst="rect">
             <a:avLst/>
@@ -3114,7 +3114,7 @@
           <a:effectLst/>
         </p:spPr>
         <p:txBody>
-          <a:bodyPr wrap="none" lIns="27432" rIns="27432" tIns="18288" bIns="18288" anchor="ctr">
+          <a:bodyPr wrap="none" lIns="18288" rIns="18288" tIns="18288" bIns="18288" anchor="t">
             <a:spAutoFit/>
           </a:bodyPr>
           <a:lstStyle/>
@@ -3125,34 +3125,31 @@
               </a:spcAft>
             </a:pPr>
             <a:r>
-              <a:rPr sz="1823" b="0" i="0">
+              <a:rPr sz="1900" b="1" i="0">
                 <a:solidFill>
                   <a:srgbClr val="8EDBD4"/>
                 </a:solidFill>
                 <a:latin typeface="Arial"/>
               </a:rPr>
-              <a:t>C2-E17 | Physical-variable diagram</a:t>
-            </a:r>
-          </a:p>
-        </p:txBody>
-      </p:sp>
-      <p:sp>
-        <p:nvSpPr>
-          <p:cNvPr id="3" name="rect2" descr="sci-ppt:C2-E17-002"/>
-          <p:cNvSpPr/>
+              <a:t>C2-E17 · Derived probability under a prescribed Poisson rate</a:t>
+            </a:r>
+          </a:p>
+        </p:txBody>
+      </p:sp>
+      <p:cxnSp>
+        <p:nvCxnSpPr>
+          <p:cNvPr id="3" name="C2-E17 line 1" descr="sci-ppt:o001"/>
+          <p:cNvCxnSpPr/>
           <p:nvPr/>
-        </p:nvSpPr>
-        <p:spPr>
-          <a:xfrm>
-            <a:off x="1097280" y="1706880"/>
-            <a:ext cx="3901440" cy="1341120"/>
-          </a:xfrm>
-          <a:prstGeom prst="rect">
+        </p:nvCxnSpPr>
+        <p:spPr>
+          <a:xfrm>
+            <a:off x="914400" y="2926080"/>
+            <a:ext cx="5120640" cy="0"/>
+          </a:xfrm>
+          <a:prstGeom prst="line">
             <a:avLst/>
           </a:prstGeom>
-          <a:solidFill>
-            <a:srgbClr val="213E4B"/>
-          </a:solidFill>
           <a:ln w="19050">
             <a:solidFill>
               <a:srgbClr val="B4C7D2"/>
@@ -3160,24 +3157,83 @@
           </a:ln>
           <a:effectLst/>
         </p:spPr>
-        <p:txBody>
-          <a:bodyPr rtlCol="0" anchor="ctr"/>
-          <a:lstStyle/>
-          <a:p>
-            <a:pPr algn="ctr"/>
-          </a:p>
-        </p:txBody>
-      </p:sp>
-      <p:sp>
-        <p:nvSpPr>
-          <p:cNvPr id="4" name="text3" descr="sci-ppt:C2-E17-003"/>
+      </p:cxnSp>
+      <p:cxnSp>
+        <p:nvCxnSpPr>
+          <p:cNvPr id="4" name="C2-E17 line 2" descr="sci-ppt:o002"/>
+          <p:cNvCxnSpPr/>
+          <p:nvPr/>
+        </p:nvCxnSpPr>
+        <p:spPr>
+          <a:xfrm>
+            <a:off x="914400" y="1371600"/>
+            <a:ext cx="0" cy="1554480"/>
+          </a:xfrm>
+          <a:prstGeom prst="line">
+            <a:avLst/>
+          </a:prstGeom>
+          <a:ln w="19050">
+            <a:solidFill>
+              <a:srgbClr val="B4C7D2"/>
+            </a:solidFill>
+          </a:ln>
+          <a:effectLst/>
+        </p:spPr>
+      </p:cxnSp>
+      <p:cxnSp>
+        <p:nvCxnSpPr>
+          <p:cNvPr id="5" name="C2-E17 line 3" descr="sci-ppt:o003"/>
+          <p:cNvCxnSpPr/>
+          <p:nvPr/>
+        </p:nvCxnSpPr>
+        <p:spPr>
+          <a:xfrm>
+            <a:off x="914400" y="2926080"/>
+            <a:ext cx="0" cy="64008"/>
+          </a:xfrm>
+          <a:prstGeom prst="line">
+            <a:avLst/>
+          </a:prstGeom>
+          <a:ln w="12700">
+            <a:solidFill>
+              <a:srgbClr val="B4C7D2"/>
+            </a:solidFill>
+          </a:ln>
+          <a:effectLst/>
+        </p:spPr>
+      </p:cxnSp>
+      <p:cxnSp>
+        <p:nvCxnSpPr>
+          <p:cNvPr id="6" name="C2-E17 line 4" descr="sci-ppt:o004"/>
+          <p:cNvCxnSpPr/>
+          <p:nvPr/>
+        </p:nvCxnSpPr>
+        <p:spPr>
+          <a:xfrm>
+            <a:off x="914400" y="1371600"/>
+            <a:ext cx="0" cy="1554480"/>
+          </a:xfrm>
+          <a:prstGeom prst="line">
+            <a:avLst/>
+          </a:prstGeom>
+          <a:ln w="7620">
+            <a:solidFill>
+              <a:srgbClr val="2E4756"/>
+            </a:solidFill>
+          </a:ln>
+          <a:effectLst/>
+        </p:spPr>
+      </p:cxnSp>
+      <p:sp>
+        <p:nvSpPr>
+          <p:cNvPr id="7" name="C2-E17 text 5" descr="sci-ppt:o005"/>
           <p:cNvSpPr txBox="1"/>
           <p:nvPr/>
         </p:nvSpPr>
         <p:spPr>
           <a:xfrm>
-            <a:off x="1219200" y="1828800"/>
-            <a:ext cx="3718560" cy="340156"/>
+            <a:off x="457200" y="3008376"/>
+            <a:ext cx="914400" cy="208407"/>
           </a:xfrm>
           <a:prstGeom prst="rect">
             <a:avLst/>
@@ -3186,7 +3242,657 @@
           <a:effectLst/>
         </p:spPr>
         <p:txBody>
-          <a:bodyPr wrap="none" lIns="27432" rIns="27432" tIns="18288" bIns="18288" anchor="ctr">
+          <a:bodyPr wrap="none" lIns="18288" rIns="18288" tIns="18288" bIns="18288" anchor="t">
+            <a:spAutoFit/>
+          </a:bodyPr>
+          <a:lstStyle/>
+          <a:p>
+            <a:pPr algn="ctr">
+              <a:spcAft>
+                <a:spcPts val="0"/>
+              </a:spcAft>
+            </a:pPr>
+            <a:r>
+              <a:rPr sz="1050" b="0" i="0">
+                <a:solidFill>
+                  <a:srgbClr val="B4C7D2"/>
+                </a:solidFill>
+                <a:latin typeface="Arial"/>
+              </a:rPr>
+              <a:t>0</a:t>
+            </a:r>
+          </a:p>
+        </p:txBody>
+      </p:sp>
+      <p:cxnSp>
+        <p:nvCxnSpPr>
+          <p:cNvPr id="8" name="C2-E17 line 6" descr="sci-ppt:o006"/>
+          <p:cNvCxnSpPr/>
+          <p:nvPr/>
+        </p:nvCxnSpPr>
+        <p:spPr>
+          <a:xfrm>
+            <a:off x="1938528" y="2926080"/>
+            <a:ext cx="0" cy="64008"/>
+          </a:xfrm>
+          <a:prstGeom prst="line">
+            <a:avLst/>
+          </a:prstGeom>
+          <a:ln w="12700">
+            <a:solidFill>
+              <a:srgbClr val="B4C7D2"/>
+            </a:solidFill>
+          </a:ln>
+          <a:effectLst/>
+        </p:spPr>
+      </p:cxnSp>
+      <p:cxnSp>
+        <p:nvCxnSpPr>
+          <p:cNvPr id="9" name="C2-E17 line 7" descr="sci-ppt:o007"/>
+          <p:cNvCxnSpPr/>
+          <p:nvPr/>
+        </p:nvCxnSpPr>
+        <p:spPr>
+          <a:xfrm>
+            <a:off x="1938528" y="1371600"/>
+            <a:ext cx="0" cy="1554480"/>
+          </a:xfrm>
+          <a:prstGeom prst="line">
+            <a:avLst/>
+          </a:prstGeom>
+          <a:ln w="7620">
+            <a:solidFill>
+              <a:srgbClr val="2E4756"/>
+            </a:solidFill>
+          </a:ln>
+          <a:effectLst/>
+        </p:spPr>
+      </p:cxnSp>
+      <p:sp>
+        <p:nvSpPr>
+          <p:cNvPr id="10" name="C2-E17 text 8" descr="sci-ppt:o008"/>
+          <p:cNvSpPr txBox="1"/>
+          <p:nvPr/>
+        </p:nvSpPr>
+        <p:spPr>
+          <a:xfrm>
+            <a:off x="1481328" y="3008376"/>
+            <a:ext cx="914400" cy="208407"/>
+          </a:xfrm>
+          <a:prstGeom prst="rect">
+            <a:avLst/>
+          </a:prstGeom>
+          <a:noFill/>
+          <a:effectLst/>
+        </p:spPr>
+        <p:txBody>
+          <a:bodyPr wrap="none" lIns="18288" rIns="18288" tIns="18288" bIns="18288" anchor="t">
+            <a:spAutoFit/>
+          </a:bodyPr>
+          <a:lstStyle/>
+          <a:p>
+            <a:pPr algn="ctr">
+              <a:spcAft>
+                <a:spcPts val="0"/>
+              </a:spcAft>
+            </a:pPr>
+            <a:r>
+              <a:rPr sz="1050" b="0" i="0">
+                <a:solidFill>
+                  <a:srgbClr val="B4C7D2"/>
+                </a:solidFill>
+                <a:latin typeface="Arial"/>
+              </a:rPr>
+              <a:t>1</a:t>
+            </a:r>
+          </a:p>
+        </p:txBody>
+      </p:sp>
+      <p:cxnSp>
+        <p:nvCxnSpPr>
+          <p:cNvPr id="11" name="C2-E17 line 9" descr="sci-ppt:o009"/>
+          <p:cNvCxnSpPr/>
+          <p:nvPr/>
+        </p:nvCxnSpPr>
+        <p:spPr>
+          <a:xfrm>
+            <a:off x="2962656" y="2926080"/>
+            <a:ext cx="0" cy="64008"/>
+          </a:xfrm>
+          <a:prstGeom prst="line">
+            <a:avLst/>
+          </a:prstGeom>
+          <a:ln w="12700">
+            <a:solidFill>
+              <a:srgbClr val="B4C7D2"/>
+            </a:solidFill>
+          </a:ln>
+          <a:effectLst/>
+        </p:spPr>
+      </p:cxnSp>
+      <p:cxnSp>
+        <p:nvCxnSpPr>
+          <p:cNvPr id="12" name="C2-E17 line 10" descr="sci-ppt:o010"/>
+          <p:cNvCxnSpPr/>
+          <p:nvPr/>
+        </p:nvCxnSpPr>
+        <p:spPr>
+          <a:xfrm>
+            <a:off x="2962656" y="1371600"/>
+            <a:ext cx="0" cy="1554480"/>
+          </a:xfrm>
+          <a:prstGeom prst="line">
+            <a:avLst/>
+          </a:prstGeom>
+          <a:ln w="7620">
+            <a:solidFill>
+              <a:srgbClr val="2E4756"/>
+            </a:solidFill>
+          </a:ln>
+          <a:effectLst/>
+        </p:spPr>
+      </p:cxnSp>
+      <p:sp>
+        <p:nvSpPr>
+          <p:cNvPr id="13" name="C2-E17 text 11" descr="sci-ppt:o011"/>
+          <p:cNvSpPr txBox="1"/>
+          <p:nvPr/>
+        </p:nvSpPr>
+        <p:spPr>
+          <a:xfrm>
+            <a:off x="2505456" y="3008376"/>
+            <a:ext cx="914400" cy="208407"/>
+          </a:xfrm>
+          <a:prstGeom prst="rect">
+            <a:avLst/>
+          </a:prstGeom>
+          <a:noFill/>
+          <a:effectLst/>
+        </p:spPr>
+        <p:txBody>
+          <a:bodyPr wrap="none" lIns="18288" rIns="18288" tIns="18288" bIns="18288" anchor="t">
+            <a:spAutoFit/>
+          </a:bodyPr>
+          <a:lstStyle/>
+          <a:p>
+            <a:pPr algn="ctr">
+              <a:spcAft>
+                <a:spcPts val="0"/>
+              </a:spcAft>
+            </a:pPr>
+            <a:r>
+              <a:rPr sz="1050" b="0" i="0">
+                <a:solidFill>
+                  <a:srgbClr val="B4C7D2"/>
+                </a:solidFill>
+                <a:latin typeface="Arial"/>
+              </a:rPr>
+              <a:t>2</a:t>
+            </a:r>
+          </a:p>
+        </p:txBody>
+      </p:sp>
+      <p:cxnSp>
+        <p:nvCxnSpPr>
+          <p:cNvPr id="14" name="C2-E17 line 12" descr="sci-ppt:o012"/>
+          <p:cNvCxnSpPr/>
+          <p:nvPr/>
+        </p:nvCxnSpPr>
+        <p:spPr>
+          <a:xfrm>
+            <a:off x="3986783" y="2926080"/>
+            <a:ext cx="0" cy="64008"/>
+          </a:xfrm>
+          <a:prstGeom prst="line">
+            <a:avLst/>
+          </a:prstGeom>
+          <a:ln w="12700">
+            <a:solidFill>
+              <a:srgbClr val="B4C7D2"/>
+            </a:solidFill>
+          </a:ln>
+          <a:effectLst/>
+        </p:spPr>
+      </p:cxnSp>
+      <p:cxnSp>
+        <p:nvCxnSpPr>
+          <p:cNvPr id="15" name="C2-E17 line 13" descr="sci-ppt:o013"/>
+          <p:cNvCxnSpPr/>
+          <p:nvPr/>
+        </p:nvCxnSpPr>
+        <p:spPr>
+          <a:xfrm>
+            <a:off x="3986783" y="1371600"/>
+            <a:ext cx="0" cy="1554480"/>
+          </a:xfrm>
+          <a:prstGeom prst="line">
+            <a:avLst/>
+          </a:prstGeom>
+          <a:ln w="7620">
+            <a:solidFill>
+              <a:srgbClr val="2E4756"/>
+            </a:solidFill>
+          </a:ln>
+          <a:effectLst/>
+        </p:spPr>
+      </p:cxnSp>
+      <p:sp>
+        <p:nvSpPr>
+          <p:cNvPr id="16" name="C2-E17 text 14" descr="sci-ppt:o014"/>
+          <p:cNvSpPr txBox="1"/>
+          <p:nvPr/>
+        </p:nvSpPr>
+        <p:spPr>
+          <a:xfrm>
+            <a:off x="3529583" y="3008376"/>
+            <a:ext cx="914400" cy="208407"/>
+          </a:xfrm>
+          <a:prstGeom prst="rect">
+            <a:avLst/>
+          </a:prstGeom>
+          <a:noFill/>
+          <a:effectLst/>
+        </p:spPr>
+        <p:txBody>
+          <a:bodyPr wrap="none" lIns="18288" rIns="18288" tIns="18288" bIns="18288" anchor="t">
+            <a:spAutoFit/>
+          </a:bodyPr>
+          <a:lstStyle/>
+          <a:p>
+            <a:pPr algn="ctr">
+              <a:spcAft>
+                <a:spcPts val="0"/>
+              </a:spcAft>
+            </a:pPr>
+            <a:r>
+              <a:rPr sz="1050" b="0" i="0">
+                <a:solidFill>
+                  <a:srgbClr val="B4C7D2"/>
+                </a:solidFill>
+                <a:latin typeface="Arial"/>
+              </a:rPr>
+              <a:t>3</a:t>
+            </a:r>
+          </a:p>
+        </p:txBody>
+      </p:sp>
+      <p:cxnSp>
+        <p:nvCxnSpPr>
+          <p:cNvPr id="17" name="C2-E17 line 15" descr="sci-ppt:o015"/>
+          <p:cNvCxnSpPr/>
+          <p:nvPr/>
+        </p:nvCxnSpPr>
+        <p:spPr>
+          <a:xfrm>
+            <a:off x="5010912" y="2926080"/>
+            <a:ext cx="0" cy="64008"/>
+          </a:xfrm>
+          <a:prstGeom prst="line">
+            <a:avLst/>
+          </a:prstGeom>
+          <a:ln w="12700">
+            <a:solidFill>
+              <a:srgbClr val="B4C7D2"/>
+            </a:solidFill>
+          </a:ln>
+          <a:effectLst/>
+        </p:spPr>
+      </p:cxnSp>
+      <p:cxnSp>
+        <p:nvCxnSpPr>
+          <p:cNvPr id="18" name="C2-E17 line 16" descr="sci-ppt:o016"/>
+          <p:cNvCxnSpPr/>
+          <p:nvPr/>
+        </p:nvCxnSpPr>
+        <p:spPr>
+          <a:xfrm>
+            <a:off x="5010912" y="1371600"/>
+            <a:ext cx="0" cy="1554480"/>
+          </a:xfrm>
+          <a:prstGeom prst="line">
+            <a:avLst/>
+          </a:prstGeom>
+          <a:ln w="7620">
+            <a:solidFill>
+              <a:srgbClr val="2E4756"/>
+            </a:solidFill>
+          </a:ln>
+          <a:effectLst/>
+        </p:spPr>
+      </p:cxnSp>
+      <p:sp>
+        <p:nvSpPr>
+          <p:cNvPr id="19" name="C2-E17 text 17" descr="sci-ppt:o017"/>
+          <p:cNvSpPr txBox="1"/>
+          <p:nvPr/>
+        </p:nvSpPr>
+        <p:spPr>
+          <a:xfrm>
+            <a:off x="4553712" y="3008376"/>
+            <a:ext cx="914400" cy="208407"/>
+          </a:xfrm>
+          <a:prstGeom prst="rect">
+            <a:avLst/>
+          </a:prstGeom>
+          <a:noFill/>
+          <a:effectLst/>
+        </p:spPr>
+        <p:txBody>
+          <a:bodyPr wrap="none" lIns="18288" rIns="18288" tIns="18288" bIns="18288" anchor="t">
+            <a:spAutoFit/>
+          </a:bodyPr>
+          <a:lstStyle/>
+          <a:p>
+            <a:pPr algn="ctr">
+              <a:spcAft>
+                <a:spcPts val="0"/>
+              </a:spcAft>
+            </a:pPr>
+            <a:r>
+              <a:rPr sz="1050" b="0" i="0">
+                <a:solidFill>
+                  <a:srgbClr val="B4C7D2"/>
+                </a:solidFill>
+                <a:latin typeface="Arial"/>
+              </a:rPr>
+              <a:t>4</a:t>
+            </a:r>
+          </a:p>
+        </p:txBody>
+      </p:sp>
+      <p:cxnSp>
+        <p:nvCxnSpPr>
+          <p:cNvPr id="20" name="C2-E17 line 18" descr="sci-ppt:o018"/>
+          <p:cNvCxnSpPr/>
+          <p:nvPr/>
+        </p:nvCxnSpPr>
+        <p:spPr>
+          <a:xfrm>
+            <a:off x="6035040" y="2926080"/>
+            <a:ext cx="0" cy="64008"/>
+          </a:xfrm>
+          <a:prstGeom prst="line">
+            <a:avLst/>
+          </a:prstGeom>
+          <a:ln w="12700">
+            <a:solidFill>
+              <a:srgbClr val="B4C7D2"/>
+            </a:solidFill>
+          </a:ln>
+          <a:effectLst/>
+        </p:spPr>
+      </p:cxnSp>
+      <p:cxnSp>
+        <p:nvCxnSpPr>
+          <p:cNvPr id="21" name="C2-E17 line 19" descr="sci-ppt:o019"/>
+          <p:cNvCxnSpPr/>
+          <p:nvPr/>
+        </p:nvCxnSpPr>
+        <p:spPr>
+          <a:xfrm>
+            <a:off x="6035040" y="1371600"/>
+            <a:ext cx="0" cy="1554480"/>
+          </a:xfrm>
+          <a:prstGeom prst="line">
+            <a:avLst/>
+          </a:prstGeom>
+          <a:ln w="7620">
+            <a:solidFill>
+              <a:srgbClr val="2E4756"/>
+            </a:solidFill>
+          </a:ln>
+          <a:effectLst/>
+        </p:spPr>
+      </p:cxnSp>
+      <p:sp>
+        <p:nvSpPr>
+          <p:cNvPr id="22" name="C2-E17 text 20" descr="sci-ppt:o020"/>
+          <p:cNvSpPr txBox="1"/>
+          <p:nvPr/>
+        </p:nvSpPr>
+        <p:spPr>
+          <a:xfrm>
+            <a:off x="5577840" y="3008376"/>
+            <a:ext cx="914400" cy="208407"/>
+          </a:xfrm>
+          <a:prstGeom prst="rect">
+            <a:avLst/>
+          </a:prstGeom>
+          <a:noFill/>
+          <a:effectLst/>
+        </p:spPr>
+        <p:txBody>
+          <a:bodyPr wrap="none" lIns="18288" rIns="18288" tIns="18288" bIns="18288" anchor="t">
+            <a:spAutoFit/>
+          </a:bodyPr>
+          <a:lstStyle/>
+          <a:p>
+            <a:pPr algn="ctr">
+              <a:spcAft>
+                <a:spcPts val="0"/>
+              </a:spcAft>
+            </a:pPr>
+            <a:r>
+              <a:rPr sz="1050" b="0" i="0">
+                <a:solidFill>
+                  <a:srgbClr val="B4C7D2"/>
+                </a:solidFill>
+                <a:latin typeface="Arial"/>
+              </a:rPr>
+              <a:t>5</a:t>
+            </a:r>
+          </a:p>
+        </p:txBody>
+      </p:sp>
+      <p:cxnSp>
+        <p:nvCxnSpPr>
+          <p:cNvPr id="23" name="C2-E17 line 21" descr="sci-ppt:o021"/>
+          <p:cNvCxnSpPr/>
+          <p:nvPr/>
+        </p:nvCxnSpPr>
+        <p:spPr>
+          <a:xfrm>
+            <a:off x="850392" y="2926080"/>
+            <a:ext cx="64008" cy="0"/>
+          </a:xfrm>
+          <a:prstGeom prst="line">
+            <a:avLst/>
+          </a:prstGeom>
+          <a:ln w="12700">
+            <a:solidFill>
+              <a:srgbClr val="B4C7D2"/>
+            </a:solidFill>
+          </a:ln>
+          <a:effectLst/>
+        </p:spPr>
+      </p:cxnSp>
+      <p:cxnSp>
+        <p:nvCxnSpPr>
+          <p:cNvPr id="24" name="C2-E17 line 22" descr="sci-ppt:o022"/>
+          <p:cNvCxnSpPr/>
+          <p:nvPr/>
+        </p:nvCxnSpPr>
+        <p:spPr>
+          <a:xfrm>
+            <a:off x="850392" y="2328203"/>
+            <a:ext cx="64008" cy="0"/>
+          </a:xfrm>
+          <a:prstGeom prst="line">
+            <a:avLst/>
+          </a:prstGeom>
+          <a:ln w="12700">
+            <a:solidFill>
+              <a:srgbClr val="B4C7D2"/>
+            </a:solidFill>
+          </a:ln>
+          <a:effectLst/>
+        </p:spPr>
+      </p:cxnSp>
+      <p:cxnSp>
+        <p:nvCxnSpPr>
+          <p:cNvPr id="25" name="C2-E17 line 23" descr="sci-ppt:o023"/>
+          <p:cNvCxnSpPr/>
+          <p:nvPr/>
+        </p:nvCxnSpPr>
+        <p:spPr>
+          <a:xfrm>
+            <a:off x="914400" y="2328203"/>
+            <a:ext cx="5120640" cy="0"/>
+          </a:xfrm>
+          <a:prstGeom prst="line">
+            <a:avLst/>
+          </a:prstGeom>
+          <a:ln w="7620">
+            <a:solidFill>
+              <a:srgbClr val="2E4756"/>
+            </a:solidFill>
+          </a:ln>
+          <a:effectLst/>
+        </p:spPr>
+      </p:cxnSp>
+      <p:sp>
+        <p:nvSpPr>
+          <p:cNvPr id="26" name="C2-E17 text 24" descr="sci-ppt:o024"/>
+          <p:cNvSpPr txBox="1"/>
+          <p:nvPr/>
+        </p:nvSpPr>
+        <p:spPr>
+          <a:xfrm>
+            <a:off x="45720" y="2245907"/>
+            <a:ext cx="777240" cy="208407"/>
+          </a:xfrm>
+          <a:prstGeom prst="rect">
+            <a:avLst/>
+          </a:prstGeom>
+          <a:noFill/>
+          <a:effectLst/>
+        </p:spPr>
+        <p:txBody>
+          <a:bodyPr wrap="none" lIns="18288" rIns="18288" tIns="18288" bIns="18288" anchor="t">
+            <a:spAutoFit/>
+          </a:bodyPr>
+          <a:lstStyle/>
+          <a:p>
+            <a:pPr algn="r">
+              <a:spcAft>
+                <a:spcPts val="0"/>
+              </a:spcAft>
+            </a:pPr>
+            <a:r>
+              <a:rPr sz="1050" b="0" i="0">
+                <a:solidFill>
+                  <a:srgbClr val="B4C7D2"/>
+                </a:solidFill>
+                <a:latin typeface="Arial"/>
+              </a:rPr>
+              <a:t>1</a:t>
+            </a:r>
+          </a:p>
+        </p:txBody>
+      </p:sp>
+      <p:cxnSp>
+        <p:nvCxnSpPr>
+          <p:cNvPr id="27" name="C2-E17 line 25" descr="sci-ppt:o025"/>
+          <p:cNvCxnSpPr/>
+          <p:nvPr/>
+        </p:nvCxnSpPr>
+        <p:spPr>
+          <a:xfrm>
+            <a:off x="850392" y="1730326"/>
+            <a:ext cx="64008" cy="0"/>
+          </a:xfrm>
+          <a:prstGeom prst="line">
+            <a:avLst/>
+          </a:prstGeom>
+          <a:ln w="12700">
+            <a:solidFill>
+              <a:srgbClr val="B4C7D2"/>
+            </a:solidFill>
+          </a:ln>
+          <a:effectLst/>
+        </p:spPr>
+      </p:cxnSp>
+      <p:cxnSp>
+        <p:nvCxnSpPr>
+          <p:cNvPr id="28" name="C2-E17 line 26" descr="sci-ppt:o026"/>
+          <p:cNvCxnSpPr/>
+          <p:nvPr/>
+        </p:nvCxnSpPr>
+        <p:spPr>
+          <a:xfrm>
+            <a:off x="914400" y="1730326"/>
+            <a:ext cx="5120640" cy="0"/>
+          </a:xfrm>
+          <a:prstGeom prst="line">
+            <a:avLst/>
+          </a:prstGeom>
+          <a:ln w="7620">
+            <a:solidFill>
+              <a:srgbClr val="2E4756"/>
+            </a:solidFill>
+          </a:ln>
+          <a:effectLst/>
+        </p:spPr>
+      </p:cxnSp>
+      <p:sp>
+        <p:nvSpPr>
+          <p:cNvPr id="29" name="C2-E17 text 27" descr="sci-ppt:o027"/>
+          <p:cNvSpPr txBox="1"/>
+          <p:nvPr/>
+        </p:nvSpPr>
+        <p:spPr>
+          <a:xfrm>
+            <a:off x="45720" y="1648030"/>
+            <a:ext cx="777240" cy="208407"/>
+          </a:xfrm>
+          <a:prstGeom prst="rect">
+            <a:avLst/>
+          </a:prstGeom>
+          <a:noFill/>
+          <a:effectLst/>
+        </p:spPr>
+        <p:txBody>
+          <a:bodyPr wrap="none" lIns="18288" rIns="18288" tIns="18288" bIns="18288" anchor="t">
+            <a:spAutoFit/>
+          </a:bodyPr>
+          <a:lstStyle/>
+          <a:p>
+            <a:pPr algn="r">
+              <a:spcAft>
+                <a:spcPts val="0"/>
+              </a:spcAft>
+            </a:pPr>
+            <a:r>
+              <a:rPr sz="1050" b="0" i="0">
+                <a:solidFill>
+                  <a:srgbClr val="B4C7D2"/>
+                </a:solidFill>
+                <a:latin typeface="Arial"/>
+              </a:rPr>
+              <a:t>2</a:t>
+            </a:r>
+          </a:p>
+        </p:txBody>
+      </p:sp>
+      <p:sp>
+        <p:nvSpPr>
+          <p:cNvPr id="30" name="C2-E17 text 28" descr="sci-ppt:o028"/>
+          <p:cNvSpPr txBox="1"/>
+          <p:nvPr/>
+        </p:nvSpPr>
+        <p:spPr>
+          <a:xfrm>
+            <a:off x="365760" y="1024128"/>
+            <a:ext cx="5120640" cy="231648"/>
+          </a:xfrm>
+          <a:prstGeom prst="rect">
+            <a:avLst/>
+          </a:prstGeom>
+          <a:noFill/>
+          <a:effectLst/>
+        </p:spPr>
+        <p:txBody>
+          <a:bodyPr wrap="none" lIns="18288" rIns="18288" tIns="18288" bIns="18288" anchor="t">
             <a:spAutoFit/>
           </a:bodyPr>
           <a:lstStyle/>
@@ -3197,99 +3903,115 @@
               </a:spcAft>
             </a:pPr>
             <a:r>
-              <a:rPr sz="1728" b="0" i="0">
+              <a:rPr sz="1200" b="0" i="0">
                 <a:solidFill>
                   <a:srgbClr val="E7F0F3"/>
                 </a:solidFill>
                 <a:latin typeface="Arial"/>
               </a:rPr>
-              <a:t>Local rate J(T,p) in V_d</a:t>
+              <a:t>Λ(t)  (1/µs)</a:t>
             </a:r>
           </a:p>
         </p:txBody>
       </p:sp>
       <p:cxnSp>
         <p:nvCxnSpPr>
-          <p:cNvPr id="5" name="arrow4" descr="sci-ppt:C2-E17-004"/>
+          <p:cNvPr id="31" name="C2-E17 line 29" descr="sci-ppt:o029"/>
           <p:cNvCxnSpPr/>
           <p:nvPr/>
         </p:nvCxnSpPr>
         <p:spPr>
           <a:xfrm>
-            <a:off x="5120640" y="2377440"/>
-            <a:ext cx="1097280" cy="0"/>
+            <a:off x="914400" y="5212080"/>
+            <a:ext cx="5120640" cy="0"/>
           </a:xfrm>
           <a:prstGeom prst="line">
             <a:avLst/>
           </a:prstGeom>
-          <a:ln w="25400">
+          <a:ln w="19050">
             <a:solidFill>
-              <a:srgbClr val="8EDBD4"/>
+              <a:srgbClr val="B4C7D2"/>
             </a:solidFill>
-            <a:headEnd type="none" w="med" len="med"/>
-            <a:tailEnd type="triangle" w="med" len="med"/>
           </a:ln>
           <a:effectLst/>
         </p:spPr>
       </p:cxnSp>
       <p:cxnSp>
         <p:nvCxnSpPr>
-          <p:cNvPr id="6" name="arrow5" descr="sci-ppt:C2-E17-005"/>
+          <p:cNvPr id="32" name="C2-E17 line 30" descr="sci-ppt:o030"/>
           <p:cNvCxnSpPr/>
           <p:nvPr/>
         </p:nvCxnSpPr>
         <p:spPr>
           <a:xfrm>
-            <a:off x="6705600" y="3962399"/>
-            <a:ext cx="4267200" cy="0"/>
+            <a:off x="914400" y="3611880"/>
+            <a:ext cx="0" cy="1600200"/>
           </a:xfrm>
           <a:prstGeom prst="line">
             <a:avLst/>
           </a:prstGeom>
-          <a:ln w="25400">
+          <a:ln w="19050">
             <a:solidFill>
-              <a:srgbClr val="8EDBD4"/>
+              <a:srgbClr val="B4C7D2"/>
             </a:solidFill>
-            <a:headEnd type="none" w="med" len="med"/>
-            <a:tailEnd type="triangle" w="med" len="med"/>
           </a:ln>
           <a:effectLst/>
         </p:spPr>
       </p:cxnSp>
       <p:cxnSp>
         <p:nvCxnSpPr>
-          <p:cNvPr id="7" name="arrow6" descr="sci-ppt:C2-E17-006"/>
+          <p:cNvPr id="33" name="C2-E17 line 31" descr="sci-ppt:o031"/>
           <p:cNvCxnSpPr/>
           <p:nvPr/>
         </p:nvCxnSpPr>
         <p:spPr>
-          <a:xfrm flipV="1">
-            <a:off x="6705600" y="1524000"/>
-            <a:ext cx="0" cy="2438399"/>
+          <a:xfrm>
+            <a:off x="914400" y="5212080"/>
+            <a:ext cx="0" cy="64008"/>
           </a:xfrm>
           <a:prstGeom prst="line">
             <a:avLst/>
           </a:prstGeom>
-          <a:ln w="25400">
+          <a:ln w="12700">
             <a:solidFill>
-              <a:srgbClr val="8EDBD4"/>
+              <a:srgbClr val="B4C7D2"/>
             </a:solidFill>
-            <a:headEnd type="none" w="med" len="med"/>
-            <a:tailEnd type="triangle" w="med" len="med"/>
           </a:ln>
           <a:effectLst/>
         </p:spPr>
       </p:cxnSp>
-      <p:sp>
-        <p:nvSpPr>
-          <p:cNvPr id="8" name="text7" descr="sci-ppt:C2-E17-007"/>
+      <p:cxnSp>
+        <p:nvCxnSpPr>
+          <p:cNvPr id="34" name="C2-E17 line 32" descr="sci-ppt:o032"/>
+          <p:cNvCxnSpPr/>
+          <p:nvPr/>
+        </p:nvCxnSpPr>
+        <p:spPr>
+          <a:xfrm>
+            <a:off x="914400" y="3611880"/>
+            <a:ext cx="0" cy="1600200"/>
+          </a:xfrm>
+          <a:prstGeom prst="line">
+            <a:avLst/>
+          </a:prstGeom>
+          <a:ln w="7620">
+            <a:solidFill>
+              <a:srgbClr val="2E4756"/>
+            </a:solidFill>
+          </a:ln>
+          <a:effectLst/>
+        </p:spPr>
+      </p:cxnSp>
+      <p:sp>
+        <p:nvSpPr>
+          <p:cNvPr id="35" name="C2-E17 text 33" descr="sci-ppt:o033"/>
           <p:cNvSpPr txBox="1"/>
           <p:nvPr/>
         </p:nvSpPr>
         <p:spPr>
           <a:xfrm>
-            <a:off x="9997440" y="4084320"/>
-            <a:ext cx="1828800" cy="321259"/>
+            <a:off x="457200" y="5294376"/>
+            <a:ext cx="914400" cy="208407"/>
           </a:xfrm>
           <a:prstGeom prst="rect">
             <a:avLst/>
@@ -3298,7 +4020,697 @@
           <a:effectLst/>
         </p:spPr>
         <p:txBody>
-          <a:bodyPr wrap="none" lIns="27432" rIns="27432" tIns="18288" bIns="18288" anchor="ctr">
+          <a:bodyPr wrap="none" lIns="18288" rIns="18288" tIns="18288" bIns="18288" anchor="t">
+            <a:spAutoFit/>
+          </a:bodyPr>
+          <a:lstStyle/>
+          <a:p>
+            <a:pPr algn="ctr">
+              <a:spcAft>
+                <a:spcPts val="0"/>
+              </a:spcAft>
+            </a:pPr>
+            <a:r>
+              <a:rPr sz="1050" b="0" i="0">
+                <a:solidFill>
+                  <a:srgbClr val="B4C7D2"/>
+                </a:solidFill>
+                <a:latin typeface="Arial"/>
+              </a:rPr>
+              <a:t>0</a:t>
+            </a:r>
+          </a:p>
+        </p:txBody>
+      </p:sp>
+      <p:cxnSp>
+        <p:nvCxnSpPr>
+          <p:cNvPr id="36" name="C2-E17 line 34" descr="sci-ppt:o034"/>
+          <p:cNvCxnSpPr/>
+          <p:nvPr/>
+        </p:nvCxnSpPr>
+        <p:spPr>
+          <a:xfrm>
+            <a:off x="1938528" y="5212080"/>
+            <a:ext cx="0" cy="64008"/>
+          </a:xfrm>
+          <a:prstGeom prst="line">
+            <a:avLst/>
+          </a:prstGeom>
+          <a:ln w="12700">
+            <a:solidFill>
+              <a:srgbClr val="B4C7D2"/>
+            </a:solidFill>
+          </a:ln>
+          <a:effectLst/>
+        </p:spPr>
+      </p:cxnSp>
+      <p:cxnSp>
+        <p:nvCxnSpPr>
+          <p:cNvPr id="37" name="C2-E17 line 35" descr="sci-ppt:o035"/>
+          <p:cNvCxnSpPr/>
+          <p:nvPr/>
+        </p:nvCxnSpPr>
+        <p:spPr>
+          <a:xfrm>
+            <a:off x="1938528" y="3611880"/>
+            <a:ext cx="0" cy="1600200"/>
+          </a:xfrm>
+          <a:prstGeom prst="line">
+            <a:avLst/>
+          </a:prstGeom>
+          <a:ln w="7620">
+            <a:solidFill>
+              <a:srgbClr val="2E4756"/>
+            </a:solidFill>
+          </a:ln>
+          <a:effectLst/>
+        </p:spPr>
+      </p:cxnSp>
+      <p:sp>
+        <p:nvSpPr>
+          <p:cNvPr id="38" name="C2-E17 text 36" descr="sci-ppt:o036"/>
+          <p:cNvSpPr txBox="1"/>
+          <p:nvPr/>
+        </p:nvSpPr>
+        <p:spPr>
+          <a:xfrm>
+            <a:off x="1481328" y="5294376"/>
+            <a:ext cx="914400" cy="208407"/>
+          </a:xfrm>
+          <a:prstGeom prst="rect">
+            <a:avLst/>
+          </a:prstGeom>
+          <a:noFill/>
+          <a:effectLst/>
+        </p:spPr>
+        <p:txBody>
+          <a:bodyPr wrap="none" lIns="18288" rIns="18288" tIns="18288" bIns="18288" anchor="t">
+            <a:spAutoFit/>
+          </a:bodyPr>
+          <a:lstStyle/>
+          <a:p>
+            <a:pPr algn="ctr">
+              <a:spcAft>
+                <a:spcPts val="0"/>
+              </a:spcAft>
+            </a:pPr>
+            <a:r>
+              <a:rPr sz="1050" b="0" i="0">
+                <a:solidFill>
+                  <a:srgbClr val="B4C7D2"/>
+                </a:solidFill>
+                <a:latin typeface="Arial"/>
+              </a:rPr>
+              <a:t>1</a:t>
+            </a:r>
+          </a:p>
+        </p:txBody>
+      </p:sp>
+      <p:cxnSp>
+        <p:nvCxnSpPr>
+          <p:cNvPr id="39" name="C2-E17 line 37" descr="sci-ppt:o037"/>
+          <p:cNvCxnSpPr/>
+          <p:nvPr/>
+        </p:nvCxnSpPr>
+        <p:spPr>
+          <a:xfrm>
+            <a:off x="2962656" y="5212080"/>
+            <a:ext cx="0" cy="64008"/>
+          </a:xfrm>
+          <a:prstGeom prst="line">
+            <a:avLst/>
+          </a:prstGeom>
+          <a:ln w="12700">
+            <a:solidFill>
+              <a:srgbClr val="B4C7D2"/>
+            </a:solidFill>
+          </a:ln>
+          <a:effectLst/>
+        </p:spPr>
+      </p:cxnSp>
+      <p:cxnSp>
+        <p:nvCxnSpPr>
+          <p:cNvPr id="40" name="C2-E17 line 38" descr="sci-ppt:o038"/>
+          <p:cNvCxnSpPr/>
+          <p:nvPr/>
+        </p:nvCxnSpPr>
+        <p:spPr>
+          <a:xfrm>
+            <a:off x="2962656" y="3611880"/>
+            <a:ext cx="0" cy="1600200"/>
+          </a:xfrm>
+          <a:prstGeom prst="line">
+            <a:avLst/>
+          </a:prstGeom>
+          <a:ln w="7620">
+            <a:solidFill>
+              <a:srgbClr val="2E4756"/>
+            </a:solidFill>
+          </a:ln>
+          <a:effectLst/>
+        </p:spPr>
+      </p:cxnSp>
+      <p:sp>
+        <p:nvSpPr>
+          <p:cNvPr id="41" name="C2-E17 text 39" descr="sci-ppt:o039"/>
+          <p:cNvSpPr txBox="1"/>
+          <p:nvPr/>
+        </p:nvSpPr>
+        <p:spPr>
+          <a:xfrm>
+            <a:off x="2505456" y="5294376"/>
+            <a:ext cx="914400" cy="208407"/>
+          </a:xfrm>
+          <a:prstGeom prst="rect">
+            <a:avLst/>
+          </a:prstGeom>
+          <a:noFill/>
+          <a:effectLst/>
+        </p:spPr>
+        <p:txBody>
+          <a:bodyPr wrap="none" lIns="18288" rIns="18288" tIns="18288" bIns="18288" anchor="t">
+            <a:spAutoFit/>
+          </a:bodyPr>
+          <a:lstStyle/>
+          <a:p>
+            <a:pPr algn="ctr">
+              <a:spcAft>
+                <a:spcPts val="0"/>
+              </a:spcAft>
+            </a:pPr>
+            <a:r>
+              <a:rPr sz="1050" b="0" i="0">
+                <a:solidFill>
+                  <a:srgbClr val="B4C7D2"/>
+                </a:solidFill>
+                <a:latin typeface="Arial"/>
+              </a:rPr>
+              <a:t>2</a:t>
+            </a:r>
+          </a:p>
+        </p:txBody>
+      </p:sp>
+      <p:cxnSp>
+        <p:nvCxnSpPr>
+          <p:cNvPr id="42" name="C2-E17 line 40" descr="sci-ppt:o040"/>
+          <p:cNvCxnSpPr/>
+          <p:nvPr/>
+        </p:nvCxnSpPr>
+        <p:spPr>
+          <a:xfrm>
+            <a:off x="3986783" y="5212080"/>
+            <a:ext cx="0" cy="64008"/>
+          </a:xfrm>
+          <a:prstGeom prst="line">
+            <a:avLst/>
+          </a:prstGeom>
+          <a:ln w="12700">
+            <a:solidFill>
+              <a:srgbClr val="B4C7D2"/>
+            </a:solidFill>
+          </a:ln>
+          <a:effectLst/>
+        </p:spPr>
+      </p:cxnSp>
+      <p:cxnSp>
+        <p:nvCxnSpPr>
+          <p:cNvPr id="43" name="C2-E17 line 41" descr="sci-ppt:o041"/>
+          <p:cNvCxnSpPr/>
+          <p:nvPr/>
+        </p:nvCxnSpPr>
+        <p:spPr>
+          <a:xfrm>
+            <a:off x="3986783" y="3611880"/>
+            <a:ext cx="0" cy="1600200"/>
+          </a:xfrm>
+          <a:prstGeom prst="line">
+            <a:avLst/>
+          </a:prstGeom>
+          <a:ln w="7620">
+            <a:solidFill>
+              <a:srgbClr val="2E4756"/>
+            </a:solidFill>
+          </a:ln>
+          <a:effectLst/>
+        </p:spPr>
+      </p:cxnSp>
+      <p:sp>
+        <p:nvSpPr>
+          <p:cNvPr id="44" name="C2-E17 text 42" descr="sci-ppt:o042"/>
+          <p:cNvSpPr txBox="1"/>
+          <p:nvPr/>
+        </p:nvSpPr>
+        <p:spPr>
+          <a:xfrm>
+            <a:off x="3529583" y="5294376"/>
+            <a:ext cx="914400" cy="208407"/>
+          </a:xfrm>
+          <a:prstGeom prst="rect">
+            <a:avLst/>
+          </a:prstGeom>
+          <a:noFill/>
+          <a:effectLst/>
+        </p:spPr>
+        <p:txBody>
+          <a:bodyPr wrap="none" lIns="18288" rIns="18288" tIns="18288" bIns="18288" anchor="t">
+            <a:spAutoFit/>
+          </a:bodyPr>
+          <a:lstStyle/>
+          <a:p>
+            <a:pPr algn="ctr">
+              <a:spcAft>
+                <a:spcPts val="0"/>
+              </a:spcAft>
+            </a:pPr>
+            <a:r>
+              <a:rPr sz="1050" b="0" i="0">
+                <a:solidFill>
+                  <a:srgbClr val="B4C7D2"/>
+                </a:solidFill>
+                <a:latin typeface="Arial"/>
+              </a:rPr>
+              <a:t>3</a:t>
+            </a:r>
+          </a:p>
+        </p:txBody>
+      </p:sp>
+      <p:cxnSp>
+        <p:nvCxnSpPr>
+          <p:cNvPr id="45" name="C2-E17 line 43" descr="sci-ppt:o043"/>
+          <p:cNvCxnSpPr/>
+          <p:nvPr/>
+        </p:nvCxnSpPr>
+        <p:spPr>
+          <a:xfrm>
+            <a:off x="5010912" y="5212080"/>
+            <a:ext cx="0" cy="64008"/>
+          </a:xfrm>
+          <a:prstGeom prst="line">
+            <a:avLst/>
+          </a:prstGeom>
+          <a:ln w="12700">
+            <a:solidFill>
+              <a:srgbClr val="B4C7D2"/>
+            </a:solidFill>
+          </a:ln>
+          <a:effectLst/>
+        </p:spPr>
+      </p:cxnSp>
+      <p:cxnSp>
+        <p:nvCxnSpPr>
+          <p:cNvPr id="46" name="C2-E17 line 44" descr="sci-ppt:o044"/>
+          <p:cNvCxnSpPr/>
+          <p:nvPr/>
+        </p:nvCxnSpPr>
+        <p:spPr>
+          <a:xfrm>
+            <a:off x="5010912" y="3611880"/>
+            <a:ext cx="0" cy="1600200"/>
+          </a:xfrm>
+          <a:prstGeom prst="line">
+            <a:avLst/>
+          </a:prstGeom>
+          <a:ln w="7620">
+            <a:solidFill>
+              <a:srgbClr val="2E4756"/>
+            </a:solidFill>
+          </a:ln>
+          <a:effectLst/>
+        </p:spPr>
+      </p:cxnSp>
+      <p:sp>
+        <p:nvSpPr>
+          <p:cNvPr id="47" name="C2-E17 text 45" descr="sci-ppt:o045"/>
+          <p:cNvSpPr txBox="1"/>
+          <p:nvPr/>
+        </p:nvSpPr>
+        <p:spPr>
+          <a:xfrm>
+            <a:off x="4553712" y="5294376"/>
+            <a:ext cx="914400" cy="208407"/>
+          </a:xfrm>
+          <a:prstGeom prst="rect">
+            <a:avLst/>
+          </a:prstGeom>
+          <a:noFill/>
+          <a:effectLst/>
+        </p:spPr>
+        <p:txBody>
+          <a:bodyPr wrap="none" lIns="18288" rIns="18288" tIns="18288" bIns="18288" anchor="t">
+            <a:spAutoFit/>
+          </a:bodyPr>
+          <a:lstStyle/>
+          <a:p>
+            <a:pPr algn="ctr">
+              <a:spcAft>
+                <a:spcPts val="0"/>
+              </a:spcAft>
+            </a:pPr>
+            <a:r>
+              <a:rPr sz="1050" b="0" i="0">
+                <a:solidFill>
+                  <a:srgbClr val="B4C7D2"/>
+                </a:solidFill>
+                <a:latin typeface="Arial"/>
+              </a:rPr>
+              <a:t>4</a:t>
+            </a:r>
+          </a:p>
+        </p:txBody>
+      </p:sp>
+      <p:cxnSp>
+        <p:nvCxnSpPr>
+          <p:cNvPr id="48" name="C2-E17 line 46" descr="sci-ppt:o046"/>
+          <p:cNvCxnSpPr/>
+          <p:nvPr/>
+        </p:nvCxnSpPr>
+        <p:spPr>
+          <a:xfrm>
+            <a:off x="6035040" y="5212080"/>
+            <a:ext cx="0" cy="64008"/>
+          </a:xfrm>
+          <a:prstGeom prst="line">
+            <a:avLst/>
+          </a:prstGeom>
+          <a:ln w="12700">
+            <a:solidFill>
+              <a:srgbClr val="B4C7D2"/>
+            </a:solidFill>
+          </a:ln>
+          <a:effectLst/>
+        </p:spPr>
+      </p:cxnSp>
+      <p:cxnSp>
+        <p:nvCxnSpPr>
+          <p:cNvPr id="49" name="C2-E17 line 47" descr="sci-ppt:o047"/>
+          <p:cNvCxnSpPr/>
+          <p:nvPr/>
+        </p:nvCxnSpPr>
+        <p:spPr>
+          <a:xfrm>
+            <a:off x="6035040" y="3611880"/>
+            <a:ext cx="0" cy="1600200"/>
+          </a:xfrm>
+          <a:prstGeom prst="line">
+            <a:avLst/>
+          </a:prstGeom>
+          <a:ln w="7620">
+            <a:solidFill>
+              <a:srgbClr val="2E4756"/>
+            </a:solidFill>
+          </a:ln>
+          <a:effectLst/>
+        </p:spPr>
+      </p:cxnSp>
+      <p:sp>
+        <p:nvSpPr>
+          <p:cNvPr id="50" name="C2-E17 text 48" descr="sci-ppt:o048"/>
+          <p:cNvSpPr txBox="1"/>
+          <p:nvPr/>
+        </p:nvSpPr>
+        <p:spPr>
+          <a:xfrm>
+            <a:off x="5577840" y="5294376"/>
+            <a:ext cx="914400" cy="208407"/>
+          </a:xfrm>
+          <a:prstGeom prst="rect">
+            <a:avLst/>
+          </a:prstGeom>
+          <a:noFill/>
+          <a:effectLst/>
+        </p:spPr>
+        <p:txBody>
+          <a:bodyPr wrap="none" lIns="18288" rIns="18288" tIns="18288" bIns="18288" anchor="t">
+            <a:spAutoFit/>
+          </a:bodyPr>
+          <a:lstStyle/>
+          <a:p>
+            <a:pPr algn="ctr">
+              <a:spcAft>
+                <a:spcPts val="0"/>
+              </a:spcAft>
+            </a:pPr>
+            <a:r>
+              <a:rPr sz="1050" b="0" i="0">
+                <a:solidFill>
+                  <a:srgbClr val="B4C7D2"/>
+                </a:solidFill>
+                <a:latin typeface="Arial"/>
+              </a:rPr>
+              <a:t>5</a:t>
+            </a:r>
+          </a:p>
+        </p:txBody>
+      </p:sp>
+      <p:cxnSp>
+        <p:nvCxnSpPr>
+          <p:cNvPr id="51" name="C2-E17 line 49" descr="sci-ppt:o049"/>
+          <p:cNvCxnSpPr/>
+          <p:nvPr/>
+        </p:nvCxnSpPr>
+        <p:spPr>
+          <a:xfrm>
+            <a:off x="850392" y="5212080"/>
+            <a:ext cx="64008" cy="0"/>
+          </a:xfrm>
+          <a:prstGeom prst="line">
+            <a:avLst/>
+          </a:prstGeom>
+          <a:ln w="12700">
+            <a:solidFill>
+              <a:srgbClr val="B4C7D2"/>
+            </a:solidFill>
+          </a:ln>
+          <a:effectLst/>
+        </p:spPr>
+      </p:cxnSp>
+      <p:cxnSp>
+        <p:nvCxnSpPr>
+          <p:cNvPr id="52" name="C2-E17 line 50" descr="sci-ppt:o050"/>
+          <p:cNvCxnSpPr/>
+          <p:nvPr/>
+        </p:nvCxnSpPr>
+        <p:spPr>
+          <a:xfrm>
+            <a:off x="850392" y="4450080"/>
+            <a:ext cx="64008" cy="0"/>
+          </a:xfrm>
+          <a:prstGeom prst="line">
+            <a:avLst/>
+          </a:prstGeom>
+          <a:ln w="12700">
+            <a:solidFill>
+              <a:srgbClr val="B4C7D2"/>
+            </a:solidFill>
+          </a:ln>
+          <a:effectLst/>
+        </p:spPr>
+      </p:cxnSp>
+      <p:cxnSp>
+        <p:nvCxnSpPr>
+          <p:cNvPr id="53" name="C2-E17 line 51" descr="sci-ppt:o051"/>
+          <p:cNvCxnSpPr/>
+          <p:nvPr/>
+        </p:nvCxnSpPr>
+        <p:spPr>
+          <a:xfrm>
+            <a:off x="914400" y="4450080"/>
+            <a:ext cx="5120640" cy="0"/>
+          </a:xfrm>
+          <a:prstGeom prst="line">
+            <a:avLst/>
+          </a:prstGeom>
+          <a:ln w="7620">
+            <a:solidFill>
+              <a:srgbClr val="2E4756"/>
+            </a:solidFill>
+          </a:ln>
+          <a:effectLst/>
+        </p:spPr>
+      </p:cxnSp>
+      <p:sp>
+        <p:nvSpPr>
+          <p:cNvPr id="54" name="C2-E17 text 52" descr="sci-ppt:o052"/>
+          <p:cNvSpPr txBox="1"/>
+          <p:nvPr/>
+        </p:nvSpPr>
+        <p:spPr>
+          <a:xfrm>
+            <a:off x="45720" y="4367784"/>
+            <a:ext cx="777240" cy="208407"/>
+          </a:xfrm>
+          <a:prstGeom prst="rect">
+            <a:avLst/>
+          </a:prstGeom>
+          <a:noFill/>
+          <a:effectLst/>
+        </p:spPr>
+        <p:txBody>
+          <a:bodyPr wrap="none" lIns="18288" rIns="18288" tIns="18288" bIns="18288" anchor="t">
+            <a:spAutoFit/>
+          </a:bodyPr>
+          <a:lstStyle/>
+          <a:p>
+            <a:pPr algn="r">
+              <a:spcAft>
+                <a:spcPts val="0"/>
+              </a:spcAft>
+            </a:pPr>
+            <a:r>
+              <a:rPr sz="1050" b="0" i="0">
+                <a:solidFill>
+                  <a:srgbClr val="B4C7D2"/>
+                </a:solidFill>
+                <a:latin typeface="Arial"/>
+              </a:rPr>
+              <a:t>0.5</a:t>
+            </a:r>
+          </a:p>
+        </p:txBody>
+      </p:sp>
+      <p:cxnSp>
+        <p:nvCxnSpPr>
+          <p:cNvPr id="55" name="C2-E17 line 53" descr="sci-ppt:o053"/>
+          <p:cNvCxnSpPr/>
+          <p:nvPr/>
+        </p:nvCxnSpPr>
+        <p:spPr>
+          <a:xfrm>
+            <a:off x="850392" y="3688080"/>
+            <a:ext cx="64008" cy="0"/>
+          </a:xfrm>
+          <a:prstGeom prst="line">
+            <a:avLst/>
+          </a:prstGeom>
+          <a:ln w="12700">
+            <a:solidFill>
+              <a:srgbClr val="B4C7D2"/>
+            </a:solidFill>
+          </a:ln>
+          <a:effectLst/>
+        </p:spPr>
+      </p:cxnSp>
+      <p:cxnSp>
+        <p:nvCxnSpPr>
+          <p:cNvPr id="56" name="C2-E17 line 54" descr="sci-ppt:o054"/>
+          <p:cNvCxnSpPr/>
+          <p:nvPr/>
+        </p:nvCxnSpPr>
+        <p:spPr>
+          <a:xfrm>
+            <a:off x="914400" y="3688080"/>
+            <a:ext cx="5120640" cy="0"/>
+          </a:xfrm>
+          <a:prstGeom prst="line">
+            <a:avLst/>
+          </a:prstGeom>
+          <a:ln w="7620">
+            <a:solidFill>
+              <a:srgbClr val="2E4756"/>
+            </a:solidFill>
+          </a:ln>
+          <a:effectLst/>
+        </p:spPr>
+      </p:cxnSp>
+      <p:sp>
+        <p:nvSpPr>
+          <p:cNvPr id="57" name="C2-E17 text 55" descr="sci-ppt:o055"/>
+          <p:cNvSpPr txBox="1"/>
+          <p:nvPr/>
+        </p:nvSpPr>
+        <p:spPr>
+          <a:xfrm>
+            <a:off x="45720" y="3605784"/>
+            <a:ext cx="777240" cy="208407"/>
+          </a:xfrm>
+          <a:prstGeom prst="rect">
+            <a:avLst/>
+          </a:prstGeom>
+          <a:noFill/>
+          <a:effectLst/>
+        </p:spPr>
+        <p:txBody>
+          <a:bodyPr wrap="none" lIns="18288" rIns="18288" tIns="18288" bIns="18288" anchor="t">
+            <a:spAutoFit/>
+          </a:bodyPr>
+          <a:lstStyle/>
+          <a:p>
+            <a:pPr algn="r">
+              <a:spcAft>
+                <a:spcPts val="0"/>
+              </a:spcAft>
+            </a:pPr>
+            <a:r>
+              <a:rPr sz="1050" b="0" i="0">
+                <a:solidFill>
+                  <a:srgbClr val="B4C7D2"/>
+                </a:solidFill>
+                <a:latin typeface="Arial"/>
+              </a:rPr>
+              <a:t>1.0</a:t>
+            </a:r>
+          </a:p>
+        </p:txBody>
+      </p:sp>
+      <p:sp>
+        <p:nvSpPr>
+          <p:cNvPr id="58" name="C2-E17 text 56" descr="sci-ppt:o056"/>
+          <p:cNvSpPr txBox="1"/>
+          <p:nvPr/>
+        </p:nvSpPr>
+        <p:spPr>
+          <a:xfrm>
+            <a:off x="914400" y="5495544"/>
+            <a:ext cx="5120640" cy="231648"/>
+          </a:xfrm>
+          <a:prstGeom prst="rect">
+            <a:avLst/>
+          </a:prstGeom>
+          <a:noFill/>
+          <a:effectLst/>
+        </p:spPr>
+        <p:txBody>
+          <a:bodyPr wrap="none" lIns="18288" rIns="18288" tIns="18288" bIns="18288" anchor="t">
+            <a:spAutoFit/>
+          </a:bodyPr>
+          <a:lstStyle/>
+          <a:p>
+            <a:pPr algn="ctr">
+              <a:spcAft>
+                <a:spcPts val="0"/>
+              </a:spcAft>
+            </a:pPr>
+            <a:r>
+              <a:rPr sz="1200" b="0" i="0">
+                <a:solidFill>
+                  <a:srgbClr val="E7F0F3"/>
+                </a:solidFill>
+                <a:latin typeface="Arial"/>
+              </a:rPr>
+              <a:t>t  (µs)</a:t>
+            </a:r>
+          </a:p>
+        </p:txBody>
+      </p:sp>
+      <p:sp>
+        <p:nvSpPr>
+          <p:cNvPr id="59" name="C2-E17 text 57" descr="sci-ppt:o057"/>
+          <p:cNvSpPr txBox="1"/>
+          <p:nvPr/>
+        </p:nvSpPr>
+        <p:spPr>
+          <a:xfrm>
+            <a:off x="365760" y="3264408"/>
+            <a:ext cx="5120640" cy="231648"/>
+          </a:xfrm>
+          <a:prstGeom prst="rect">
+            <a:avLst/>
+          </a:prstGeom>
+          <a:noFill/>
+          <a:effectLst/>
+        </p:spPr>
+        <p:txBody>
+          <a:bodyPr wrap="none" lIns="18288" rIns="18288" tIns="18288" bIns="18288" anchor="t">
             <a:spAutoFit/>
           </a:bodyPr>
           <a:lstStyle/>
@@ -3309,47 +4721,7 @@
               </a:spcAft>
             </a:pPr>
             <a:r>
-              <a:rPr sz="1632" b="0" i="0">
-                <a:solidFill>
-                  <a:srgbClr val="E7F0F3"/>
-                </a:solidFill>
-                <a:latin typeface="Arial"/>
-              </a:rPr>
-              <a:t>Integrated hazard</a:t>
-            </a:r>
-          </a:p>
-        </p:txBody>
-      </p:sp>
-      <p:sp>
-        <p:nvSpPr>
-          <p:cNvPr id="9" name="text8" descr="sci-ppt:C2-E17-008"/>
-          <p:cNvSpPr txBox="1"/>
-          <p:nvPr/>
-        </p:nvSpPr>
-        <p:spPr>
-          <a:xfrm>
-            <a:off x="6583680" y="1158240"/>
-            <a:ext cx="3657600" cy="321259"/>
-          </a:xfrm>
-          <a:prstGeom prst="rect">
-            <a:avLst/>
-          </a:prstGeom>
-          <a:noFill/>
-          <a:effectLst/>
-        </p:spPr>
-        <p:txBody>
-          <a:bodyPr wrap="none" lIns="27432" rIns="27432" tIns="18288" bIns="18288" anchor="ctr">
-            <a:spAutoFit/>
-          </a:bodyPr>
-          <a:lstStyle/>
-          <a:p>
-            <a:pPr algn="l">
-              <a:spcAft>
-                <a:spcPts val="0"/>
-              </a:spcAft>
-            </a:pPr>
-            <a:r>
-              <a:rPr sz="1632" b="0" i="0">
+              <a:rPr sz="1200" b="0" i="0">
                 <a:solidFill>
                   <a:srgbClr val="E7F0F3"/>
                 </a:solidFill>
@@ -3360,786 +4732,3468 @@
           </a:p>
         </p:txBody>
       </p:sp>
-      <p:cxnSp>
-        <p:nvCxnSpPr>
-          <p:cNvPr id="10" name="line9" descr="sci-ppt:C2-E17-009"/>
-          <p:cNvCxnSpPr/>
+      <p:sp>
+        <p:nvSpPr>
+          <p:cNvPr id="60" name="C2-E17 polygon 58" descr="sci-ppt:o058"/>
+          <p:cNvSpPr/>
           <p:nvPr/>
-        </p:nvCxnSpPr>
-        <p:spPr>
-          <a:xfrm flipV="1">
-            <a:off x="6766560" y="3716163"/>
-            <a:ext cx="114953" cy="185277"/>
-          </a:xfrm>
-          <a:prstGeom prst="line">
+        </p:nvSpPr>
+        <p:spPr>
+          <a:xfrm>
+            <a:off x="914400" y="1730326"/>
+            <a:ext cx="5120640" cy="1195754"/>
+          </a:xfrm>
+          <a:custGeom>
             <a:avLst/>
-          </a:prstGeom>
-          <a:ln w="25400">
+            <a:gdLst/>
+            <a:ahLst/>
+            <a:cxnLst/>
+            <a:rect l="l" t="t" r="r" b="b"/>
+            <a:pathLst>
+              <a:path w="5120640" h="1195754">
+                <a:moveTo>
+                  <a:pt x="0" y="0"/>
+                </a:moveTo>
+                <a:lnTo>
+                  <a:pt x="30785" y="0"/>
+                </a:lnTo>
+                <a:lnTo>
+                  <a:pt x="61570" y="0"/>
+                </a:lnTo>
+                <a:lnTo>
+                  <a:pt x="92356" y="0"/>
+                </a:lnTo>
+                <a:lnTo>
+                  <a:pt x="123141" y="0"/>
+                </a:lnTo>
+                <a:lnTo>
+                  <a:pt x="153927" y="0"/>
+                </a:lnTo>
+                <a:lnTo>
+                  <a:pt x="184712" y="0"/>
+                </a:lnTo>
+                <a:lnTo>
+                  <a:pt x="215497" y="0"/>
+                </a:lnTo>
+                <a:lnTo>
+                  <a:pt x="246283" y="0"/>
+                </a:lnTo>
+                <a:lnTo>
+                  <a:pt x="277068" y="0"/>
+                </a:lnTo>
+                <a:lnTo>
+                  <a:pt x="307854" y="0"/>
+                </a:lnTo>
+                <a:lnTo>
+                  <a:pt x="338639" y="0"/>
+                </a:lnTo>
+                <a:lnTo>
+                  <a:pt x="369424" y="0"/>
+                </a:lnTo>
+                <a:lnTo>
+                  <a:pt x="400210" y="0"/>
+                </a:lnTo>
+                <a:lnTo>
+                  <a:pt x="430995" y="0"/>
+                </a:lnTo>
+                <a:lnTo>
+                  <a:pt x="461781" y="0"/>
+                </a:lnTo>
+                <a:lnTo>
+                  <a:pt x="492566" y="0"/>
+                </a:lnTo>
+                <a:lnTo>
+                  <a:pt x="523351" y="0"/>
+                </a:lnTo>
+                <a:lnTo>
+                  <a:pt x="554137" y="0"/>
+                </a:lnTo>
+                <a:lnTo>
+                  <a:pt x="584922" y="0"/>
+                </a:lnTo>
+                <a:lnTo>
+                  <a:pt x="615708" y="0"/>
+                </a:lnTo>
+                <a:lnTo>
+                  <a:pt x="646493" y="0"/>
+                </a:lnTo>
+                <a:lnTo>
+                  <a:pt x="677279" y="0"/>
+                </a:lnTo>
+                <a:lnTo>
+                  <a:pt x="708064" y="0"/>
+                </a:lnTo>
+                <a:lnTo>
+                  <a:pt x="738849" y="0"/>
+                </a:lnTo>
+                <a:lnTo>
+                  <a:pt x="769635" y="0"/>
+                </a:lnTo>
+                <a:lnTo>
+                  <a:pt x="800420" y="0"/>
+                </a:lnTo>
+                <a:lnTo>
+                  <a:pt x="831206" y="0"/>
+                </a:lnTo>
+                <a:lnTo>
+                  <a:pt x="861991" y="0"/>
+                </a:lnTo>
+                <a:lnTo>
+                  <a:pt x="892776" y="0"/>
+                </a:lnTo>
+                <a:lnTo>
+                  <a:pt x="923562" y="0"/>
+                </a:lnTo>
+                <a:lnTo>
+                  <a:pt x="954347" y="0"/>
+                </a:lnTo>
+                <a:lnTo>
+                  <a:pt x="985133" y="0"/>
+                </a:lnTo>
+                <a:lnTo>
+                  <a:pt x="1015918" y="0"/>
+                </a:lnTo>
+                <a:lnTo>
+                  <a:pt x="1046703" y="1195754"/>
+                </a:lnTo>
+                <a:lnTo>
+                  <a:pt x="1077489" y="1195754"/>
+                </a:lnTo>
+                <a:lnTo>
+                  <a:pt x="1108274" y="1195754"/>
+                </a:lnTo>
+                <a:lnTo>
+                  <a:pt x="1139060" y="1195754"/>
+                </a:lnTo>
+                <a:lnTo>
+                  <a:pt x="1169845" y="1195754"/>
+                </a:lnTo>
+                <a:lnTo>
+                  <a:pt x="1200631" y="1195754"/>
+                </a:lnTo>
+                <a:lnTo>
+                  <a:pt x="1231416" y="1195754"/>
+                </a:lnTo>
+                <a:lnTo>
+                  <a:pt x="1262201" y="1195754"/>
+                </a:lnTo>
+                <a:lnTo>
+                  <a:pt x="1292987" y="1195754"/>
+                </a:lnTo>
+                <a:lnTo>
+                  <a:pt x="1323772" y="1195754"/>
+                </a:lnTo>
+                <a:lnTo>
+                  <a:pt x="1354558" y="1195754"/>
+                </a:lnTo>
+                <a:lnTo>
+                  <a:pt x="1385343" y="1195754"/>
+                </a:lnTo>
+                <a:lnTo>
+                  <a:pt x="1416128" y="1195754"/>
+                </a:lnTo>
+                <a:lnTo>
+                  <a:pt x="1446914" y="1195754"/>
+                </a:lnTo>
+                <a:lnTo>
+                  <a:pt x="1477699" y="1195754"/>
+                </a:lnTo>
+                <a:lnTo>
+                  <a:pt x="1508485" y="1195754"/>
+                </a:lnTo>
+                <a:lnTo>
+                  <a:pt x="1539270" y="1195754"/>
+                </a:lnTo>
+                <a:lnTo>
+                  <a:pt x="1570055" y="1195754"/>
+                </a:lnTo>
+                <a:lnTo>
+                  <a:pt x="1600841" y="1195754"/>
+                </a:lnTo>
+                <a:lnTo>
+                  <a:pt x="1631626" y="1195754"/>
+                </a:lnTo>
+                <a:lnTo>
+                  <a:pt x="1662412" y="1195754"/>
+                </a:lnTo>
+                <a:lnTo>
+                  <a:pt x="1693197" y="1195754"/>
+                </a:lnTo>
+                <a:lnTo>
+                  <a:pt x="1723983" y="1195754"/>
+                </a:lnTo>
+                <a:lnTo>
+                  <a:pt x="1754768" y="1195754"/>
+                </a:lnTo>
+                <a:lnTo>
+                  <a:pt x="1785553" y="1195754"/>
+                </a:lnTo>
+                <a:lnTo>
+                  <a:pt x="1816339" y="1195754"/>
+                </a:lnTo>
+                <a:lnTo>
+                  <a:pt x="1847124" y="1195754"/>
+                </a:lnTo>
+                <a:lnTo>
+                  <a:pt x="1877910" y="1195754"/>
+                </a:lnTo>
+                <a:lnTo>
+                  <a:pt x="1908695" y="1195754"/>
+                </a:lnTo>
+                <a:lnTo>
+                  <a:pt x="1939480" y="1195754"/>
+                </a:lnTo>
+                <a:lnTo>
+                  <a:pt x="1970266" y="1195754"/>
+                </a:lnTo>
+                <a:lnTo>
+                  <a:pt x="2001051" y="1195754"/>
+                </a:lnTo>
+                <a:lnTo>
+                  <a:pt x="2031837" y="1195754"/>
+                </a:lnTo>
+                <a:lnTo>
+                  <a:pt x="2062622" y="1195754"/>
+                </a:lnTo>
+                <a:lnTo>
+                  <a:pt x="2093407" y="1195754"/>
+                </a:lnTo>
+                <a:lnTo>
+                  <a:pt x="2124193" y="1195754"/>
+                </a:lnTo>
+                <a:lnTo>
+                  <a:pt x="2154978" y="1195754"/>
+                </a:lnTo>
+                <a:lnTo>
+                  <a:pt x="2185764" y="1195754"/>
+                </a:lnTo>
+                <a:lnTo>
+                  <a:pt x="2216549" y="1195754"/>
+                </a:lnTo>
+                <a:lnTo>
+                  <a:pt x="2247334" y="1195754"/>
+                </a:lnTo>
+                <a:lnTo>
+                  <a:pt x="2278120" y="1195754"/>
+                </a:lnTo>
+                <a:lnTo>
+                  <a:pt x="2308905" y="1195754"/>
+                </a:lnTo>
+                <a:lnTo>
+                  <a:pt x="2339691" y="1195754"/>
+                </a:lnTo>
+                <a:lnTo>
+                  <a:pt x="2370476" y="1195754"/>
+                </a:lnTo>
+                <a:lnTo>
+                  <a:pt x="2401262" y="1195754"/>
+                </a:lnTo>
+                <a:lnTo>
+                  <a:pt x="2432047" y="1195754"/>
+                </a:lnTo>
+                <a:lnTo>
+                  <a:pt x="2462832" y="1195754"/>
+                </a:lnTo>
+                <a:lnTo>
+                  <a:pt x="2493618" y="1195754"/>
+                </a:lnTo>
+                <a:lnTo>
+                  <a:pt x="2524403" y="1195754"/>
+                </a:lnTo>
+                <a:lnTo>
+                  <a:pt x="2555189" y="1195754"/>
+                </a:lnTo>
+                <a:lnTo>
+                  <a:pt x="2585974" y="1195754"/>
+                </a:lnTo>
+                <a:lnTo>
+                  <a:pt x="2616759" y="1195754"/>
+                </a:lnTo>
+                <a:lnTo>
+                  <a:pt x="2647545" y="1195754"/>
+                </a:lnTo>
+                <a:lnTo>
+                  <a:pt x="2678330" y="1195754"/>
+                </a:lnTo>
+                <a:lnTo>
+                  <a:pt x="2709116" y="1195754"/>
+                </a:lnTo>
+                <a:lnTo>
+                  <a:pt x="2739901" y="1195754"/>
+                </a:lnTo>
+                <a:lnTo>
+                  <a:pt x="2770686" y="1195754"/>
+                </a:lnTo>
+                <a:lnTo>
+                  <a:pt x="2801472" y="1195754"/>
+                </a:lnTo>
+                <a:lnTo>
+                  <a:pt x="2832257" y="1195754"/>
+                </a:lnTo>
+                <a:lnTo>
+                  <a:pt x="2863043" y="1195754"/>
+                </a:lnTo>
+                <a:lnTo>
+                  <a:pt x="2893828" y="1195754"/>
+                </a:lnTo>
+                <a:lnTo>
+                  <a:pt x="2924614" y="1195754"/>
+                </a:lnTo>
+                <a:lnTo>
+                  <a:pt x="2955399" y="1195754"/>
+                </a:lnTo>
+                <a:lnTo>
+                  <a:pt x="2986184" y="1195754"/>
+                </a:lnTo>
+                <a:lnTo>
+                  <a:pt x="3016970" y="1195754"/>
+                </a:lnTo>
+                <a:lnTo>
+                  <a:pt x="3047755" y="1195754"/>
+                </a:lnTo>
+                <a:lnTo>
+                  <a:pt x="3078541" y="1195754"/>
+                </a:lnTo>
+                <a:lnTo>
+                  <a:pt x="3109326" y="1195754"/>
+                </a:lnTo>
+                <a:lnTo>
+                  <a:pt x="3140111" y="1195754"/>
+                </a:lnTo>
+                <a:lnTo>
+                  <a:pt x="3170897" y="1195754"/>
+                </a:lnTo>
+                <a:lnTo>
+                  <a:pt x="3201682" y="1195754"/>
+                </a:lnTo>
+                <a:lnTo>
+                  <a:pt x="3232468" y="1195754"/>
+                </a:lnTo>
+                <a:lnTo>
+                  <a:pt x="3263253" y="1195754"/>
+                </a:lnTo>
+                <a:lnTo>
+                  <a:pt x="3294038" y="1195754"/>
+                </a:lnTo>
+                <a:lnTo>
+                  <a:pt x="3324824" y="1195754"/>
+                </a:lnTo>
+                <a:lnTo>
+                  <a:pt x="3355609" y="1195754"/>
+                </a:lnTo>
+                <a:lnTo>
+                  <a:pt x="3386395" y="1195754"/>
+                </a:lnTo>
+                <a:lnTo>
+                  <a:pt x="3417180" y="1195754"/>
+                </a:lnTo>
+                <a:lnTo>
+                  <a:pt x="3447966" y="1195754"/>
+                </a:lnTo>
+                <a:lnTo>
+                  <a:pt x="3478751" y="1195754"/>
+                </a:lnTo>
+                <a:lnTo>
+                  <a:pt x="3509536" y="1195754"/>
+                </a:lnTo>
+                <a:lnTo>
+                  <a:pt x="3540322" y="1195754"/>
+                </a:lnTo>
+                <a:lnTo>
+                  <a:pt x="3571107" y="1195754"/>
+                </a:lnTo>
+                <a:lnTo>
+                  <a:pt x="3601893" y="1195754"/>
+                </a:lnTo>
+                <a:lnTo>
+                  <a:pt x="3632678" y="1195754"/>
+                </a:lnTo>
+                <a:lnTo>
+                  <a:pt x="3663463" y="1195754"/>
+                </a:lnTo>
+                <a:lnTo>
+                  <a:pt x="3694249" y="1195754"/>
+                </a:lnTo>
+                <a:lnTo>
+                  <a:pt x="3725034" y="1195754"/>
+                </a:lnTo>
+                <a:lnTo>
+                  <a:pt x="3755820" y="1195754"/>
+                </a:lnTo>
+                <a:lnTo>
+                  <a:pt x="3786605" y="1195754"/>
+                </a:lnTo>
+                <a:lnTo>
+                  <a:pt x="3817390" y="1195754"/>
+                </a:lnTo>
+                <a:lnTo>
+                  <a:pt x="3848176" y="1195754"/>
+                </a:lnTo>
+                <a:lnTo>
+                  <a:pt x="3878961" y="1195754"/>
+                </a:lnTo>
+                <a:lnTo>
+                  <a:pt x="3909747" y="1195754"/>
+                </a:lnTo>
+                <a:lnTo>
+                  <a:pt x="3940532" y="1195754"/>
+                </a:lnTo>
+                <a:lnTo>
+                  <a:pt x="3971317" y="1195754"/>
+                </a:lnTo>
+                <a:lnTo>
+                  <a:pt x="4002103" y="1195754"/>
+                </a:lnTo>
+                <a:lnTo>
+                  <a:pt x="4032888" y="1195754"/>
+                </a:lnTo>
+                <a:lnTo>
+                  <a:pt x="4063674" y="1195754"/>
+                </a:lnTo>
+                <a:lnTo>
+                  <a:pt x="4094459" y="1195754"/>
+                </a:lnTo>
+                <a:lnTo>
+                  <a:pt x="4125245" y="1195754"/>
+                </a:lnTo>
+                <a:lnTo>
+                  <a:pt x="4156030" y="1195754"/>
+                </a:lnTo>
+                <a:lnTo>
+                  <a:pt x="4186815" y="1195754"/>
+                </a:lnTo>
+                <a:lnTo>
+                  <a:pt x="4217601" y="1195754"/>
+                </a:lnTo>
+                <a:lnTo>
+                  <a:pt x="4248386" y="1195754"/>
+                </a:lnTo>
+                <a:lnTo>
+                  <a:pt x="4279172" y="1195754"/>
+                </a:lnTo>
+                <a:lnTo>
+                  <a:pt x="4309957" y="1195754"/>
+                </a:lnTo>
+                <a:lnTo>
+                  <a:pt x="4340742" y="1195754"/>
+                </a:lnTo>
+                <a:lnTo>
+                  <a:pt x="4371528" y="1195754"/>
+                </a:lnTo>
+                <a:lnTo>
+                  <a:pt x="4402313" y="1195754"/>
+                </a:lnTo>
+                <a:lnTo>
+                  <a:pt x="4433099" y="1195754"/>
+                </a:lnTo>
+                <a:lnTo>
+                  <a:pt x="4463884" y="1195754"/>
+                </a:lnTo>
+                <a:lnTo>
+                  <a:pt x="4494669" y="1195754"/>
+                </a:lnTo>
+                <a:lnTo>
+                  <a:pt x="4525455" y="1195754"/>
+                </a:lnTo>
+                <a:lnTo>
+                  <a:pt x="4556240" y="1195754"/>
+                </a:lnTo>
+                <a:lnTo>
+                  <a:pt x="4587026" y="1195754"/>
+                </a:lnTo>
+                <a:lnTo>
+                  <a:pt x="4617811" y="1195754"/>
+                </a:lnTo>
+                <a:lnTo>
+                  <a:pt x="4648597" y="1195754"/>
+                </a:lnTo>
+                <a:lnTo>
+                  <a:pt x="4679382" y="1195754"/>
+                </a:lnTo>
+                <a:lnTo>
+                  <a:pt x="4710167" y="1195754"/>
+                </a:lnTo>
+                <a:lnTo>
+                  <a:pt x="4740953" y="1195754"/>
+                </a:lnTo>
+                <a:lnTo>
+                  <a:pt x="4771738" y="1195754"/>
+                </a:lnTo>
+                <a:lnTo>
+                  <a:pt x="4802524" y="1195754"/>
+                </a:lnTo>
+                <a:lnTo>
+                  <a:pt x="4833309" y="1195754"/>
+                </a:lnTo>
+                <a:lnTo>
+                  <a:pt x="4864094" y="1195754"/>
+                </a:lnTo>
+                <a:lnTo>
+                  <a:pt x="4894880" y="1195754"/>
+                </a:lnTo>
+                <a:lnTo>
+                  <a:pt x="4925665" y="1195754"/>
+                </a:lnTo>
+                <a:lnTo>
+                  <a:pt x="4956451" y="1195754"/>
+                </a:lnTo>
+                <a:lnTo>
+                  <a:pt x="4987236" y="1195754"/>
+                </a:lnTo>
+                <a:lnTo>
+                  <a:pt x="5018021" y="1195754"/>
+                </a:lnTo>
+                <a:lnTo>
+                  <a:pt x="5048807" y="1195754"/>
+                </a:lnTo>
+                <a:lnTo>
+                  <a:pt x="5079592" y="1195754"/>
+                </a:lnTo>
+                <a:lnTo>
+                  <a:pt x="5110378" y="1195754"/>
+                </a:lnTo>
+                <a:lnTo>
+                  <a:pt x="5120640" y="1195754"/>
+                </a:lnTo>
+              </a:path>
+            </a:pathLst>
+          </a:custGeom>
+          <a:noFill/>
+          <a:ln w="33020">
             <a:solidFill>
               <a:srgbClr val="8EDBD4"/>
             </a:solidFill>
           </a:ln>
           <a:effectLst/>
         </p:spPr>
-      </p:cxnSp>
-      <p:cxnSp>
-        <p:nvCxnSpPr>
-          <p:cNvPr id="11" name="line10" descr="sci-ppt:C2-E17-010"/>
-          <p:cNvCxnSpPr/>
+        <p:txBody>
+          <a:bodyPr rtlCol="0" anchor="ctr"/>
+          <a:lstStyle/>
+          <a:p>
+            <a:pPr algn="ctr"/>
+          </a:p>
+        </p:txBody>
+      </p:sp>
+      <p:sp>
+        <p:nvSpPr>
+          <p:cNvPr id="61" name="C2-E17 polygon 59" descr="sci-ppt:o059"/>
+          <p:cNvSpPr/>
           <p:nvPr/>
-        </p:nvCxnSpPr>
-        <p:spPr>
-          <a:xfrm flipV="1">
-            <a:off x="6881513" y="3546106"/>
-            <a:ext cx="114953" cy="170057"/>
-          </a:xfrm>
-          <a:prstGeom prst="line">
+        </p:nvSpPr>
+        <p:spPr>
+          <a:xfrm>
+            <a:off x="914400" y="3893505"/>
+            <a:ext cx="5120640" cy="1288337"/>
+          </a:xfrm>
+          <a:custGeom>
             <a:avLst/>
-          </a:prstGeom>
-          <a:ln w="25400">
+            <a:gdLst/>
+            <a:ahLst/>
+            <a:cxnLst/>
+            <a:rect l="l" t="t" r="r" b="b"/>
+            <a:pathLst>
+              <a:path w="5120640" h="1288337">
+                <a:moveTo>
+                  <a:pt x="0" y="1288337"/>
+                </a:moveTo>
+                <a:lnTo>
+                  <a:pt x="30785" y="1201178"/>
+                </a:lnTo>
+                <a:lnTo>
+                  <a:pt x="61570" y="1119105"/>
+                </a:lnTo>
+                <a:lnTo>
+                  <a:pt x="92356" y="1041820"/>
+                </a:lnTo>
+                <a:lnTo>
+                  <a:pt x="123141" y="969045"/>
+                </a:lnTo>
+                <a:lnTo>
+                  <a:pt x="153927" y="900516"/>
+                </a:lnTo>
+                <a:lnTo>
+                  <a:pt x="184712" y="835986"/>
+                </a:lnTo>
+                <a:lnTo>
+                  <a:pt x="215497" y="775221"/>
+                </a:lnTo>
+                <a:lnTo>
+                  <a:pt x="246283" y="718001"/>
+                </a:lnTo>
+                <a:lnTo>
+                  <a:pt x="277068" y="664121"/>
+                </a:lnTo>
+                <a:lnTo>
+                  <a:pt x="307854" y="613384"/>
+                </a:lnTo>
+                <a:lnTo>
+                  <a:pt x="338639" y="565607"/>
+                </a:lnTo>
+                <a:lnTo>
+                  <a:pt x="369424" y="520619"/>
+                </a:lnTo>
+                <a:lnTo>
+                  <a:pt x="400210" y="478255"/>
+                </a:lnTo>
+                <a:lnTo>
+                  <a:pt x="430995" y="438363"/>
+                </a:lnTo>
+                <a:lnTo>
+                  <a:pt x="461781" y="400799"/>
+                </a:lnTo>
+                <a:lnTo>
+                  <a:pt x="492566" y="365426"/>
+                </a:lnTo>
+                <a:lnTo>
+                  <a:pt x="523351" y="332118"/>
+                </a:lnTo>
+                <a:lnTo>
+                  <a:pt x="554137" y="300753"/>
+                </a:lnTo>
+                <a:lnTo>
+                  <a:pt x="584922" y="271218"/>
+                </a:lnTo>
+                <a:lnTo>
+                  <a:pt x="615708" y="243407"/>
+                </a:lnTo>
+                <a:lnTo>
+                  <a:pt x="646493" y="217218"/>
+                </a:lnTo>
+                <a:lnTo>
+                  <a:pt x="677279" y="192557"/>
+                </a:lnTo>
+                <a:lnTo>
+                  <a:pt x="708064" y="169335"/>
+                </a:lnTo>
+                <a:lnTo>
+                  <a:pt x="738849" y="147469"/>
+                </a:lnTo>
+                <a:lnTo>
+                  <a:pt x="769635" y="126878"/>
+                </a:lnTo>
+                <a:lnTo>
+                  <a:pt x="800420" y="107488"/>
+                </a:lnTo>
+                <a:lnTo>
+                  <a:pt x="831206" y="89230"/>
+                </a:lnTo>
+                <a:lnTo>
+                  <a:pt x="861991" y="72037"/>
+                </a:lnTo>
+                <a:lnTo>
+                  <a:pt x="892776" y="55848"/>
+                </a:lnTo>
+                <a:lnTo>
+                  <a:pt x="923562" y="40603"/>
+                </a:lnTo>
+                <a:lnTo>
+                  <a:pt x="954347" y="26247"/>
+                </a:lnTo>
+                <a:lnTo>
+                  <a:pt x="985133" y="12730"/>
+                </a:lnTo>
+                <a:lnTo>
+                  <a:pt x="1015918" y="0"/>
+                </a:lnTo>
+                <a:lnTo>
+                  <a:pt x="1046703" y="0"/>
+                </a:lnTo>
+                <a:lnTo>
+                  <a:pt x="1077489" y="0"/>
+                </a:lnTo>
+                <a:lnTo>
+                  <a:pt x="1108274" y="0"/>
+                </a:lnTo>
+                <a:lnTo>
+                  <a:pt x="1139060" y="0"/>
+                </a:lnTo>
+                <a:lnTo>
+                  <a:pt x="1169845" y="0"/>
+                </a:lnTo>
+                <a:lnTo>
+                  <a:pt x="1200631" y="0"/>
+                </a:lnTo>
+                <a:lnTo>
+                  <a:pt x="1231416" y="0"/>
+                </a:lnTo>
+                <a:lnTo>
+                  <a:pt x="1262201" y="0"/>
+                </a:lnTo>
+                <a:lnTo>
+                  <a:pt x="1292987" y="0"/>
+                </a:lnTo>
+                <a:lnTo>
+                  <a:pt x="1323772" y="0"/>
+                </a:lnTo>
+                <a:lnTo>
+                  <a:pt x="1354558" y="0"/>
+                </a:lnTo>
+                <a:lnTo>
+                  <a:pt x="1385343" y="0"/>
+                </a:lnTo>
+                <a:lnTo>
+                  <a:pt x="1416128" y="0"/>
+                </a:lnTo>
+                <a:lnTo>
+                  <a:pt x="1446914" y="0"/>
+                </a:lnTo>
+                <a:lnTo>
+                  <a:pt x="1477699" y="0"/>
+                </a:lnTo>
+                <a:lnTo>
+                  <a:pt x="1508485" y="0"/>
+                </a:lnTo>
+                <a:lnTo>
+                  <a:pt x="1539270" y="0"/>
+                </a:lnTo>
+                <a:lnTo>
+                  <a:pt x="1570055" y="0"/>
+                </a:lnTo>
+                <a:lnTo>
+                  <a:pt x="1600841" y="0"/>
+                </a:lnTo>
+                <a:lnTo>
+                  <a:pt x="1631626" y="0"/>
+                </a:lnTo>
+                <a:lnTo>
+                  <a:pt x="1662412" y="0"/>
+                </a:lnTo>
+                <a:lnTo>
+                  <a:pt x="1693197" y="0"/>
+                </a:lnTo>
+                <a:lnTo>
+                  <a:pt x="1723983" y="0"/>
+                </a:lnTo>
+                <a:lnTo>
+                  <a:pt x="1754768" y="0"/>
+                </a:lnTo>
+                <a:lnTo>
+                  <a:pt x="1785553" y="0"/>
+                </a:lnTo>
+                <a:lnTo>
+                  <a:pt x="1816339" y="0"/>
+                </a:lnTo>
+                <a:lnTo>
+                  <a:pt x="1847124" y="0"/>
+                </a:lnTo>
+                <a:lnTo>
+                  <a:pt x="1877910" y="0"/>
+                </a:lnTo>
+                <a:lnTo>
+                  <a:pt x="1908695" y="0"/>
+                </a:lnTo>
+                <a:lnTo>
+                  <a:pt x="1939480" y="0"/>
+                </a:lnTo>
+                <a:lnTo>
+                  <a:pt x="1970266" y="0"/>
+                </a:lnTo>
+                <a:lnTo>
+                  <a:pt x="2001051" y="0"/>
+                </a:lnTo>
+                <a:lnTo>
+                  <a:pt x="2031837" y="0"/>
+                </a:lnTo>
+                <a:lnTo>
+                  <a:pt x="2062622" y="0"/>
+                </a:lnTo>
+                <a:lnTo>
+                  <a:pt x="2093407" y="0"/>
+                </a:lnTo>
+                <a:lnTo>
+                  <a:pt x="2124193" y="0"/>
+                </a:lnTo>
+                <a:lnTo>
+                  <a:pt x="2154978" y="0"/>
+                </a:lnTo>
+                <a:lnTo>
+                  <a:pt x="2185764" y="0"/>
+                </a:lnTo>
+                <a:lnTo>
+                  <a:pt x="2216549" y="0"/>
+                </a:lnTo>
+                <a:lnTo>
+                  <a:pt x="2247334" y="0"/>
+                </a:lnTo>
+                <a:lnTo>
+                  <a:pt x="2278120" y="0"/>
+                </a:lnTo>
+                <a:lnTo>
+                  <a:pt x="2308905" y="0"/>
+                </a:lnTo>
+                <a:lnTo>
+                  <a:pt x="2339691" y="0"/>
+                </a:lnTo>
+                <a:lnTo>
+                  <a:pt x="2370476" y="0"/>
+                </a:lnTo>
+                <a:lnTo>
+                  <a:pt x="2401262" y="0"/>
+                </a:lnTo>
+                <a:lnTo>
+                  <a:pt x="2432047" y="0"/>
+                </a:lnTo>
+                <a:lnTo>
+                  <a:pt x="2462832" y="0"/>
+                </a:lnTo>
+                <a:lnTo>
+                  <a:pt x="2493618" y="0"/>
+                </a:lnTo>
+                <a:lnTo>
+                  <a:pt x="2524403" y="0"/>
+                </a:lnTo>
+                <a:lnTo>
+                  <a:pt x="2555189" y="0"/>
+                </a:lnTo>
+                <a:lnTo>
+                  <a:pt x="2585974" y="0"/>
+                </a:lnTo>
+                <a:lnTo>
+                  <a:pt x="2616759" y="0"/>
+                </a:lnTo>
+                <a:lnTo>
+                  <a:pt x="2647545" y="0"/>
+                </a:lnTo>
+                <a:lnTo>
+                  <a:pt x="2678330" y="0"/>
+                </a:lnTo>
+                <a:lnTo>
+                  <a:pt x="2709116" y="0"/>
+                </a:lnTo>
+                <a:lnTo>
+                  <a:pt x="2739901" y="0"/>
+                </a:lnTo>
+                <a:lnTo>
+                  <a:pt x="2770686" y="0"/>
+                </a:lnTo>
+                <a:lnTo>
+                  <a:pt x="2801472" y="0"/>
+                </a:lnTo>
+                <a:lnTo>
+                  <a:pt x="2832257" y="0"/>
+                </a:lnTo>
+                <a:lnTo>
+                  <a:pt x="2863043" y="0"/>
+                </a:lnTo>
+                <a:lnTo>
+                  <a:pt x="2893828" y="0"/>
+                </a:lnTo>
+                <a:lnTo>
+                  <a:pt x="2924614" y="0"/>
+                </a:lnTo>
+                <a:lnTo>
+                  <a:pt x="2955399" y="0"/>
+                </a:lnTo>
+                <a:lnTo>
+                  <a:pt x="2986184" y="0"/>
+                </a:lnTo>
+                <a:lnTo>
+                  <a:pt x="3016970" y="0"/>
+                </a:lnTo>
+                <a:lnTo>
+                  <a:pt x="3047755" y="0"/>
+                </a:lnTo>
+                <a:lnTo>
+                  <a:pt x="3078541" y="0"/>
+                </a:lnTo>
+                <a:lnTo>
+                  <a:pt x="3109326" y="0"/>
+                </a:lnTo>
+                <a:lnTo>
+                  <a:pt x="3140111" y="0"/>
+                </a:lnTo>
+                <a:lnTo>
+                  <a:pt x="3170897" y="0"/>
+                </a:lnTo>
+                <a:lnTo>
+                  <a:pt x="3201682" y="0"/>
+                </a:lnTo>
+                <a:lnTo>
+                  <a:pt x="3232468" y="0"/>
+                </a:lnTo>
+                <a:lnTo>
+                  <a:pt x="3263253" y="0"/>
+                </a:lnTo>
+                <a:lnTo>
+                  <a:pt x="3294038" y="0"/>
+                </a:lnTo>
+                <a:lnTo>
+                  <a:pt x="3324824" y="0"/>
+                </a:lnTo>
+                <a:lnTo>
+                  <a:pt x="3355609" y="0"/>
+                </a:lnTo>
+                <a:lnTo>
+                  <a:pt x="3386395" y="0"/>
+                </a:lnTo>
+                <a:lnTo>
+                  <a:pt x="3417180" y="0"/>
+                </a:lnTo>
+                <a:lnTo>
+                  <a:pt x="3447966" y="0"/>
+                </a:lnTo>
+                <a:lnTo>
+                  <a:pt x="3478751" y="0"/>
+                </a:lnTo>
+                <a:lnTo>
+                  <a:pt x="3509536" y="0"/>
+                </a:lnTo>
+                <a:lnTo>
+                  <a:pt x="3540322" y="0"/>
+                </a:lnTo>
+                <a:lnTo>
+                  <a:pt x="3571107" y="0"/>
+                </a:lnTo>
+                <a:lnTo>
+                  <a:pt x="3601893" y="0"/>
+                </a:lnTo>
+                <a:lnTo>
+                  <a:pt x="3632678" y="0"/>
+                </a:lnTo>
+                <a:lnTo>
+                  <a:pt x="3663463" y="0"/>
+                </a:lnTo>
+                <a:lnTo>
+                  <a:pt x="3694249" y="0"/>
+                </a:lnTo>
+                <a:lnTo>
+                  <a:pt x="3725034" y="0"/>
+                </a:lnTo>
+                <a:lnTo>
+                  <a:pt x="3755820" y="0"/>
+                </a:lnTo>
+                <a:lnTo>
+                  <a:pt x="3786605" y="0"/>
+                </a:lnTo>
+                <a:lnTo>
+                  <a:pt x="3817390" y="0"/>
+                </a:lnTo>
+                <a:lnTo>
+                  <a:pt x="3848176" y="0"/>
+                </a:lnTo>
+                <a:lnTo>
+                  <a:pt x="3878961" y="0"/>
+                </a:lnTo>
+                <a:lnTo>
+                  <a:pt x="3909747" y="0"/>
+                </a:lnTo>
+                <a:lnTo>
+                  <a:pt x="3940532" y="0"/>
+                </a:lnTo>
+                <a:lnTo>
+                  <a:pt x="3971317" y="0"/>
+                </a:lnTo>
+                <a:lnTo>
+                  <a:pt x="4002103" y="0"/>
+                </a:lnTo>
+                <a:lnTo>
+                  <a:pt x="4032888" y="0"/>
+                </a:lnTo>
+                <a:lnTo>
+                  <a:pt x="4063674" y="0"/>
+                </a:lnTo>
+                <a:lnTo>
+                  <a:pt x="4094459" y="0"/>
+                </a:lnTo>
+                <a:lnTo>
+                  <a:pt x="4125245" y="0"/>
+                </a:lnTo>
+                <a:lnTo>
+                  <a:pt x="4156030" y="0"/>
+                </a:lnTo>
+                <a:lnTo>
+                  <a:pt x="4186815" y="0"/>
+                </a:lnTo>
+                <a:lnTo>
+                  <a:pt x="4217601" y="0"/>
+                </a:lnTo>
+                <a:lnTo>
+                  <a:pt x="4248386" y="0"/>
+                </a:lnTo>
+                <a:lnTo>
+                  <a:pt x="4279172" y="0"/>
+                </a:lnTo>
+                <a:lnTo>
+                  <a:pt x="4309957" y="0"/>
+                </a:lnTo>
+                <a:lnTo>
+                  <a:pt x="4340742" y="0"/>
+                </a:lnTo>
+                <a:lnTo>
+                  <a:pt x="4371528" y="0"/>
+                </a:lnTo>
+                <a:lnTo>
+                  <a:pt x="4402313" y="0"/>
+                </a:lnTo>
+                <a:lnTo>
+                  <a:pt x="4433099" y="0"/>
+                </a:lnTo>
+                <a:lnTo>
+                  <a:pt x="4463884" y="0"/>
+                </a:lnTo>
+                <a:lnTo>
+                  <a:pt x="4494669" y="0"/>
+                </a:lnTo>
+                <a:lnTo>
+                  <a:pt x="4525455" y="0"/>
+                </a:lnTo>
+                <a:lnTo>
+                  <a:pt x="4556240" y="0"/>
+                </a:lnTo>
+                <a:lnTo>
+                  <a:pt x="4587026" y="0"/>
+                </a:lnTo>
+                <a:lnTo>
+                  <a:pt x="4617811" y="0"/>
+                </a:lnTo>
+                <a:lnTo>
+                  <a:pt x="4648597" y="0"/>
+                </a:lnTo>
+                <a:lnTo>
+                  <a:pt x="4679382" y="0"/>
+                </a:lnTo>
+                <a:lnTo>
+                  <a:pt x="4710167" y="0"/>
+                </a:lnTo>
+                <a:lnTo>
+                  <a:pt x="4740953" y="0"/>
+                </a:lnTo>
+                <a:lnTo>
+                  <a:pt x="4771738" y="0"/>
+                </a:lnTo>
+                <a:lnTo>
+                  <a:pt x="4802524" y="0"/>
+                </a:lnTo>
+                <a:lnTo>
+                  <a:pt x="4833309" y="0"/>
+                </a:lnTo>
+                <a:lnTo>
+                  <a:pt x="4864094" y="0"/>
+                </a:lnTo>
+                <a:lnTo>
+                  <a:pt x="4894880" y="0"/>
+                </a:lnTo>
+                <a:lnTo>
+                  <a:pt x="4925665" y="0"/>
+                </a:lnTo>
+                <a:lnTo>
+                  <a:pt x="4956451" y="0"/>
+                </a:lnTo>
+                <a:lnTo>
+                  <a:pt x="4987236" y="0"/>
+                </a:lnTo>
+                <a:lnTo>
+                  <a:pt x="5018021" y="0"/>
+                </a:lnTo>
+                <a:lnTo>
+                  <a:pt x="5048807" y="0"/>
+                </a:lnTo>
+                <a:lnTo>
+                  <a:pt x="5079592" y="0"/>
+                </a:lnTo>
+                <a:lnTo>
+                  <a:pt x="5110378" y="0"/>
+                </a:lnTo>
+                <a:lnTo>
+                  <a:pt x="5120640" y="0"/>
+                </a:lnTo>
+              </a:path>
+            </a:pathLst>
+          </a:custGeom>
+          <a:noFill/>
+          <a:ln w="38100">
             <a:solidFill>
               <a:srgbClr val="8EDBD4"/>
             </a:solidFill>
           </a:ln>
           <a:effectLst/>
         </p:spPr>
-      </p:cxnSp>
-      <p:cxnSp>
-        <p:nvCxnSpPr>
-          <p:cNvPr id="12" name="line11" descr="sci-ppt:C2-E17-011"/>
-          <p:cNvCxnSpPr/>
+        <p:txBody>
+          <a:bodyPr rtlCol="0" anchor="ctr"/>
+          <a:lstStyle/>
+          <a:p>
+            <a:pPr algn="ctr"/>
+          </a:p>
+        </p:txBody>
+      </p:sp>
+      <p:sp>
+        <p:nvSpPr>
+          <p:cNvPr id="62" name="C2-E17 ellipse 60" descr="sci-ppt:o060"/>
+          <p:cNvSpPr/>
           <p:nvPr/>
-        </p:nvCxnSpPr>
-        <p:spPr>
-          <a:xfrm flipV="1">
-            <a:off x="6996466" y="3390018"/>
-            <a:ext cx="114953" cy="156088"/>
-          </a:xfrm>
-          <a:prstGeom prst="line">
+        </p:nvSpPr>
+        <p:spPr>
+          <a:xfrm>
+            <a:off x="5980176" y="3839466"/>
+            <a:ext cx="109728" cy="109728"/>
+          </a:xfrm>
+          <a:prstGeom prst="ellipse">
             <a:avLst/>
           </a:prstGeom>
-          <a:ln w="25400">
+          <a:solidFill>
+            <a:srgbClr val="8EDBD4"/>
+          </a:solidFill>
+          <a:ln w="12700">
             <a:solidFill>
               <a:srgbClr val="8EDBD4"/>
             </a:solidFill>
           </a:ln>
           <a:effectLst/>
         </p:spPr>
-      </p:cxnSp>
-      <p:cxnSp>
-        <p:nvCxnSpPr>
-          <p:cNvPr id="13" name="line12" descr="sci-ppt:C2-E17-012"/>
-          <p:cNvCxnSpPr/>
+        <p:txBody>
+          <a:bodyPr rtlCol="0" anchor="ctr"/>
+          <a:lstStyle/>
+          <a:p>
+            <a:pPr algn="ctr"/>
+          </a:p>
+        </p:txBody>
+      </p:sp>
+      <p:sp>
+        <p:nvSpPr>
+          <p:cNvPr id="63" name="C2-E17 polygon 61" descr="sci-ppt:o061"/>
+          <p:cNvSpPr/>
           <p:nvPr/>
-        </p:nvCxnSpPr>
-        <p:spPr>
-          <a:xfrm flipV="1">
-            <a:off x="7111419" y="3246751"/>
-            <a:ext cx="114953" cy="143267"/>
-          </a:xfrm>
-          <a:prstGeom prst="line">
+        </p:nvSpPr>
+        <p:spPr>
+          <a:xfrm>
+            <a:off x="914400" y="2627141"/>
+            <a:ext cx="5120640" cy="298939"/>
+          </a:xfrm>
+          <a:custGeom>
+            <a:avLst/>
+            <a:gdLst/>
+            <a:ahLst/>
+            <a:cxnLst/>
+            <a:rect l="l" t="t" r="r" b="b"/>
+            <a:pathLst>
+              <a:path w="5120640" h="298939">
+                <a:moveTo>
+                  <a:pt x="0" y="0"/>
+                </a:moveTo>
+                <a:lnTo>
+                  <a:pt x="30785" y="0"/>
+                </a:lnTo>
+                <a:lnTo>
+                  <a:pt x="61570" y="0"/>
+                </a:lnTo>
+                <a:lnTo>
+                  <a:pt x="92356" y="0"/>
+                </a:lnTo>
+                <a:lnTo>
+                  <a:pt x="123141" y="0"/>
+                </a:lnTo>
+                <a:lnTo>
+                  <a:pt x="153927" y="0"/>
+                </a:lnTo>
+                <a:lnTo>
+                  <a:pt x="184712" y="0"/>
+                </a:lnTo>
+                <a:lnTo>
+                  <a:pt x="215497" y="0"/>
+                </a:lnTo>
+                <a:lnTo>
+                  <a:pt x="246283" y="0"/>
+                </a:lnTo>
+                <a:lnTo>
+                  <a:pt x="277068" y="0"/>
+                </a:lnTo>
+                <a:lnTo>
+                  <a:pt x="307854" y="0"/>
+                </a:lnTo>
+                <a:lnTo>
+                  <a:pt x="338639" y="0"/>
+                </a:lnTo>
+                <a:lnTo>
+                  <a:pt x="369424" y="0"/>
+                </a:lnTo>
+                <a:lnTo>
+                  <a:pt x="400210" y="0"/>
+                </a:lnTo>
+                <a:lnTo>
+                  <a:pt x="430995" y="0"/>
+                </a:lnTo>
+                <a:lnTo>
+                  <a:pt x="461781" y="0"/>
+                </a:lnTo>
+                <a:lnTo>
+                  <a:pt x="492566" y="0"/>
+                </a:lnTo>
+                <a:lnTo>
+                  <a:pt x="523351" y="0"/>
+                </a:lnTo>
+                <a:lnTo>
+                  <a:pt x="554137" y="0"/>
+                </a:lnTo>
+                <a:lnTo>
+                  <a:pt x="584922" y="0"/>
+                </a:lnTo>
+                <a:lnTo>
+                  <a:pt x="615708" y="0"/>
+                </a:lnTo>
+                <a:lnTo>
+                  <a:pt x="646493" y="0"/>
+                </a:lnTo>
+                <a:lnTo>
+                  <a:pt x="677279" y="0"/>
+                </a:lnTo>
+                <a:lnTo>
+                  <a:pt x="708064" y="0"/>
+                </a:lnTo>
+                <a:lnTo>
+                  <a:pt x="738849" y="0"/>
+                </a:lnTo>
+                <a:lnTo>
+                  <a:pt x="769635" y="0"/>
+                </a:lnTo>
+                <a:lnTo>
+                  <a:pt x="800420" y="0"/>
+                </a:lnTo>
+                <a:lnTo>
+                  <a:pt x="831206" y="0"/>
+                </a:lnTo>
+                <a:lnTo>
+                  <a:pt x="861991" y="0"/>
+                </a:lnTo>
+                <a:lnTo>
+                  <a:pt x="892776" y="0"/>
+                </a:lnTo>
+                <a:lnTo>
+                  <a:pt x="923562" y="0"/>
+                </a:lnTo>
+                <a:lnTo>
+                  <a:pt x="954347" y="0"/>
+                </a:lnTo>
+                <a:lnTo>
+                  <a:pt x="985133" y="0"/>
+                </a:lnTo>
+                <a:lnTo>
+                  <a:pt x="1015918" y="0"/>
+                </a:lnTo>
+                <a:lnTo>
+                  <a:pt x="1046703" y="0"/>
+                </a:lnTo>
+                <a:lnTo>
+                  <a:pt x="1077489" y="0"/>
+                </a:lnTo>
+                <a:lnTo>
+                  <a:pt x="1108274" y="0"/>
+                </a:lnTo>
+                <a:lnTo>
+                  <a:pt x="1139060" y="0"/>
+                </a:lnTo>
+                <a:lnTo>
+                  <a:pt x="1169845" y="0"/>
+                </a:lnTo>
+                <a:lnTo>
+                  <a:pt x="1200631" y="0"/>
+                </a:lnTo>
+                <a:lnTo>
+                  <a:pt x="1231416" y="0"/>
+                </a:lnTo>
+                <a:lnTo>
+                  <a:pt x="1262201" y="0"/>
+                </a:lnTo>
+                <a:lnTo>
+                  <a:pt x="1292987" y="0"/>
+                </a:lnTo>
+                <a:lnTo>
+                  <a:pt x="1323772" y="0"/>
+                </a:lnTo>
+                <a:lnTo>
+                  <a:pt x="1354558" y="0"/>
+                </a:lnTo>
+                <a:lnTo>
+                  <a:pt x="1385343" y="0"/>
+                </a:lnTo>
+                <a:lnTo>
+                  <a:pt x="1416128" y="0"/>
+                </a:lnTo>
+                <a:lnTo>
+                  <a:pt x="1446914" y="0"/>
+                </a:lnTo>
+                <a:lnTo>
+                  <a:pt x="1477699" y="0"/>
+                </a:lnTo>
+                <a:lnTo>
+                  <a:pt x="1508485" y="0"/>
+                </a:lnTo>
+                <a:lnTo>
+                  <a:pt x="1539270" y="0"/>
+                </a:lnTo>
+                <a:lnTo>
+                  <a:pt x="1570055" y="0"/>
+                </a:lnTo>
+                <a:lnTo>
+                  <a:pt x="1600841" y="0"/>
+                </a:lnTo>
+                <a:lnTo>
+                  <a:pt x="1631626" y="0"/>
+                </a:lnTo>
+                <a:lnTo>
+                  <a:pt x="1662412" y="0"/>
+                </a:lnTo>
+                <a:lnTo>
+                  <a:pt x="1693197" y="0"/>
+                </a:lnTo>
+                <a:lnTo>
+                  <a:pt x="1723983" y="0"/>
+                </a:lnTo>
+                <a:lnTo>
+                  <a:pt x="1754768" y="0"/>
+                </a:lnTo>
+                <a:lnTo>
+                  <a:pt x="1785553" y="0"/>
+                </a:lnTo>
+                <a:lnTo>
+                  <a:pt x="1816339" y="0"/>
+                </a:lnTo>
+                <a:lnTo>
+                  <a:pt x="1847124" y="0"/>
+                </a:lnTo>
+                <a:lnTo>
+                  <a:pt x="1877910" y="0"/>
+                </a:lnTo>
+                <a:lnTo>
+                  <a:pt x="1908695" y="0"/>
+                </a:lnTo>
+                <a:lnTo>
+                  <a:pt x="1939480" y="0"/>
+                </a:lnTo>
+                <a:lnTo>
+                  <a:pt x="1970266" y="0"/>
+                </a:lnTo>
+                <a:lnTo>
+                  <a:pt x="2001051" y="0"/>
+                </a:lnTo>
+                <a:lnTo>
+                  <a:pt x="2031837" y="0"/>
+                </a:lnTo>
+                <a:lnTo>
+                  <a:pt x="2062622" y="0"/>
+                </a:lnTo>
+                <a:lnTo>
+                  <a:pt x="2093407" y="0"/>
+                </a:lnTo>
+                <a:lnTo>
+                  <a:pt x="2124193" y="0"/>
+                </a:lnTo>
+                <a:lnTo>
+                  <a:pt x="2154978" y="0"/>
+                </a:lnTo>
+                <a:lnTo>
+                  <a:pt x="2185764" y="0"/>
+                </a:lnTo>
+                <a:lnTo>
+                  <a:pt x="2216549" y="0"/>
+                </a:lnTo>
+                <a:lnTo>
+                  <a:pt x="2247334" y="0"/>
+                </a:lnTo>
+                <a:lnTo>
+                  <a:pt x="2278120" y="0"/>
+                </a:lnTo>
+                <a:lnTo>
+                  <a:pt x="2308905" y="0"/>
+                </a:lnTo>
+                <a:lnTo>
+                  <a:pt x="2339691" y="0"/>
+                </a:lnTo>
+                <a:lnTo>
+                  <a:pt x="2370476" y="0"/>
+                </a:lnTo>
+                <a:lnTo>
+                  <a:pt x="2401262" y="0"/>
+                </a:lnTo>
+                <a:lnTo>
+                  <a:pt x="2432047" y="0"/>
+                </a:lnTo>
+                <a:lnTo>
+                  <a:pt x="2462832" y="0"/>
+                </a:lnTo>
+                <a:lnTo>
+                  <a:pt x="2493618" y="0"/>
+                </a:lnTo>
+                <a:lnTo>
+                  <a:pt x="2524403" y="0"/>
+                </a:lnTo>
+                <a:lnTo>
+                  <a:pt x="2555189" y="0"/>
+                </a:lnTo>
+                <a:lnTo>
+                  <a:pt x="2585974" y="0"/>
+                </a:lnTo>
+                <a:lnTo>
+                  <a:pt x="2616759" y="0"/>
+                </a:lnTo>
+                <a:lnTo>
+                  <a:pt x="2647545" y="0"/>
+                </a:lnTo>
+                <a:lnTo>
+                  <a:pt x="2678330" y="0"/>
+                </a:lnTo>
+                <a:lnTo>
+                  <a:pt x="2709116" y="0"/>
+                </a:lnTo>
+                <a:lnTo>
+                  <a:pt x="2739901" y="0"/>
+                </a:lnTo>
+                <a:lnTo>
+                  <a:pt x="2770686" y="0"/>
+                </a:lnTo>
+                <a:lnTo>
+                  <a:pt x="2801472" y="0"/>
+                </a:lnTo>
+                <a:lnTo>
+                  <a:pt x="2832257" y="0"/>
+                </a:lnTo>
+                <a:lnTo>
+                  <a:pt x="2863043" y="0"/>
+                </a:lnTo>
+                <a:lnTo>
+                  <a:pt x="2893828" y="0"/>
+                </a:lnTo>
+                <a:lnTo>
+                  <a:pt x="2924614" y="0"/>
+                </a:lnTo>
+                <a:lnTo>
+                  <a:pt x="2955399" y="0"/>
+                </a:lnTo>
+                <a:lnTo>
+                  <a:pt x="2986184" y="0"/>
+                </a:lnTo>
+                <a:lnTo>
+                  <a:pt x="3016970" y="0"/>
+                </a:lnTo>
+                <a:lnTo>
+                  <a:pt x="3047755" y="0"/>
+                </a:lnTo>
+                <a:lnTo>
+                  <a:pt x="3078541" y="0"/>
+                </a:lnTo>
+                <a:lnTo>
+                  <a:pt x="3109326" y="0"/>
+                </a:lnTo>
+                <a:lnTo>
+                  <a:pt x="3140111" y="0"/>
+                </a:lnTo>
+                <a:lnTo>
+                  <a:pt x="3170897" y="0"/>
+                </a:lnTo>
+                <a:lnTo>
+                  <a:pt x="3201682" y="0"/>
+                </a:lnTo>
+                <a:lnTo>
+                  <a:pt x="3232468" y="0"/>
+                </a:lnTo>
+                <a:lnTo>
+                  <a:pt x="3263253" y="0"/>
+                </a:lnTo>
+                <a:lnTo>
+                  <a:pt x="3294038" y="0"/>
+                </a:lnTo>
+                <a:lnTo>
+                  <a:pt x="3324824" y="0"/>
+                </a:lnTo>
+                <a:lnTo>
+                  <a:pt x="3355609" y="0"/>
+                </a:lnTo>
+                <a:lnTo>
+                  <a:pt x="3386395" y="0"/>
+                </a:lnTo>
+                <a:lnTo>
+                  <a:pt x="3417180" y="0"/>
+                </a:lnTo>
+                <a:lnTo>
+                  <a:pt x="3447966" y="0"/>
+                </a:lnTo>
+                <a:lnTo>
+                  <a:pt x="3478751" y="0"/>
+                </a:lnTo>
+                <a:lnTo>
+                  <a:pt x="3509536" y="0"/>
+                </a:lnTo>
+                <a:lnTo>
+                  <a:pt x="3540322" y="0"/>
+                </a:lnTo>
+                <a:lnTo>
+                  <a:pt x="3571107" y="0"/>
+                </a:lnTo>
+                <a:lnTo>
+                  <a:pt x="3601893" y="0"/>
+                </a:lnTo>
+                <a:lnTo>
+                  <a:pt x="3632678" y="0"/>
+                </a:lnTo>
+                <a:lnTo>
+                  <a:pt x="3663463" y="0"/>
+                </a:lnTo>
+                <a:lnTo>
+                  <a:pt x="3694249" y="0"/>
+                </a:lnTo>
+                <a:lnTo>
+                  <a:pt x="3725034" y="0"/>
+                </a:lnTo>
+                <a:lnTo>
+                  <a:pt x="3755820" y="0"/>
+                </a:lnTo>
+                <a:lnTo>
+                  <a:pt x="3786605" y="0"/>
+                </a:lnTo>
+                <a:lnTo>
+                  <a:pt x="3817390" y="0"/>
+                </a:lnTo>
+                <a:lnTo>
+                  <a:pt x="3848176" y="0"/>
+                </a:lnTo>
+                <a:lnTo>
+                  <a:pt x="3878961" y="0"/>
+                </a:lnTo>
+                <a:lnTo>
+                  <a:pt x="3909747" y="0"/>
+                </a:lnTo>
+                <a:lnTo>
+                  <a:pt x="3940532" y="0"/>
+                </a:lnTo>
+                <a:lnTo>
+                  <a:pt x="3971317" y="0"/>
+                </a:lnTo>
+                <a:lnTo>
+                  <a:pt x="4002103" y="0"/>
+                </a:lnTo>
+                <a:lnTo>
+                  <a:pt x="4032888" y="0"/>
+                </a:lnTo>
+                <a:lnTo>
+                  <a:pt x="4063674" y="0"/>
+                </a:lnTo>
+                <a:lnTo>
+                  <a:pt x="4094459" y="0"/>
+                </a:lnTo>
+                <a:lnTo>
+                  <a:pt x="4125245" y="298939"/>
+                </a:lnTo>
+                <a:lnTo>
+                  <a:pt x="4156030" y="298939"/>
+                </a:lnTo>
+                <a:lnTo>
+                  <a:pt x="4186815" y="298939"/>
+                </a:lnTo>
+                <a:lnTo>
+                  <a:pt x="4217601" y="298939"/>
+                </a:lnTo>
+                <a:lnTo>
+                  <a:pt x="4248386" y="298939"/>
+                </a:lnTo>
+                <a:lnTo>
+                  <a:pt x="4279172" y="298939"/>
+                </a:lnTo>
+                <a:lnTo>
+                  <a:pt x="4309957" y="298939"/>
+                </a:lnTo>
+                <a:lnTo>
+                  <a:pt x="4340742" y="298939"/>
+                </a:lnTo>
+                <a:lnTo>
+                  <a:pt x="4371528" y="298939"/>
+                </a:lnTo>
+                <a:lnTo>
+                  <a:pt x="4402313" y="298939"/>
+                </a:lnTo>
+                <a:lnTo>
+                  <a:pt x="4433099" y="298939"/>
+                </a:lnTo>
+                <a:lnTo>
+                  <a:pt x="4463884" y="298939"/>
+                </a:lnTo>
+                <a:lnTo>
+                  <a:pt x="4494669" y="298939"/>
+                </a:lnTo>
+                <a:lnTo>
+                  <a:pt x="4525455" y="298939"/>
+                </a:lnTo>
+                <a:lnTo>
+                  <a:pt x="4556240" y="298939"/>
+                </a:lnTo>
+                <a:lnTo>
+                  <a:pt x="4587026" y="298939"/>
+                </a:lnTo>
+                <a:lnTo>
+                  <a:pt x="4617811" y="298939"/>
+                </a:lnTo>
+                <a:lnTo>
+                  <a:pt x="4648597" y="298939"/>
+                </a:lnTo>
+                <a:lnTo>
+                  <a:pt x="4679382" y="298939"/>
+                </a:lnTo>
+                <a:lnTo>
+                  <a:pt x="4710167" y="298939"/>
+                </a:lnTo>
+                <a:lnTo>
+                  <a:pt x="4740953" y="298939"/>
+                </a:lnTo>
+                <a:lnTo>
+                  <a:pt x="4771738" y="298939"/>
+                </a:lnTo>
+                <a:lnTo>
+                  <a:pt x="4802524" y="298939"/>
+                </a:lnTo>
+                <a:lnTo>
+                  <a:pt x="4833309" y="298939"/>
+                </a:lnTo>
+                <a:lnTo>
+                  <a:pt x="4864094" y="298939"/>
+                </a:lnTo>
+                <a:lnTo>
+                  <a:pt x="4894880" y="298939"/>
+                </a:lnTo>
+                <a:lnTo>
+                  <a:pt x="4925665" y="298939"/>
+                </a:lnTo>
+                <a:lnTo>
+                  <a:pt x="4956451" y="298939"/>
+                </a:lnTo>
+                <a:lnTo>
+                  <a:pt x="4987236" y="298939"/>
+                </a:lnTo>
+                <a:lnTo>
+                  <a:pt x="5018021" y="298939"/>
+                </a:lnTo>
+                <a:lnTo>
+                  <a:pt x="5048807" y="298939"/>
+                </a:lnTo>
+                <a:lnTo>
+                  <a:pt x="5079592" y="298939"/>
+                </a:lnTo>
+                <a:lnTo>
+                  <a:pt x="5110378" y="298939"/>
+                </a:lnTo>
+                <a:lnTo>
+                  <a:pt x="5120640" y="298939"/>
+                </a:lnTo>
+              </a:path>
+            </a:pathLst>
+          </a:custGeom>
+          <a:noFill/>
+          <a:ln w="33020">
+            <a:solidFill>
+              <a:srgbClr val="F2B880"/>
+            </a:solidFill>
+          </a:ln>
+          <a:effectLst/>
+        </p:spPr>
+        <p:txBody>
+          <a:bodyPr rtlCol="0" anchor="ctr"/>
+          <a:lstStyle/>
+          <a:p>
+            <a:pPr algn="ctr"/>
+          </a:p>
+        </p:txBody>
+      </p:sp>
+      <p:sp>
+        <p:nvSpPr>
+          <p:cNvPr id="64" name="C2-E17 polygon 62" descr="sci-ppt:o062"/>
+          <p:cNvSpPr/>
+          <p:nvPr/>
+        </p:nvSpPr>
+        <p:spPr>
+          <a:xfrm>
+            <a:off x="914400" y="3893505"/>
+            <a:ext cx="5120640" cy="1310958"/>
+          </a:xfrm>
+          <a:custGeom>
+            <a:avLst/>
+            <a:gdLst/>
+            <a:ahLst/>
+            <a:cxnLst/>
+            <a:rect l="l" t="t" r="r" b="b"/>
+            <a:pathLst>
+              <a:path w="5120640" h="1310958">
+                <a:moveTo>
+                  <a:pt x="0" y="1310958"/>
+                </a:moveTo>
+                <a:lnTo>
+                  <a:pt x="30785" y="1288337"/>
+                </a:lnTo>
+                <a:lnTo>
+                  <a:pt x="61570" y="1266054"/>
+                </a:lnTo>
+                <a:lnTo>
+                  <a:pt x="92356" y="1244103"/>
+                </a:lnTo>
+                <a:lnTo>
+                  <a:pt x="123141" y="1222479"/>
+                </a:lnTo>
+                <a:lnTo>
+                  <a:pt x="153927" y="1201178"/>
+                </a:lnTo>
+                <a:lnTo>
+                  <a:pt x="184712" y="1180195"/>
+                </a:lnTo>
+                <a:lnTo>
+                  <a:pt x="215497" y="1159525"/>
+                </a:lnTo>
+                <a:lnTo>
+                  <a:pt x="246283" y="1139163"/>
+                </a:lnTo>
+                <a:lnTo>
+                  <a:pt x="277068" y="1119105"/>
+                </a:lnTo>
+                <a:lnTo>
+                  <a:pt x="307854" y="1099346"/>
+                </a:lnTo>
+                <a:lnTo>
+                  <a:pt x="338639" y="1079882"/>
+                </a:lnTo>
+                <a:lnTo>
+                  <a:pt x="369424" y="1060708"/>
+                </a:lnTo>
+                <a:lnTo>
+                  <a:pt x="400210" y="1041820"/>
+                </a:lnTo>
+                <a:lnTo>
+                  <a:pt x="430995" y="1023214"/>
+                </a:lnTo>
+                <a:lnTo>
+                  <a:pt x="461781" y="1004886"/>
+                </a:lnTo>
+                <a:lnTo>
+                  <a:pt x="492566" y="986831"/>
+                </a:lnTo>
+                <a:lnTo>
+                  <a:pt x="523351" y="969045"/>
+                </a:lnTo>
+                <a:lnTo>
+                  <a:pt x="554137" y="951525"/>
+                </a:lnTo>
+                <a:lnTo>
+                  <a:pt x="584922" y="934266"/>
+                </a:lnTo>
+                <a:lnTo>
+                  <a:pt x="615708" y="917264"/>
+                </a:lnTo>
+                <a:lnTo>
+                  <a:pt x="646493" y="900516"/>
+                </a:lnTo>
+                <a:lnTo>
+                  <a:pt x="677279" y="884018"/>
+                </a:lnTo>
+                <a:lnTo>
+                  <a:pt x="708064" y="867766"/>
+                </a:lnTo>
+                <a:lnTo>
+                  <a:pt x="738849" y="851757"/>
+                </a:lnTo>
+                <a:lnTo>
+                  <a:pt x="769635" y="835986"/>
+                </a:lnTo>
+                <a:lnTo>
+                  <a:pt x="800420" y="820450"/>
+                </a:lnTo>
+                <a:lnTo>
+                  <a:pt x="831206" y="805147"/>
+                </a:lnTo>
+                <a:lnTo>
+                  <a:pt x="861991" y="790071"/>
+                </a:lnTo>
+                <a:lnTo>
+                  <a:pt x="892776" y="775221"/>
+                </a:lnTo>
+                <a:lnTo>
+                  <a:pt x="923562" y="760592"/>
+                </a:lnTo>
+                <a:lnTo>
+                  <a:pt x="954347" y="746181"/>
+                </a:lnTo>
+                <a:lnTo>
+                  <a:pt x="985133" y="731985"/>
+                </a:lnTo>
+                <a:lnTo>
+                  <a:pt x="1015918" y="718001"/>
+                </a:lnTo>
+                <a:lnTo>
+                  <a:pt x="1046703" y="704226"/>
+                </a:lnTo>
+                <a:lnTo>
+                  <a:pt x="1077489" y="690656"/>
+                </a:lnTo>
+                <a:lnTo>
+                  <a:pt x="1108274" y="677289"/>
+                </a:lnTo>
+                <a:lnTo>
+                  <a:pt x="1139060" y="664121"/>
+                </a:lnTo>
+                <a:lnTo>
+                  <a:pt x="1169845" y="651149"/>
+                </a:lnTo>
+                <a:lnTo>
+                  <a:pt x="1200631" y="638371"/>
+                </a:lnTo>
+                <a:lnTo>
+                  <a:pt x="1231416" y="625784"/>
+                </a:lnTo>
+                <a:lnTo>
+                  <a:pt x="1262201" y="613384"/>
+                </a:lnTo>
+                <a:lnTo>
+                  <a:pt x="1292987" y="601169"/>
+                </a:lnTo>
+                <a:lnTo>
+                  <a:pt x="1323772" y="589137"/>
+                </a:lnTo>
+                <a:lnTo>
+                  <a:pt x="1354558" y="577284"/>
+                </a:lnTo>
+                <a:lnTo>
+                  <a:pt x="1385343" y="565607"/>
+                </a:lnTo>
+                <a:lnTo>
+                  <a:pt x="1416128" y="554105"/>
+                </a:lnTo>
+                <a:lnTo>
+                  <a:pt x="1446914" y="542775"/>
+                </a:lnTo>
+                <a:lnTo>
+                  <a:pt x="1477699" y="531614"/>
+                </a:lnTo>
+                <a:lnTo>
+                  <a:pt x="1508485" y="520619"/>
+                </a:lnTo>
+                <a:lnTo>
+                  <a:pt x="1539270" y="509788"/>
+                </a:lnTo>
+                <a:lnTo>
+                  <a:pt x="1570055" y="499118"/>
+                </a:lnTo>
+                <a:lnTo>
+                  <a:pt x="1600841" y="488608"/>
+                </a:lnTo>
+                <a:lnTo>
+                  <a:pt x="1631626" y="478255"/>
+                </a:lnTo>
+                <a:lnTo>
+                  <a:pt x="1662412" y="468056"/>
+                </a:lnTo>
+                <a:lnTo>
+                  <a:pt x="1693197" y="458009"/>
+                </a:lnTo>
+                <a:lnTo>
+                  <a:pt x="1723983" y="448112"/>
+                </a:lnTo>
+                <a:lnTo>
+                  <a:pt x="1754768" y="438363"/>
+                </a:lnTo>
+                <a:lnTo>
+                  <a:pt x="1785553" y="428759"/>
+                </a:lnTo>
+                <a:lnTo>
+                  <a:pt x="1816339" y="419299"/>
+                </a:lnTo>
+                <a:lnTo>
+                  <a:pt x="1847124" y="409979"/>
+                </a:lnTo>
+                <a:lnTo>
+                  <a:pt x="1877910" y="400799"/>
+                </a:lnTo>
+                <a:lnTo>
+                  <a:pt x="1908695" y="391755"/>
+                </a:lnTo>
+                <a:lnTo>
+                  <a:pt x="1939480" y="382847"/>
+                </a:lnTo>
+                <a:lnTo>
+                  <a:pt x="1970266" y="374071"/>
+                </a:lnTo>
+                <a:lnTo>
+                  <a:pt x="2001051" y="365426"/>
+                </a:lnTo>
+                <a:lnTo>
+                  <a:pt x="2031837" y="356911"/>
+                </a:lnTo>
+                <a:lnTo>
+                  <a:pt x="2062622" y="348522"/>
+                </a:lnTo>
+                <a:lnTo>
+                  <a:pt x="2093407" y="340258"/>
+                </a:lnTo>
+                <a:lnTo>
+                  <a:pt x="2124193" y="332118"/>
+                </a:lnTo>
+                <a:lnTo>
+                  <a:pt x="2154978" y="324099"/>
+                </a:lnTo>
+                <a:lnTo>
+                  <a:pt x="2185764" y="316200"/>
+                </a:lnTo>
+                <a:lnTo>
+                  <a:pt x="2216549" y="308418"/>
+                </a:lnTo>
+                <a:lnTo>
+                  <a:pt x="2247334" y="300753"/>
+                </a:lnTo>
+                <a:lnTo>
+                  <a:pt x="2278120" y="293202"/>
+                </a:lnTo>
+                <a:lnTo>
+                  <a:pt x="2308905" y="285764"/>
+                </a:lnTo>
+                <a:lnTo>
+                  <a:pt x="2339691" y="278436"/>
+                </a:lnTo>
+                <a:lnTo>
+                  <a:pt x="2370476" y="271218"/>
+                </a:lnTo>
+                <a:lnTo>
+                  <a:pt x="2401262" y="264108"/>
+                </a:lnTo>
+                <a:lnTo>
+                  <a:pt x="2432047" y="257103"/>
+                </a:lnTo>
+                <a:lnTo>
+                  <a:pt x="2462832" y="250204"/>
+                </a:lnTo>
+                <a:lnTo>
+                  <a:pt x="2493618" y="243407"/>
+                </a:lnTo>
+                <a:lnTo>
+                  <a:pt x="2524403" y="236711"/>
+                </a:lnTo>
+                <a:lnTo>
+                  <a:pt x="2555189" y="230115"/>
+                </a:lnTo>
+                <a:lnTo>
+                  <a:pt x="2585974" y="223618"/>
+                </a:lnTo>
+                <a:lnTo>
+                  <a:pt x="2616759" y="217218"/>
+                </a:lnTo>
+                <a:lnTo>
+                  <a:pt x="2647545" y="210913"/>
+                </a:lnTo>
+                <a:lnTo>
+                  <a:pt x="2678330" y="204702"/>
+                </a:lnTo>
+                <a:lnTo>
+                  <a:pt x="2709116" y="198584"/>
+                </a:lnTo>
+                <a:lnTo>
+                  <a:pt x="2739901" y="192557"/>
+                </a:lnTo>
+                <a:lnTo>
+                  <a:pt x="2770686" y="186620"/>
+                </a:lnTo>
+                <a:lnTo>
+                  <a:pt x="2801472" y="180772"/>
+                </a:lnTo>
+                <a:lnTo>
+                  <a:pt x="2832257" y="175011"/>
+                </a:lnTo>
+                <a:lnTo>
+                  <a:pt x="2863043" y="169335"/>
+                </a:lnTo>
+                <a:lnTo>
+                  <a:pt x="2893828" y="163745"/>
+                </a:lnTo>
+                <a:lnTo>
+                  <a:pt x="2924614" y="158238"/>
+                </a:lnTo>
+                <a:lnTo>
+                  <a:pt x="2955399" y="152813"/>
+                </a:lnTo>
+                <a:lnTo>
+                  <a:pt x="2986184" y="147469"/>
+                </a:lnTo>
+                <a:lnTo>
+                  <a:pt x="3016970" y="142204"/>
+                </a:lnTo>
+                <a:lnTo>
+                  <a:pt x="3047755" y="137018"/>
+                </a:lnTo>
+                <a:lnTo>
+                  <a:pt x="3078541" y="131910"/>
+                </a:lnTo>
+                <a:lnTo>
+                  <a:pt x="3109326" y="126878"/>
+                </a:lnTo>
+                <a:lnTo>
+                  <a:pt x="3140111" y="121920"/>
+                </a:lnTo>
+                <a:lnTo>
+                  <a:pt x="3170897" y="117037"/>
+                </a:lnTo>
+                <a:lnTo>
+                  <a:pt x="3201682" y="112227"/>
+                </a:lnTo>
+                <a:lnTo>
+                  <a:pt x="3232468" y="107488"/>
+                </a:lnTo>
+                <a:lnTo>
+                  <a:pt x="3263253" y="102820"/>
+                </a:lnTo>
+                <a:lnTo>
+                  <a:pt x="3294038" y="98222"/>
+                </a:lnTo>
+                <a:lnTo>
+                  <a:pt x="3324824" y="93692"/>
+                </a:lnTo>
+                <a:lnTo>
+                  <a:pt x="3355609" y="89230"/>
+                </a:lnTo>
+                <a:lnTo>
+                  <a:pt x="3386395" y="84835"/>
+                </a:lnTo>
+                <a:lnTo>
+                  <a:pt x="3417180" y="80505"/>
+                </a:lnTo>
+                <a:lnTo>
+                  <a:pt x="3447966" y="76239"/>
+                </a:lnTo>
+                <a:lnTo>
+                  <a:pt x="3478751" y="72037"/>
+                </a:lnTo>
+                <a:lnTo>
+                  <a:pt x="3509536" y="67898"/>
+                </a:lnTo>
+                <a:lnTo>
+                  <a:pt x="3540322" y="63821"/>
+                </a:lnTo>
+                <a:lnTo>
+                  <a:pt x="3571107" y="59804"/>
+                </a:lnTo>
+                <a:lnTo>
+                  <a:pt x="3601893" y="55848"/>
+                </a:lnTo>
+                <a:lnTo>
+                  <a:pt x="3632678" y="51950"/>
+                </a:lnTo>
+                <a:lnTo>
+                  <a:pt x="3663463" y="48111"/>
+                </a:lnTo>
+                <a:lnTo>
+                  <a:pt x="3694249" y="44329"/>
+                </a:lnTo>
+                <a:lnTo>
+                  <a:pt x="3725034" y="40603"/>
+                </a:lnTo>
+                <a:lnTo>
+                  <a:pt x="3755820" y="36933"/>
+                </a:lnTo>
+                <a:lnTo>
+                  <a:pt x="3786605" y="33317"/>
+                </a:lnTo>
+                <a:lnTo>
+                  <a:pt x="3817390" y="29756"/>
+                </a:lnTo>
+                <a:lnTo>
+                  <a:pt x="3848176" y="26247"/>
+                </a:lnTo>
+                <a:lnTo>
+                  <a:pt x="3878961" y="22791"/>
+                </a:lnTo>
+                <a:lnTo>
+                  <a:pt x="3909747" y="19387"/>
+                </a:lnTo>
+                <a:lnTo>
+                  <a:pt x="3940532" y="16033"/>
+                </a:lnTo>
+                <a:lnTo>
+                  <a:pt x="3971317" y="12730"/>
+                </a:lnTo>
+                <a:lnTo>
+                  <a:pt x="4002103" y="9475"/>
+                </a:lnTo>
+                <a:lnTo>
+                  <a:pt x="4032888" y="6269"/>
+                </a:lnTo>
+                <a:lnTo>
+                  <a:pt x="4063674" y="3111"/>
+                </a:lnTo>
+                <a:lnTo>
+                  <a:pt x="4094459" y="0"/>
+                </a:lnTo>
+                <a:lnTo>
+                  <a:pt x="4125245" y="0"/>
+                </a:lnTo>
+                <a:lnTo>
+                  <a:pt x="4156030" y="0"/>
+                </a:lnTo>
+                <a:lnTo>
+                  <a:pt x="4186815" y="0"/>
+                </a:lnTo>
+                <a:lnTo>
+                  <a:pt x="4217601" y="0"/>
+                </a:lnTo>
+                <a:lnTo>
+                  <a:pt x="4248386" y="0"/>
+                </a:lnTo>
+                <a:lnTo>
+                  <a:pt x="4279172" y="0"/>
+                </a:lnTo>
+                <a:lnTo>
+                  <a:pt x="4309957" y="0"/>
+                </a:lnTo>
+                <a:lnTo>
+                  <a:pt x="4340742" y="0"/>
+                </a:lnTo>
+                <a:lnTo>
+                  <a:pt x="4371528" y="0"/>
+                </a:lnTo>
+                <a:lnTo>
+                  <a:pt x="4402313" y="0"/>
+                </a:lnTo>
+                <a:lnTo>
+                  <a:pt x="4433099" y="0"/>
+                </a:lnTo>
+                <a:lnTo>
+                  <a:pt x="4463884" y="0"/>
+                </a:lnTo>
+                <a:lnTo>
+                  <a:pt x="4494669" y="0"/>
+                </a:lnTo>
+                <a:lnTo>
+                  <a:pt x="4525455" y="0"/>
+                </a:lnTo>
+                <a:lnTo>
+                  <a:pt x="4556240" y="0"/>
+                </a:lnTo>
+                <a:lnTo>
+                  <a:pt x="4587026" y="0"/>
+                </a:lnTo>
+                <a:lnTo>
+                  <a:pt x="4617811" y="0"/>
+                </a:lnTo>
+                <a:lnTo>
+                  <a:pt x="4648597" y="0"/>
+                </a:lnTo>
+                <a:lnTo>
+                  <a:pt x="4679382" y="0"/>
+                </a:lnTo>
+                <a:lnTo>
+                  <a:pt x="4710167" y="0"/>
+                </a:lnTo>
+                <a:lnTo>
+                  <a:pt x="4740953" y="0"/>
+                </a:lnTo>
+                <a:lnTo>
+                  <a:pt x="4771738" y="0"/>
+                </a:lnTo>
+                <a:lnTo>
+                  <a:pt x="4802524" y="0"/>
+                </a:lnTo>
+                <a:lnTo>
+                  <a:pt x="4833309" y="0"/>
+                </a:lnTo>
+                <a:lnTo>
+                  <a:pt x="4864094" y="0"/>
+                </a:lnTo>
+                <a:lnTo>
+                  <a:pt x="4894880" y="0"/>
+                </a:lnTo>
+                <a:lnTo>
+                  <a:pt x="4925665" y="0"/>
+                </a:lnTo>
+                <a:lnTo>
+                  <a:pt x="4956451" y="0"/>
+                </a:lnTo>
+                <a:lnTo>
+                  <a:pt x="4987236" y="0"/>
+                </a:lnTo>
+                <a:lnTo>
+                  <a:pt x="5018021" y="0"/>
+                </a:lnTo>
+                <a:lnTo>
+                  <a:pt x="5048807" y="0"/>
+                </a:lnTo>
+                <a:lnTo>
+                  <a:pt x="5079592" y="0"/>
+                </a:lnTo>
+                <a:lnTo>
+                  <a:pt x="5110378" y="0"/>
+                </a:lnTo>
+                <a:lnTo>
+                  <a:pt x="5120640" y="0"/>
+                </a:lnTo>
+              </a:path>
+            </a:pathLst>
+          </a:custGeom>
+          <a:noFill/>
+          <a:ln w="38100">
+            <a:solidFill>
+              <a:srgbClr val="F2B880"/>
+            </a:solidFill>
+          </a:ln>
+          <a:effectLst/>
+        </p:spPr>
+        <p:txBody>
+          <a:bodyPr rtlCol="0" anchor="ctr"/>
+          <a:lstStyle/>
+          <a:p>
+            <a:pPr algn="ctr"/>
+          </a:p>
+        </p:txBody>
+      </p:sp>
+      <p:sp>
+        <p:nvSpPr>
+          <p:cNvPr id="65" name="C2-E17 ellipse 63" descr="sci-ppt:o063"/>
+          <p:cNvSpPr/>
+          <p:nvPr/>
+        </p:nvSpPr>
+        <p:spPr>
+          <a:xfrm>
+            <a:off x="5980176" y="3839466"/>
+            <a:ext cx="109728" cy="109728"/>
+          </a:xfrm>
+          <a:prstGeom prst="ellipse">
             <a:avLst/>
           </a:prstGeom>
-          <a:ln w="25400">
+          <a:solidFill>
+            <a:srgbClr val="F2B880"/>
+          </a:solidFill>
+          <a:ln w="12700">
+            <a:solidFill>
+              <a:srgbClr val="F2B880"/>
+            </a:solidFill>
+          </a:ln>
+          <a:effectLst/>
+        </p:spPr>
+        <p:txBody>
+          <a:bodyPr rtlCol="0" anchor="ctr"/>
+          <a:lstStyle/>
+          <a:p>
+            <a:pPr algn="ctr"/>
+          </a:p>
+        </p:txBody>
+      </p:sp>
+      <p:sp>
+        <p:nvSpPr>
+          <p:cNvPr id="66" name="C2-E17 polygon 64" descr="sci-ppt:o064"/>
+          <p:cNvSpPr/>
+          <p:nvPr/>
+        </p:nvSpPr>
+        <p:spPr>
+          <a:xfrm>
+            <a:off x="914400" y="1730326"/>
+            <a:ext cx="5120640" cy="1195754"/>
+          </a:xfrm>
+          <a:custGeom>
+            <a:avLst/>
+            <a:gdLst/>
+            <a:ahLst/>
+            <a:cxnLst/>
+            <a:rect l="l" t="t" r="r" b="b"/>
+            <a:pathLst>
+              <a:path w="5120640" h="1195754">
+                <a:moveTo>
+                  <a:pt x="0" y="0"/>
+                </a:moveTo>
+                <a:lnTo>
+                  <a:pt x="30785" y="0"/>
+                </a:lnTo>
+                <a:lnTo>
+                  <a:pt x="61570" y="0"/>
+                </a:lnTo>
+                <a:lnTo>
+                  <a:pt x="92356" y="0"/>
+                </a:lnTo>
+                <a:lnTo>
+                  <a:pt x="123141" y="0"/>
+                </a:lnTo>
+                <a:lnTo>
+                  <a:pt x="153927" y="0"/>
+                </a:lnTo>
+                <a:lnTo>
+                  <a:pt x="184712" y="0"/>
+                </a:lnTo>
+                <a:lnTo>
+                  <a:pt x="215497" y="1195754"/>
+                </a:lnTo>
+                <a:lnTo>
+                  <a:pt x="246283" y="1195754"/>
+                </a:lnTo>
+                <a:lnTo>
+                  <a:pt x="277068" y="1195754"/>
+                </a:lnTo>
+                <a:lnTo>
+                  <a:pt x="307854" y="1195754"/>
+                </a:lnTo>
+                <a:lnTo>
+                  <a:pt x="338639" y="1195754"/>
+                </a:lnTo>
+                <a:lnTo>
+                  <a:pt x="369424" y="1195754"/>
+                </a:lnTo>
+                <a:lnTo>
+                  <a:pt x="400210" y="1195754"/>
+                </a:lnTo>
+                <a:lnTo>
+                  <a:pt x="430995" y="1195754"/>
+                </a:lnTo>
+                <a:lnTo>
+                  <a:pt x="461781" y="1195754"/>
+                </a:lnTo>
+                <a:lnTo>
+                  <a:pt x="492566" y="1195754"/>
+                </a:lnTo>
+                <a:lnTo>
+                  <a:pt x="523351" y="1195754"/>
+                </a:lnTo>
+                <a:lnTo>
+                  <a:pt x="554137" y="1195754"/>
+                </a:lnTo>
+                <a:lnTo>
+                  <a:pt x="584922" y="1195754"/>
+                </a:lnTo>
+                <a:lnTo>
+                  <a:pt x="615708" y="1195754"/>
+                </a:lnTo>
+                <a:lnTo>
+                  <a:pt x="646493" y="1195754"/>
+                </a:lnTo>
+                <a:lnTo>
+                  <a:pt x="677279" y="1195754"/>
+                </a:lnTo>
+                <a:lnTo>
+                  <a:pt x="708064" y="1195754"/>
+                </a:lnTo>
+                <a:lnTo>
+                  <a:pt x="738849" y="1195754"/>
+                </a:lnTo>
+                <a:lnTo>
+                  <a:pt x="769635" y="1195754"/>
+                </a:lnTo>
+                <a:lnTo>
+                  <a:pt x="800420" y="1195754"/>
+                </a:lnTo>
+                <a:lnTo>
+                  <a:pt x="831206" y="1195754"/>
+                </a:lnTo>
+                <a:lnTo>
+                  <a:pt x="861991" y="1195754"/>
+                </a:lnTo>
+                <a:lnTo>
+                  <a:pt x="892776" y="1195754"/>
+                </a:lnTo>
+                <a:lnTo>
+                  <a:pt x="923562" y="1195754"/>
+                </a:lnTo>
+                <a:lnTo>
+                  <a:pt x="954347" y="1195754"/>
+                </a:lnTo>
+                <a:lnTo>
+                  <a:pt x="985133" y="1195754"/>
+                </a:lnTo>
+                <a:lnTo>
+                  <a:pt x="1015918" y="1195754"/>
+                </a:lnTo>
+                <a:lnTo>
+                  <a:pt x="1046703" y="1195754"/>
+                </a:lnTo>
+                <a:lnTo>
+                  <a:pt x="1077489" y="1195754"/>
+                </a:lnTo>
+                <a:lnTo>
+                  <a:pt x="1108274" y="1195754"/>
+                </a:lnTo>
+                <a:lnTo>
+                  <a:pt x="1139060" y="1195754"/>
+                </a:lnTo>
+                <a:lnTo>
+                  <a:pt x="1169845" y="1195754"/>
+                </a:lnTo>
+                <a:lnTo>
+                  <a:pt x="1200631" y="1195754"/>
+                </a:lnTo>
+                <a:lnTo>
+                  <a:pt x="1231416" y="1195754"/>
+                </a:lnTo>
+                <a:lnTo>
+                  <a:pt x="1262201" y="1195754"/>
+                </a:lnTo>
+                <a:lnTo>
+                  <a:pt x="1292987" y="1195754"/>
+                </a:lnTo>
+                <a:lnTo>
+                  <a:pt x="1323772" y="1195754"/>
+                </a:lnTo>
+                <a:lnTo>
+                  <a:pt x="1354558" y="1195754"/>
+                </a:lnTo>
+                <a:lnTo>
+                  <a:pt x="1385343" y="1195754"/>
+                </a:lnTo>
+                <a:lnTo>
+                  <a:pt x="1416128" y="1195754"/>
+                </a:lnTo>
+                <a:lnTo>
+                  <a:pt x="1446914" y="1195754"/>
+                </a:lnTo>
+                <a:lnTo>
+                  <a:pt x="1477699" y="1195754"/>
+                </a:lnTo>
+                <a:lnTo>
+                  <a:pt x="1508485" y="1195754"/>
+                </a:lnTo>
+                <a:lnTo>
+                  <a:pt x="1539270" y="1195754"/>
+                </a:lnTo>
+                <a:lnTo>
+                  <a:pt x="1570055" y="1195754"/>
+                </a:lnTo>
+                <a:lnTo>
+                  <a:pt x="1600841" y="1195754"/>
+                </a:lnTo>
+                <a:lnTo>
+                  <a:pt x="1631626" y="1195754"/>
+                </a:lnTo>
+                <a:lnTo>
+                  <a:pt x="1662412" y="1195754"/>
+                </a:lnTo>
+                <a:lnTo>
+                  <a:pt x="1693197" y="1195754"/>
+                </a:lnTo>
+                <a:lnTo>
+                  <a:pt x="1723983" y="1195754"/>
+                </a:lnTo>
+                <a:lnTo>
+                  <a:pt x="1754768" y="1195754"/>
+                </a:lnTo>
+                <a:lnTo>
+                  <a:pt x="1785553" y="1195754"/>
+                </a:lnTo>
+                <a:lnTo>
+                  <a:pt x="1816339" y="1195754"/>
+                </a:lnTo>
+                <a:lnTo>
+                  <a:pt x="1847124" y="1195754"/>
+                </a:lnTo>
+                <a:lnTo>
+                  <a:pt x="1877910" y="1195754"/>
+                </a:lnTo>
+                <a:lnTo>
+                  <a:pt x="1908695" y="1195754"/>
+                </a:lnTo>
+                <a:lnTo>
+                  <a:pt x="1939480" y="1195754"/>
+                </a:lnTo>
+                <a:lnTo>
+                  <a:pt x="1970266" y="1195754"/>
+                </a:lnTo>
+                <a:lnTo>
+                  <a:pt x="2001051" y="1195754"/>
+                </a:lnTo>
+                <a:lnTo>
+                  <a:pt x="2031837" y="1195754"/>
+                </a:lnTo>
+                <a:lnTo>
+                  <a:pt x="2062622" y="1195754"/>
+                </a:lnTo>
+                <a:lnTo>
+                  <a:pt x="2093407" y="1195754"/>
+                </a:lnTo>
+                <a:lnTo>
+                  <a:pt x="2124193" y="1195754"/>
+                </a:lnTo>
+                <a:lnTo>
+                  <a:pt x="2154978" y="1195754"/>
+                </a:lnTo>
+                <a:lnTo>
+                  <a:pt x="2185764" y="1195754"/>
+                </a:lnTo>
+                <a:lnTo>
+                  <a:pt x="2216549" y="1195754"/>
+                </a:lnTo>
+                <a:lnTo>
+                  <a:pt x="2247334" y="1195754"/>
+                </a:lnTo>
+                <a:lnTo>
+                  <a:pt x="2278120" y="1195754"/>
+                </a:lnTo>
+                <a:lnTo>
+                  <a:pt x="2308905" y="1195754"/>
+                </a:lnTo>
+                <a:lnTo>
+                  <a:pt x="2339691" y="1195754"/>
+                </a:lnTo>
+                <a:lnTo>
+                  <a:pt x="2370476" y="1195754"/>
+                </a:lnTo>
+                <a:lnTo>
+                  <a:pt x="2401262" y="1195754"/>
+                </a:lnTo>
+                <a:lnTo>
+                  <a:pt x="2432047" y="1195754"/>
+                </a:lnTo>
+                <a:lnTo>
+                  <a:pt x="2462832" y="1195754"/>
+                </a:lnTo>
+                <a:lnTo>
+                  <a:pt x="2493618" y="1195754"/>
+                </a:lnTo>
+                <a:lnTo>
+                  <a:pt x="2524403" y="1195754"/>
+                </a:lnTo>
+                <a:lnTo>
+                  <a:pt x="2555189" y="1195754"/>
+                </a:lnTo>
+                <a:lnTo>
+                  <a:pt x="2585974" y="1195754"/>
+                </a:lnTo>
+                <a:lnTo>
+                  <a:pt x="2616759" y="1195754"/>
+                </a:lnTo>
+                <a:lnTo>
+                  <a:pt x="2647545" y="1195754"/>
+                </a:lnTo>
+                <a:lnTo>
+                  <a:pt x="2678330" y="1195754"/>
+                </a:lnTo>
+                <a:lnTo>
+                  <a:pt x="2709116" y="1195754"/>
+                </a:lnTo>
+                <a:lnTo>
+                  <a:pt x="2739901" y="1195754"/>
+                </a:lnTo>
+                <a:lnTo>
+                  <a:pt x="2770686" y="1195754"/>
+                </a:lnTo>
+                <a:lnTo>
+                  <a:pt x="2801472" y="1195754"/>
+                </a:lnTo>
+                <a:lnTo>
+                  <a:pt x="2832257" y="1195754"/>
+                </a:lnTo>
+                <a:lnTo>
+                  <a:pt x="2863043" y="1195754"/>
+                </a:lnTo>
+                <a:lnTo>
+                  <a:pt x="2893828" y="1195754"/>
+                </a:lnTo>
+                <a:lnTo>
+                  <a:pt x="2924614" y="1195754"/>
+                </a:lnTo>
+                <a:lnTo>
+                  <a:pt x="2955399" y="1195754"/>
+                </a:lnTo>
+                <a:lnTo>
+                  <a:pt x="2986184" y="1195754"/>
+                </a:lnTo>
+                <a:lnTo>
+                  <a:pt x="3016970" y="1195754"/>
+                </a:lnTo>
+                <a:lnTo>
+                  <a:pt x="3047755" y="1195754"/>
+                </a:lnTo>
+                <a:lnTo>
+                  <a:pt x="3078541" y="1195754"/>
+                </a:lnTo>
+                <a:lnTo>
+                  <a:pt x="3109326" y="1195754"/>
+                </a:lnTo>
+                <a:lnTo>
+                  <a:pt x="3140111" y="1195754"/>
+                </a:lnTo>
+                <a:lnTo>
+                  <a:pt x="3170897" y="1195754"/>
+                </a:lnTo>
+                <a:lnTo>
+                  <a:pt x="3201682" y="1195754"/>
+                </a:lnTo>
+                <a:lnTo>
+                  <a:pt x="3232468" y="1195754"/>
+                </a:lnTo>
+                <a:lnTo>
+                  <a:pt x="3263253" y="1195754"/>
+                </a:lnTo>
+                <a:lnTo>
+                  <a:pt x="3294038" y="1195754"/>
+                </a:lnTo>
+                <a:lnTo>
+                  <a:pt x="3324824" y="1195754"/>
+                </a:lnTo>
+                <a:lnTo>
+                  <a:pt x="3355609" y="1195754"/>
+                </a:lnTo>
+                <a:lnTo>
+                  <a:pt x="3386395" y="1195754"/>
+                </a:lnTo>
+                <a:lnTo>
+                  <a:pt x="3417180" y="1195754"/>
+                </a:lnTo>
+                <a:lnTo>
+                  <a:pt x="3447966" y="1195754"/>
+                </a:lnTo>
+                <a:lnTo>
+                  <a:pt x="3478751" y="1195754"/>
+                </a:lnTo>
+                <a:lnTo>
+                  <a:pt x="3509536" y="1195754"/>
+                </a:lnTo>
+                <a:lnTo>
+                  <a:pt x="3540322" y="1195754"/>
+                </a:lnTo>
+                <a:lnTo>
+                  <a:pt x="3571107" y="1195754"/>
+                </a:lnTo>
+                <a:lnTo>
+                  <a:pt x="3601893" y="1195754"/>
+                </a:lnTo>
+                <a:lnTo>
+                  <a:pt x="3632678" y="1195754"/>
+                </a:lnTo>
+                <a:lnTo>
+                  <a:pt x="3663463" y="1195754"/>
+                </a:lnTo>
+                <a:lnTo>
+                  <a:pt x="3694249" y="1195754"/>
+                </a:lnTo>
+                <a:lnTo>
+                  <a:pt x="3725034" y="1195754"/>
+                </a:lnTo>
+                <a:lnTo>
+                  <a:pt x="3755820" y="1195754"/>
+                </a:lnTo>
+                <a:lnTo>
+                  <a:pt x="3786605" y="1195754"/>
+                </a:lnTo>
+                <a:lnTo>
+                  <a:pt x="3817390" y="1195754"/>
+                </a:lnTo>
+                <a:lnTo>
+                  <a:pt x="3848176" y="1195754"/>
+                </a:lnTo>
+                <a:lnTo>
+                  <a:pt x="3878961" y="1195754"/>
+                </a:lnTo>
+                <a:lnTo>
+                  <a:pt x="3909747" y="1195754"/>
+                </a:lnTo>
+                <a:lnTo>
+                  <a:pt x="3940532" y="1195754"/>
+                </a:lnTo>
+                <a:lnTo>
+                  <a:pt x="3971317" y="1195754"/>
+                </a:lnTo>
+                <a:lnTo>
+                  <a:pt x="4002103" y="1195754"/>
+                </a:lnTo>
+                <a:lnTo>
+                  <a:pt x="4032888" y="1195754"/>
+                </a:lnTo>
+                <a:lnTo>
+                  <a:pt x="4063674" y="1195754"/>
+                </a:lnTo>
+                <a:lnTo>
+                  <a:pt x="4094459" y="1195754"/>
+                </a:lnTo>
+                <a:lnTo>
+                  <a:pt x="4125245" y="1195754"/>
+                </a:lnTo>
+                <a:lnTo>
+                  <a:pt x="4156030" y="1195754"/>
+                </a:lnTo>
+                <a:lnTo>
+                  <a:pt x="4186815" y="1195754"/>
+                </a:lnTo>
+                <a:lnTo>
+                  <a:pt x="4217601" y="1195754"/>
+                </a:lnTo>
+                <a:lnTo>
+                  <a:pt x="4248386" y="1195754"/>
+                </a:lnTo>
+                <a:lnTo>
+                  <a:pt x="4279172" y="1195754"/>
+                </a:lnTo>
+                <a:lnTo>
+                  <a:pt x="4309957" y="1195754"/>
+                </a:lnTo>
+                <a:lnTo>
+                  <a:pt x="4340742" y="1195754"/>
+                </a:lnTo>
+                <a:lnTo>
+                  <a:pt x="4371528" y="1195754"/>
+                </a:lnTo>
+                <a:lnTo>
+                  <a:pt x="4402313" y="1195754"/>
+                </a:lnTo>
+                <a:lnTo>
+                  <a:pt x="4433099" y="1195754"/>
+                </a:lnTo>
+                <a:lnTo>
+                  <a:pt x="4463884" y="1195754"/>
+                </a:lnTo>
+                <a:lnTo>
+                  <a:pt x="4494669" y="1195754"/>
+                </a:lnTo>
+                <a:lnTo>
+                  <a:pt x="4525455" y="1195754"/>
+                </a:lnTo>
+                <a:lnTo>
+                  <a:pt x="4556240" y="1195754"/>
+                </a:lnTo>
+                <a:lnTo>
+                  <a:pt x="4587026" y="1195754"/>
+                </a:lnTo>
+                <a:lnTo>
+                  <a:pt x="4617811" y="1195754"/>
+                </a:lnTo>
+                <a:lnTo>
+                  <a:pt x="4648597" y="1195754"/>
+                </a:lnTo>
+                <a:lnTo>
+                  <a:pt x="4679382" y="1195754"/>
+                </a:lnTo>
+                <a:lnTo>
+                  <a:pt x="4710167" y="1195754"/>
+                </a:lnTo>
+                <a:lnTo>
+                  <a:pt x="4740953" y="1195754"/>
+                </a:lnTo>
+                <a:lnTo>
+                  <a:pt x="4771738" y="1195754"/>
+                </a:lnTo>
+                <a:lnTo>
+                  <a:pt x="4802524" y="1195754"/>
+                </a:lnTo>
+                <a:lnTo>
+                  <a:pt x="4833309" y="1195754"/>
+                </a:lnTo>
+                <a:lnTo>
+                  <a:pt x="4864094" y="1195754"/>
+                </a:lnTo>
+                <a:lnTo>
+                  <a:pt x="4894880" y="1195754"/>
+                </a:lnTo>
+                <a:lnTo>
+                  <a:pt x="4925665" y="1195754"/>
+                </a:lnTo>
+                <a:lnTo>
+                  <a:pt x="4956451" y="1195754"/>
+                </a:lnTo>
+                <a:lnTo>
+                  <a:pt x="4987236" y="1195754"/>
+                </a:lnTo>
+                <a:lnTo>
+                  <a:pt x="5018021" y="1195754"/>
+                </a:lnTo>
+                <a:lnTo>
+                  <a:pt x="5048807" y="1195754"/>
+                </a:lnTo>
+                <a:lnTo>
+                  <a:pt x="5079592" y="1195754"/>
+                </a:lnTo>
+                <a:lnTo>
+                  <a:pt x="5110378" y="1195754"/>
+                </a:lnTo>
+                <a:lnTo>
+                  <a:pt x="5120640" y="1195754"/>
+                </a:lnTo>
+              </a:path>
+            </a:pathLst>
+          </a:custGeom>
+          <a:noFill/>
+          <a:ln w="33020">
+            <a:solidFill>
+              <a:srgbClr val="F28BA0"/>
+            </a:solidFill>
+          </a:ln>
+          <a:effectLst/>
+        </p:spPr>
+        <p:txBody>
+          <a:bodyPr rtlCol="0" anchor="ctr"/>
+          <a:lstStyle/>
+          <a:p>
+            <a:pPr algn="ctr"/>
+          </a:p>
+        </p:txBody>
+      </p:sp>
+      <p:sp>
+        <p:nvSpPr>
+          <p:cNvPr id="67" name="C2-E17 polygon 65" descr="sci-ppt:o065"/>
+          <p:cNvSpPr/>
+          <p:nvPr/>
+        </p:nvSpPr>
+        <p:spPr>
+          <a:xfrm>
+            <a:off x="914400" y="4708829"/>
+            <a:ext cx="5120640" cy="473013"/>
+          </a:xfrm>
+          <a:custGeom>
+            <a:avLst/>
+            <a:gdLst/>
+            <a:ahLst/>
+            <a:cxnLst/>
+            <a:rect l="l" t="t" r="r" b="b"/>
+            <a:pathLst>
+              <a:path w="5120640" h="473013">
+                <a:moveTo>
+                  <a:pt x="0" y="473013"/>
+                </a:moveTo>
+                <a:lnTo>
+                  <a:pt x="30785" y="385854"/>
+                </a:lnTo>
+                <a:lnTo>
+                  <a:pt x="61570" y="303781"/>
+                </a:lnTo>
+                <a:lnTo>
+                  <a:pt x="92356" y="226496"/>
+                </a:lnTo>
+                <a:lnTo>
+                  <a:pt x="123141" y="153721"/>
+                </a:lnTo>
+                <a:lnTo>
+                  <a:pt x="153927" y="85192"/>
+                </a:lnTo>
+                <a:lnTo>
+                  <a:pt x="184712" y="20662"/>
+                </a:lnTo>
+                <a:lnTo>
+                  <a:pt x="215497" y="0"/>
+                </a:lnTo>
+                <a:lnTo>
+                  <a:pt x="246283" y="0"/>
+                </a:lnTo>
+                <a:lnTo>
+                  <a:pt x="277068" y="0"/>
+                </a:lnTo>
+                <a:lnTo>
+                  <a:pt x="307854" y="0"/>
+                </a:lnTo>
+                <a:lnTo>
+                  <a:pt x="338639" y="0"/>
+                </a:lnTo>
+                <a:lnTo>
+                  <a:pt x="369424" y="0"/>
+                </a:lnTo>
+                <a:lnTo>
+                  <a:pt x="400210" y="0"/>
+                </a:lnTo>
+                <a:lnTo>
+                  <a:pt x="430995" y="0"/>
+                </a:lnTo>
+                <a:lnTo>
+                  <a:pt x="461781" y="0"/>
+                </a:lnTo>
+                <a:lnTo>
+                  <a:pt x="492566" y="0"/>
+                </a:lnTo>
+                <a:lnTo>
+                  <a:pt x="523351" y="0"/>
+                </a:lnTo>
+                <a:lnTo>
+                  <a:pt x="554137" y="0"/>
+                </a:lnTo>
+                <a:lnTo>
+                  <a:pt x="584922" y="0"/>
+                </a:lnTo>
+                <a:lnTo>
+                  <a:pt x="615708" y="0"/>
+                </a:lnTo>
+                <a:lnTo>
+                  <a:pt x="646493" y="0"/>
+                </a:lnTo>
+                <a:lnTo>
+                  <a:pt x="677279" y="0"/>
+                </a:lnTo>
+                <a:lnTo>
+                  <a:pt x="708064" y="0"/>
+                </a:lnTo>
+                <a:lnTo>
+                  <a:pt x="738849" y="0"/>
+                </a:lnTo>
+                <a:lnTo>
+                  <a:pt x="769635" y="0"/>
+                </a:lnTo>
+                <a:lnTo>
+                  <a:pt x="800420" y="0"/>
+                </a:lnTo>
+                <a:lnTo>
+                  <a:pt x="831206" y="0"/>
+                </a:lnTo>
+                <a:lnTo>
+                  <a:pt x="861991" y="0"/>
+                </a:lnTo>
+                <a:lnTo>
+                  <a:pt x="892776" y="0"/>
+                </a:lnTo>
+                <a:lnTo>
+                  <a:pt x="923562" y="0"/>
+                </a:lnTo>
+                <a:lnTo>
+                  <a:pt x="954347" y="0"/>
+                </a:lnTo>
+                <a:lnTo>
+                  <a:pt x="985133" y="0"/>
+                </a:lnTo>
+                <a:lnTo>
+                  <a:pt x="1015918" y="0"/>
+                </a:lnTo>
+                <a:lnTo>
+                  <a:pt x="1046703" y="0"/>
+                </a:lnTo>
+                <a:lnTo>
+                  <a:pt x="1077489" y="0"/>
+                </a:lnTo>
+                <a:lnTo>
+                  <a:pt x="1108274" y="0"/>
+                </a:lnTo>
+                <a:lnTo>
+                  <a:pt x="1139060" y="0"/>
+                </a:lnTo>
+                <a:lnTo>
+                  <a:pt x="1169845" y="0"/>
+                </a:lnTo>
+                <a:lnTo>
+                  <a:pt x="1200631" y="0"/>
+                </a:lnTo>
+                <a:lnTo>
+                  <a:pt x="1231416" y="0"/>
+                </a:lnTo>
+                <a:lnTo>
+                  <a:pt x="1262201" y="0"/>
+                </a:lnTo>
+                <a:lnTo>
+                  <a:pt x="1292987" y="0"/>
+                </a:lnTo>
+                <a:lnTo>
+                  <a:pt x="1323772" y="0"/>
+                </a:lnTo>
+                <a:lnTo>
+                  <a:pt x="1354558" y="0"/>
+                </a:lnTo>
+                <a:lnTo>
+                  <a:pt x="1385343" y="0"/>
+                </a:lnTo>
+                <a:lnTo>
+                  <a:pt x="1416128" y="0"/>
+                </a:lnTo>
+                <a:lnTo>
+                  <a:pt x="1446914" y="0"/>
+                </a:lnTo>
+                <a:lnTo>
+                  <a:pt x="1477699" y="0"/>
+                </a:lnTo>
+                <a:lnTo>
+                  <a:pt x="1508485" y="0"/>
+                </a:lnTo>
+                <a:lnTo>
+                  <a:pt x="1539270" y="0"/>
+                </a:lnTo>
+                <a:lnTo>
+                  <a:pt x="1570055" y="0"/>
+                </a:lnTo>
+                <a:lnTo>
+                  <a:pt x="1600841" y="0"/>
+                </a:lnTo>
+                <a:lnTo>
+                  <a:pt x="1631626" y="0"/>
+                </a:lnTo>
+                <a:lnTo>
+                  <a:pt x="1662412" y="0"/>
+                </a:lnTo>
+                <a:lnTo>
+                  <a:pt x="1693197" y="0"/>
+                </a:lnTo>
+                <a:lnTo>
+                  <a:pt x="1723983" y="0"/>
+                </a:lnTo>
+                <a:lnTo>
+                  <a:pt x="1754768" y="0"/>
+                </a:lnTo>
+                <a:lnTo>
+                  <a:pt x="1785553" y="0"/>
+                </a:lnTo>
+                <a:lnTo>
+                  <a:pt x="1816339" y="0"/>
+                </a:lnTo>
+                <a:lnTo>
+                  <a:pt x="1847124" y="0"/>
+                </a:lnTo>
+                <a:lnTo>
+                  <a:pt x="1877910" y="0"/>
+                </a:lnTo>
+                <a:lnTo>
+                  <a:pt x="1908695" y="0"/>
+                </a:lnTo>
+                <a:lnTo>
+                  <a:pt x="1939480" y="0"/>
+                </a:lnTo>
+                <a:lnTo>
+                  <a:pt x="1970266" y="0"/>
+                </a:lnTo>
+                <a:lnTo>
+                  <a:pt x="2001051" y="0"/>
+                </a:lnTo>
+                <a:lnTo>
+                  <a:pt x="2031837" y="0"/>
+                </a:lnTo>
+                <a:lnTo>
+                  <a:pt x="2062622" y="0"/>
+                </a:lnTo>
+                <a:lnTo>
+                  <a:pt x="2093407" y="0"/>
+                </a:lnTo>
+                <a:lnTo>
+                  <a:pt x="2124193" y="0"/>
+                </a:lnTo>
+                <a:lnTo>
+                  <a:pt x="2154978" y="0"/>
+                </a:lnTo>
+                <a:lnTo>
+                  <a:pt x="2185764" y="0"/>
+                </a:lnTo>
+                <a:lnTo>
+                  <a:pt x="2216549" y="0"/>
+                </a:lnTo>
+                <a:lnTo>
+                  <a:pt x="2247334" y="0"/>
+                </a:lnTo>
+                <a:lnTo>
+                  <a:pt x="2278120" y="0"/>
+                </a:lnTo>
+                <a:lnTo>
+                  <a:pt x="2308905" y="0"/>
+                </a:lnTo>
+                <a:lnTo>
+                  <a:pt x="2339691" y="0"/>
+                </a:lnTo>
+                <a:lnTo>
+                  <a:pt x="2370476" y="0"/>
+                </a:lnTo>
+                <a:lnTo>
+                  <a:pt x="2401262" y="0"/>
+                </a:lnTo>
+                <a:lnTo>
+                  <a:pt x="2432047" y="0"/>
+                </a:lnTo>
+                <a:lnTo>
+                  <a:pt x="2462832" y="0"/>
+                </a:lnTo>
+                <a:lnTo>
+                  <a:pt x="2493618" y="0"/>
+                </a:lnTo>
+                <a:lnTo>
+                  <a:pt x="2524403" y="0"/>
+                </a:lnTo>
+                <a:lnTo>
+                  <a:pt x="2555189" y="0"/>
+                </a:lnTo>
+                <a:lnTo>
+                  <a:pt x="2585974" y="0"/>
+                </a:lnTo>
+                <a:lnTo>
+                  <a:pt x="2616759" y="0"/>
+                </a:lnTo>
+                <a:lnTo>
+                  <a:pt x="2647545" y="0"/>
+                </a:lnTo>
+                <a:lnTo>
+                  <a:pt x="2678330" y="0"/>
+                </a:lnTo>
+                <a:lnTo>
+                  <a:pt x="2709116" y="0"/>
+                </a:lnTo>
+                <a:lnTo>
+                  <a:pt x="2739901" y="0"/>
+                </a:lnTo>
+                <a:lnTo>
+                  <a:pt x="2770686" y="0"/>
+                </a:lnTo>
+                <a:lnTo>
+                  <a:pt x="2801472" y="0"/>
+                </a:lnTo>
+                <a:lnTo>
+                  <a:pt x="2832257" y="0"/>
+                </a:lnTo>
+                <a:lnTo>
+                  <a:pt x="2863043" y="0"/>
+                </a:lnTo>
+                <a:lnTo>
+                  <a:pt x="2893828" y="0"/>
+                </a:lnTo>
+                <a:lnTo>
+                  <a:pt x="2924614" y="0"/>
+                </a:lnTo>
+                <a:lnTo>
+                  <a:pt x="2955399" y="0"/>
+                </a:lnTo>
+                <a:lnTo>
+                  <a:pt x="2986184" y="0"/>
+                </a:lnTo>
+                <a:lnTo>
+                  <a:pt x="3016970" y="0"/>
+                </a:lnTo>
+                <a:lnTo>
+                  <a:pt x="3047755" y="0"/>
+                </a:lnTo>
+                <a:lnTo>
+                  <a:pt x="3078541" y="0"/>
+                </a:lnTo>
+                <a:lnTo>
+                  <a:pt x="3109326" y="0"/>
+                </a:lnTo>
+                <a:lnTo>
+                  <a:pt x="3140111" y="0"/>
+                </a:lnTo>
+                <a:lnTo>
+                  <a:pt x="3170897" y="0"/>
+                </a:lnTo>
+                <a:lnTo>
+                  <a:pt x="3201682" y="0"/>
+                </a:lnTo>
+                <a:lnTo>
+                  <a:pt x="3232468" y="0"/>
+                </a:lnTo>
+                <a:lnTo>
+                  <a:pt x="3263253" y="0"/>
+                </a:lnTo>
+                <a:lnTo>
+                  <a:pt x="3294038" y="0"/>
+                </a:lnTo>
+                <a:lnTo>
+                  <a:pt x="3324824" y="0"/>
+                </a:lnTo>
+                <a:lnTo>
+                  <a:pt x="3355609" y="0"/>
+                </a:lnTo>
+                <a:lnTo>
+                  <a:pt x="3386395" y="0"/>
+                </a:lnTo>
+                <a:lnTo>
+                  <a:pt x="3417180" y="0"/>
+                </a:lnTo>
+                <a:lnTo>
+                  <a:pt x="3447966" y="0"/>
+                </a:lnTo>
+                <a:lnTo>
+                  <a:pt x="3478751" y="0"/>
+                </a:lnTo>
+                <a:lnTo>
+                  <a:pt x="3509536" y="0"/>
+                </a:lnTo>
+                <a:lnTo>
+                  <a:pt x="3540322" y="0"/>
+                </a:lnTo>
+                <a:lnTo>
+                  <a:pt x="3571107" y="0"/>
+                </a:lnTo>
+                <a:lnTo>
+                  <a:pt x="3601893" y="0"/>
+                </a:lnTo>
+                <a:lnTo>
+                  <a:pt x="3632678" y="0"/>
+                </a:lnTo>
+                <a:lnTo>
+                  <a:pt x="3663463" y="0"/>
+                </a:lnTo>
+                <a:lnTo>
+                  <a:pt x="3694249" y="0"/>
+                </a:lnTo>
+                <a:lnTo>
+                  <a:pt x="3725034" y="0"/>
+                </a:lnTo>
+                <a:lnTo>
+                  <a:pt x="3755820" y="0"/>
+                </a:lnTo>
+                <a:lnTo>
+                  <a:pt x="3786605" y="0"/>
+                </a:lnTo>
+                <a:lnTo>
+                  <a:pt x="3817390" y="0"/>
+                </a:lnTo>
+                <a:lnTo>
+                  <a:pt x="3848176" y="0"/>
+                </a:lnTo>
+                <a:lnTo>
+                  <a:pt x="3878961" y="0"/>
+                </a:lnTo>
+                <a:lnTo>
+                  <a:pt x="3909747" y="0"/>
+                </a:lnTo>
+                <a:lnTo>
+                  <a:pt x="3940532" y="0"/>
+                </a:lnTo>
+                <a:lnTo>
+                  <a:pt x="3971317" y="0"/>
+                </a:lnTo>
+                <a:lnTo>
+                  <a:pt x="4002103" y="0"/>
+                </a:lnTo>
+                <a:lnTo>
+                  <a:pt x="4032888" y="0"/>
+                </a:lnTo>
+                <a:lnTo>
+                  <a:pt x="4063674" y="0"/>
+                </a:lnTo>
+                <a:lnTo>
+                  <a:pt x="4094459" y="0"/>
+                </a:lnTo>
+                <a:lnTo>
+                  <a:pt x="4125245" y="0"/>
+                </a:lnTo>
+                <a:lnTo>
+                  <a:pt x="4156030" y="0"/>
+                </a:lnTo>
+                <a:lnTo>
+                  <a:pt x="4186815" y="0"/>
+                </a:lnTo>
+                <a:lnTo>
+                  <a:pt x="4217601" y="0"/>
+                </a:lnTo>
+                <a:lnTo>
+                  <a:pt x="4248386" y="0"/>
+                </a:lnTo>
+                <a:lnTo>
+                  <a:pt x="4279172" y="0"/>
+                </a:lnTo>
+                <a:lnTo>
+                  <a:pt x="4309957" y="0"/>
+                </a:lnTo>
+                <a:lnTo>
+                  <a:pt x="4340742" y="0"/>
+                </a:lnTo>
+                <a:lnTo>
+                  <a:pt x="4371528" y="0"/>
+                </a:lnTo>
+                <a:lnTo>
+                  <a:pt x="4402313" y="0"/>
+                </a:lnTo>
+                <a:lnTo>
+                  <a:pt x="4433099" y="0"/>
+                </a:lnTo>
+                <a:lnTo>
+                  <a:pt x="4463884" y="0"/>
+                </a:lnTo>
+                <a:lnTo>
+                  <a:pt x="4494669" y="0"/>
+                </a:lnTo>
+                <a:lnTo>
+                  <a:pt x="4525455" y="0"/>
+                </a:lnTo>
+                <a:lnTo>
+                  <a:pt x="4556240" y="0"/>
+                </a:lnTo>
+                <a:lnTo>
+                  <a:pt x="4587026" y="0"/>
+                </a:lnTo>
+                <a:lnTo>
+                  <a:pt x="4617811" y="0"/>
+                </a:lnTo>
+                <a:lnTo>
+                  <a:pt x="4648597" y="0"/>
+                </a:lnTo>
+                <a:lnTo>
+                  <a:pt x="4679382" y="0"/>
+                </a:lnTo>
+                <a:lnTo>
+                  <a:pt x="4710167" y="0"/>
+                </a:lnTo>
+                <a:lnTo>
+                  <a:pt x="4740953" y="0"/>
+                </a:lnTo>
+                <a:lnTo>
+                  <a:pt x="4771738" y="0"/>
+                </a:lnTo>
+                <a:lnTo>
+                  <a:pt x="4802524" y="0"/>
+                </a:lnTo>
+                <a:lnTo>
+                  <a:pt x="4833309" y="0"/>
+                </a:lnTo>
+                <a:lnTo>
+                  <a:pt x="4864094" y="0"/>
+                </a:lnTo>
+                <a:lnTo>
+                  <a:pt x="4894880" y="0"/>
+                </a:lnTo>
+                <a:lnTo>
+                  <a:pt x="4925665" y="0"/>
+                </a:lnTo>
+                <a:lnTo>
+                  <a:pt x="4956451" y="0"/>
+                </a:lnTo>
+                <a:lnTo>
+                  <a:pt x="4987236" y="0"/>
+                </a:lnTo>
+                <a:lnTo>
+                  <a:pt x="5018021" y="0"/>
+                </a:lnTo>
+                <a:lnTo>
+                  <a:pt x="5048807" y="0"/>
+                </a:lnTo>
+                <a:lnTo>
+                  <a:pt x="5079592" y="0"/>
+                </a:lnTo>
+                <a:lnTo>
+                  <a:pt x="5110378" y="0"/>
+                </a:lnTo>
+                <a:lnTo>
+                  <a:pt x="5120640" y="0"/>
+                </a:lnTo>
+              </a:path>
+            </a:pathLst>
+          </a:custGeom>
+          <a:noFill/>
+          <a:ln w="38100">
+            <a:solidFill>
+              <a:srgbClr val="F28BA0"/>
+            </a:solidFill>
+          </a:ln>
+          <a:effectLst/>
+        </p:spPr>
+        <p:txBody>
+          <a:bodyPr rtlCol="0" anchor="ctr"/>
+          <a:lstStyle/>
+          <a:p>
+            <a:pPr algn="ctr"/>
+          </a:p>
+        </p:txBody>
+      </p:sp>
+      <p:sp>
+        <p:nvSpPr>
+          <p:cNvPr id="68" name="C2-E17 ellipse 66" descr="sci-ppt:o066"/>
+          <p:cNvSpPr/>
+          <p:nvPr/>
+        </p:nvSpPr>
+        <p:spPr>
+          <a:xfrm>
+            <a:off x="5980176" y="4654783"/>
+            <a:ext cx="109728" cy="109728"/>
+          </a:xfrm>
+          <a:prstGeom prst="ellipse">
+            <a:avLst/>
+          </a:prstGeom>
+          <a:solidFill>
+            <a:srgbClr val="F28BA0"/>
+          </a:solidFill>
+          <a:ln w="12700">
+            <a:solidFill>
+              <a:srgbClr val="F28BA0"/>
+            </a:solidFill>
+          </a:ln>
+          <a:effectLst/>
+        </p:spPr>
+        <p:txBody>
+          <a:bodyPr rtlCol="0" anchor="ctr"/>
+          <a:lstStyle/>
+          <a:p>
+            <a:pPr algn="ctr"/>
+          </a:p>
+        </p:txBody>
+      </p:sp>
+      <p:sp>
+        <p:nvSpPr>
+          <p:cNvPr id="69" name="C2-E17 round_rect 67" descr="sci-ppt:o067"/>
+          <p:cNvSpPr/>
+          <p:nvPr/>
+        </p:nvSpPr>
+        <p:spPr>
+          <a:xfrm>
+            <a:off x="6675120" y="1371600"/>
+            <a:ext cx="5166360" cy="3840480"/>
+          </a:xfrm>
+          <a:prstGeom prst="roundRect">
+            <a:avLst/>
+          </a:prstGeom>
+          <a:solidFill>
+            <a:srgbClr val="213E4B"/>
+          </a:solidFill>
+          <a:ln w="20320">
             <a:solidFill>
               <a:srgbClr val="8EDBD4"/>
             </a:solidFill>
           </a:ln>
           <a:effectLst/>
         </p:spPr>
-      </p:cxnSp>
-      <p:cxnSp>
-        <p:nvCxnSpPr>
-          <p:cNvPr id="14" name="line13" descr="sci-ppt:C2-E17-013"/>
-          <p:cNvCxnSpPr/>
+        <p:txBody>
+          <a:bodyPr rtlCol="0" anchor="ctr"/>
+          <a:lstStyle/>
+          <a:p>
+            <a:pPr algn="ctr"/>
+          </a:p>
+        </p:txBody>
+      </p:sp>
+      <p:sp>
+        <p:nvSpPr>
+          <p:cNvPr id="70" name="C2-E17 text 68" descr="sci-ppt:o068"/>
+          <p:cNvSpPr txBox="1"/>
           <p:nvPr/>
-        </p:nvCxnSpPr>
-        <p:spPr>
-          <a:xfrm flipV="1">
-            <a:off x="7226372" y="3115253"/>
-            <a:ext cx="114953" cy="131498"/>
-          </a:xfrm>
-          <a:prstGeom prst="line">
+        </p:nvSpPr>
+        <p:spPr>
+          <a:xfrm>
+            <a:off x="6784848" y="1426464"/>
+            <a:ext cx="4946904" cy="254889"/>
+          </a:xfrm>
+          <a:prstGeom prst="rect">
             <a:avLst/>
           </a:prstGeom>
-          <a:ln w="25400">
+          <a:noFill/>
+          <a:effectLst/>
+        </p:spPr>
+        <p:txBody>
+          <a:bodyPr wrap="none" lIns="18288" rIns="18288" tIns="18288" bIns="18288" anchor="t">
+            <a:spAutoFit/>
+          </a:bodyPr>
+          <a:lstStyle/>
+          <a:p>
+            <a:pPr algn="l">
+              <a:spcAft>
+                <a:spcPts val="0"/>
+              </a:spcAft>
+            </a:pPr>
+            <a:r>
+              <a:rPr sz="1350" b="1" i="0">
+                <a:solidFill>
+                  <a:srgbClr val="8EDBD4"/>
+                </a:solidFill>
+                <a:latin typeface="Arial"/>
+              </a:rPr>
+              <a:t>P_act = 1 − exp(−∫∫ J dV dt)</a:t>
+            </a:r>
+          </a:p>
+        </p:txBody>
+      </p:sp>
+      <p:sp>
+        <p:nvSpPr>
+          <p:cNvPr id="71" name="C2-E17 rect 69" descr="sci-ppt:o069"/>
+          <p:cNvSpPr/>
+          <p:nvPr/>
+        </p:nvSpPr>
+        <p:spPr>
+          <a:xfrm>
+            <a:off x="6858000" y="1965960"/>
+            <a:ext cx="274320" cy="201168"/>
+          </a:xfrm>
+          <a:prstGeom prst="rect">
+            <a:avLst/>
+          </a:prstGeom>
+          <a:solidFill>
+            <a:srgbClr val="8EDBD4"/>
+          </a:solidFill>
+          <a:ln w="12700">
             <a:solidFill>
               <a:srgbClr val="8EDBD4"/>
             </a:solidFill>
           </a:ln>
           <a:effectLst/>
         </p:spPr>
-      </p:cxnSp>
-      <p:cxnSp>
-        <p:nvCxnSpPr>
-          <p:cNvPr id="15" name="line14" descr="sci-ppt:C2-E17-014"/>
-          <p:cNvCxnSpPr/>
-          <p:nvPr/>
-        </p:nvCxnSpPr>
-        <p:spPr>
-          <a:xfrm flipV="1">
-            <a:off x="7341325" y="2994557"/>
-            <a:ext cx="114953" cy="120696"/>
-          </a:xfrm>
-          <a:prstGeom prst="line">
-            <a:avLst/>
-          </a:prstGeom>
-          <a:ln w="25400">
-            <a:solidFill>
-              <a:srgbClr val="8EDBD4"/>
-            </a:solidFill>
-          </a:ln>
-          <a:effectLst/>
-        </p:spPr>
-      </p:cxnSp>
-      <p:cxnSp>
-        <p:nvCxnSpPr>
-          <p:cNvPr id="16" name="line15" descr="sci-ppt:C2-E17-015"/>
-          <p:cNvCxnSpPr/>
-          <p:nvPr/>
-        </p:nvCxnSpPr>
-        <p:spPr>
-          <a:xfrm flipV="1">
-            <a:off x="7456278" y="2883775"/>
-            <a:ext cx="114953" cy="110782"/>
-          </a:xfrm>
-          <a:prstGeom prst="line">
-            <a:avLst/>
-          </a:prstGeom>
-          <a:ln w="25400">
-            <a:solidFill>
-              <a:srgbClr val="8EDBD4"/>
-            </a:solidFill>
-          </a:ln>
-          <a:effectLst/>
-        </p:spPr>
-      </p:cxnSp>
-      <p:cxnSp>
-        <p:nvCxnSpPr>
-          <p:cNvPr id="17" name="line16" descr="sci-ppt:C2-E17-016"/>
-          <p:cNvCxnSpPr/>
-          <p:nvPr/>
-        </p:nvCxnSpPr>
-        <p:spPr>
-          <a:xfrm flipV="1">
-            <a:off x="7571231" y="2782093"/>
-            <a:ext cx="114954" cy="101682"/>
-          </a:xfrm>
-          <a:prstGeom prst="line">
-            <a:avLst/>
-          </a:prstGeom>
-          <a:ln w="25400">
-            <a:solidFill>
-              <a:srgbClr val="8EDBD4"/>
-            </a:solidFill>
-          </a:ln>
-          <a:effectLst/>
-        </p:spPr>
-      </p:cxnSp>
-      <p:cxnSp>
-        <p:nvCxnSpPr>
-          <p:cNvPr id="18" name="line17" descr="sci-ppt:C2-E17-017"/>
-          <p:cNvCxnSpPr/>
-          <p:nvPr/>
-        </p:nvCxnSpPr>
-        <p:spPr>
-          <a:xfrm flipV="1">
-            <a:off x="7686185" y="2688764"/>
-            <a:ext cx="114953" cy="93329"/>
-          </a:xfrm>
-          <a:prstGeom prst="line">
-            <a:avLst/>
-          </a:prstGeom>
-          <a:ln w="25400">
-            <a:solidFill>
-              <a:srgbClr val="8EDBD4"/>
-            </a:solidFill>
-          </a:ln>
-          <a:effectLst/>
-        </p:spPr>
-      </p:cxnSp>
-      <p:cxnSp>
-        <p:nvCxnSpPr>
-          <p:cNvPr id="19" name="line18" descr="sci-ppt:C2-E17-018"/>
-          <p:cNvCxnSpPr/>
-          <p:nvPr/>
-        </p:nvCxnSpPr>
-        <p:spPr>
-          <a:xfrm flipV="1">
-            <a:off x="7801138" y="2603101"/>
-            <a:ext cx="114953" cy="85663"/>
-          </a:xfrm>
-          <a:prstGeom prst="line">
-            <a:avLst/>
-          </a:prstGeom>
-          <a:ln w="25400">
-            <a:solidFill>
-              <a:srgbClr val="8EDBD4"/>
-            </a:solidFill>
-          </a:ln>
-          <a:effectLst/>
-        </p:spPr>
-      </p:cxnSp>
-      <p:cxnSp>
-        <p:nvCxnSpPr>
-          <p:cNvPr id="20" name="line19" descr="sci-ppt:C2-E17-019"/>
-          <p:cNvCxnSpPr/>
-          <p:nvPr/>
-        </p:nvCxnSpPr>
-        <p:spPr>
-          <a:xfrm flipV="1">
-            <a:off x="7916091" y="2524475"/>
-            <a:ext cx="114953" cy="78626"/>
-          </a:xfrm>
-          <a:prstGeom prst="line">
-            <a:avLst/>
-          </a:prstGeom>
-          <a:ln w="25400">
-            <a:solidFill>
-              <a:srgbClr val="8EDBD4"/>
-            </a:solidFill>
-          </a:ln>
-          <a:effectLst/>
-        </p:spPr>
-      </p:cxnSp>
-      <p:cxnSp>
-        <p:nvCxnSpPr>
-          <p:cNvPr id="21" name="line20" descr="sci-ppt:C2-E17-020"/>
-          <p:cNvCxnSpPr/>
-          <p:nvPr/>
-        </p:nvCxnSpPr>
-        <p:spPr>
-          <a:xfrm flipV="1">
-            <a:off x="8031044" y="2452307"/>
-            <a:ext cx="114953" cy="72168"/>
-          </a:xfrm>
-          <a:prstGeom prst="line">
-            <a:avLst/>
-          </a:prstGeom>
-          <a:ln w="25400">
-            <a:solidFill>
-              <a:srgbClr val="8EDBD4"/>
-            </a:solidFill>
-          </a:ln>
-          <a:effectLst/>
-        </p:spPr>
-      </p:cxnSp>
-      <p:cxnSp>
-        <p:nvCxnSpPr>
-          <p:cNvPr id="22" name="line21" descr="sci-ppt:C2-E17-021"/>
-          <p:cNvCxnSpPr/>
-          <p:nvPr/>
-        </p:nvCxnSpPr>
-        <p:spPr>
-          <a:xfrm flipV="1">
-            <a:off x="8145997" y="2386067"/>
-            <a:ext cx="114953" cy="66240"/>
-          </a:xfrm>
-          <a:prstGeom prst="line">
-            <a:avLst/>
-          </a:prstGeom>
-          <a:ln w="25400">
-            <a:solidFill>
-              <a:srgbClr val="8EDBD4"/>
-            </a:solidFill>
-          </a:ln>
-          <a:effectLst/>
-        </p:spPr>
-      </p:cxnSp>
-      <p:cxnSp>
-        <p:nvCxnSpPr>
-          <p:cNvPr id="23" name="line22" descr="sci-ppt:C2-E17-022"/>
-          <p:cNvCxnSpPr/>
-          <p:nvPr/>
-        </p:nvCxnSpPr>
-        <p:spPr>
-          <a:xfrm flipV="1">
-            <a:off x="8260950" y="2325269"/>
-            <a:ext cx="114954" cy="60798"/>
-          </a:xfrm>
-          <a:prstGeom prst="line">
-            <a:avLst/>
-          </a:prstGeom>
-          <a:ln w="25400">
-            <a:solidFill>
-              <a:srgbClr val="8EDBD4"/>
-            </a:solidFill>
-          </a:ln>
-          <a:effectLst/>
-        </p:spPr>
-      </p:cxnSp>
-      <p:cxnSp>
-        <p:nvCxnSpPr>
-          <p:cNvPr id="24" name="line23" descr="sci-ppt:C2-E17-023"/>
-          <p:cNvCxnSpPr/>
-          <p:nvPr/>
-        </p:nvCxnSpPr>
-        <p:spPr>
-          <a:xfrm flipV="1">
-            <a:off x="8375904" y="2269465"/>
-            <a:ext cx="114953" cy="55804"/>
-          </a:xfrm>
-          <a:prstGeom prst="line">
-            <a:avLst/>
-          </a:prstGeom>
-          <a:ln w="25400">
-            <a:solidFill>
-              <a:srgbClr val="8EDBD4"/>
-            </a:solidFill>
-          </a:ln>
-          <a:effectLst/>
-        </p:spPr>
-      </p:cxnSp>
-      <p:cxnSp>
-        <p:nvCxnSpPr>
-          <p:cNvPr id="25" name="line24" descr="sci-ppt:C2-E17-024"/>
-          <p:cNvCxnSpPr/>
-          <p:nvPr/>
-        </p:nvCxnSpPr>
-        <p:spPr>
-          <a:xfrm flipV="1">
-            <a:off x="8490857" y="2218245"/>
-            <a:ext cx="114953" cy="51220"/>
-          </a:xfrm>
-          <a:prstGeom prst="line">
-            <a:avLst/>
-          </a:prstGeom>
-          <a:ln w="25400">
-            <a:solidFill>
-              <a:srgbClr val="8EDBD4"/>
-            </a:solidFill>
-          </a:ln>
-          <a:effectLst/>
-        </p:spPr>
-      </p:cxnSp>
-      <p:cxnSp>
-        <p:nvCxnSpPr>
-          <p:cNvPr id="26" name="line25" descr="sci-ppt:C2-E17-025"/>
-          <p:cNvCxnSpPr/>
-          <p:nvPr/>
-        </p:nvCxnSpPr>
-        <p:spPr>
-          <a:xfrm flipV="1">
-            <a:off x="8605810" y="2171232"/>
-            <a:ext cx="114953" cy="47013"/>
-          </a:xfrm>
-          <a:prstGeom prst="line">
-            <a:avLst/>
-          </a:prstGeom>
-          <a:ln w="25400">
-            <a:solidFill>
-              <a:srgbClr val="8EDBD4"/>
-            </a:solidFill>
-          </a:ln>
-          <a:effectLst/>
-        </p:spPr>
-      </p:cxnSp>
-      <p:cxnSp>
-        <p:nvCxnSpPr>
-          <p:cNvPr id="27" name="line26" descr="sci-ppt:C2-E17-026"/>
-          <p:cNvCxnSpPr/>
-          <p:nvPr/>
-        </p:nvCxnSpPr>
-        <p:spPr>
-          <a:xfrm flipV="1">
-            <a:off x="8720763" y="2128081"/>
-            <a:ext cx="114953" cy="43151"/>
-          </a:xfrm>
-          <a:prstGeom prst="line">
-            <a:avLst/>
-          </a:prstGeom>
-          <a:ln w="25400">
-            <a:solidFill>
-              <a:srgbClr val="8EDBD4"/>
-            </a:solidFill>
-          </a:ln>
-          <a:effectLst/>
-        </p:spPr>
-      </p:cxnSp>
-      <p:cxnSp>
-        <p:nvCxnSpPr>
-          <p:cNvPr id="28" name="line27" descr="sci-ppt:C2-E17-027"/>
-          <p:cNvCxnSpPr/>
-          <p:nvPr/>
-        </p:nvCxnSpPr>
-        <p:spPr>
-          <a:xfrm flipV="1">
-            <a:off x="8835716" y="2088474"/>
-            <a:ext cx="114953" cy="39607"/>
-          </a:xfrm>
-          <a:prstGeom prst="line">
-            <a:avLst/>
-          </a:prstGeom>
-          <a:ln w="25400">
-            <a:solidFill>
-              <a:srgbClr val="8EDBD4"/>
-            </a:solidFill>
-          </a:ln>
-          <a:effectLst/>
-        </p:spPr>
-      </p:cxnSp>
-      <p:cxnSp>
-        <p:nvCxnSpPr>
-          <p:cNvPr id="29" name="line28" descr="sci-ppt:C2-E17-028"/>
-          <p:cNvCxnSpPr/>
-          <p:nvPr/>
-        </p:nvCxnSpPr>
-        <p:spPr>
-          <a:xfrm flipV="1">
-            <a:off x="8950669" y="2052121"/>
-            <a:ext cx="114953" cy="36353"/>
-          </a:xfrm>
-          <a:prstGeom prst="line">
-            <a:avLst/>
-          </a:prstGeom>
-          <a:ln w="25400">
-            <a:solidFill>
-              <a:srgbClr val="8EDBD4"/>
-            </a:solidFill>
-          </a:ln>
-          <a:effectLst/>
-        </p:spPr>
-      </p:cxnSp>
-      <p:cxnSp>
-        <p:nvCxnSpPr>
-          <p:cNvPr id="30" name="line29" descr="sci-ppt:C2-E17-029"/>
-          <p:cNvCxnSpPr/>
-          <p:nvPr/>
-        </p:nvCxnSpPr>
-        <p:spPr>
-          <a:xfrm flipV="1">
-            <a:off x="9065622" y="2018754"/>
-            <a:ext cx="114954" cy="33367"/>
-          </a:xfrm>
-          <a:prstGeom prst="line">
-            <a:avLst/>
-          </a:prstGeom>
-          <a:ln w="25400">
-            <a:solidFill>
-              <a:srgbClr val="8EDBD4"/>
-            </a:solidFill>
-          </a:ln>
-          <a:effectLst/>
-        </p:spPr>
-      </p:cxnSp>
-      <p:cxnSp>
-        <p:nvCxnSpPr>
-          <p:cNvPr id="31" name="line30" descr="sci-ppt:C2-E17-030"/>
-          <p:cNvCxnSpPr/>
-          <p:nvPr/>
-        </p:nvCxnSpPr>
-        <p:spPr>
-          <a:xfrm flipV="1">
-            <a:off x="9180576" y="1988128"/>
-            <a:ext cx="114953" cy="30626"/>
-          </a:xfrm>
-          <a:prstGeom prst="line">
-            <a:avLst/>
-          </a:prstGeom>
-          <a:ln w="25400">
-            <a:solidFill>
-              <a:srgbClr val="8EDBD4"/>
-            </a:solidFill>
-          </a:ln>
-          <a:effectLst/>
-        </p:spPr>
-      </p:cxnSp>
-      <p:cxnSp>
-        <p:nvCxnSpPr>
-          <p:cNvPr id="32" name="line31" descr="sci-ppt:C2-E17-031"/>
-          <p:cNvCxnSpPr/>
-          <p:nvPr/>
-        </p:nvCxnSpPr>
-        <p:spPr>
-          <a:xfrm flipV="1">
-            <a:off x="9295529" y="1960018"/>
-            <a:ext cx="114953" cy="28110"/>
-          </a:xfrm>
-          <a:prstGeom prst="line">
-            <a:avLst/>
-          </a:prstGeom>
-          <a:ln w="25400">
-            <a:solidFill>
-              <a:srgbClr val="8EDBD4"/>
-            </a:solidFill>
-          </a:ln>
-          <a:effectLst/>
-        </p:spPr>
-      </p:cxnSp>
-      <p:cxnSp>
-        <p:nvCxnSpPr>
-          <p:cNvPr id="33" name="line32" descr="sci-ppt:C2-E17-032"/>
-          <p:cNvCxnSpPr/>
-          <p:nvPr/>
-        </p:nvCxnSpPr>
-        <p:spPr>
-          <a:xfrm flipV="1">
-            <a:off x="9410482" y="1934217"/>
-            <a:ext cx="114953" cy="25801"/>
-          </a:xfrm>
-          <a:prstGeom prst="line">
-            <a:avLst/>
-          </a:prstGeom>
-          <a:ln w="25400">
-            <a:solidFill>
-              <a:srgbClr val="8EDBD4"/>
-            </a:solidFill>
-          </a:ln>
-          <a:effectLst/>
-        </p:spPr>
-      </p:cxnSp>
-      <p:cxnSp>
-        <p:nvCxnSpPr>
-          <p:cNvPr id="34" name="line33" descr="sci-ppt:C2-E17-033"/>
-          <p:cNvCxnSpPr/>
-          <p:nvPr/>
-        </p:nvCxnSpPr>
-        <p:spPr>
-          <a:xfrm flipV="1">
-            <a:off x="9525435" y="1910535"/>
-            <a:ext cx="114953" cy="23682"/>
-          </a:xfrm>
-          <a:prstGeom prst="line">
-            <a:avLst/>
-          </a:prstGeom>
-          <a:ln w="25400">
-            <a:solidFill>
-              <a:srgbClr val="8EDBD4"/>
-            </a:solidFill>
-          </a:ln>
-          <a:effectLst/>
-        </p:spPr>
-      </p:cxnSp>
-      <p:cxnSp>
-        <p:nvCxnSpPr>
-          <p:cNvPr id="35" name="line34" descr="sci-ppt:C2-E17-034"/>
-          <p:cNvCxnSpPr/>
-          <p:nvPr/>
-        </p:nvCxnSpPr>
-        <p:spPr>
-          <a:xfrm flipV="1">
-            <a:off x="9640388" y="1888799"/>
-            <a:ext cx="114953" cy="21736"/>
-          </a:xfrm>
-          <a:prstGeom prst="line">
-            <a:avLst/>
-          </a:prstGeom>
-          <a:ln w="25400">
-            <a:solidFill>
-              <a:srgbClr val="8EDBD4"/>
-            </a:solidFill>
-          </a:ln>
-          <a:effectLst/>
-        </p:spPr>
-      </p:cxnSp>
-      <p:cxnSp>
-        <p:nvCxnSpPr>
-          <p:cNvPr id="36" name="line35" descr="sci-ppt:C2-E17-035"/>
-          <p:cNvCxnSpPr/>
-          <p:nvPr/>
-        </p:nvCxnSpPr>
-        <p:spPr>
-          <a:xfrm flipV="1">
-            <a:off x="9755341" y="1868848"/>
-            <a:ext cx="114953" cy="19951"/>
-          </a:xfrm>
-          <a:prstGeom prst="line">
-            <a:avLst/>
-          </a:prstGeom>
-          <a:ln w="25400">
-            <a:solidFill>
-              <a:srgbClr val="8EDBD4"/>
-            </a:solidFill>
-          </a:ln>
-          <a:effectLst/>
-        </p:spPr>
-      </p:cxnSp>
-      <p:cxnSp>
-        <p:nvCxnSpPr>
-          <p:cNvPr id="37" name="line36" descr="sci-ppt:C2-E17-036"/>
-          <p:cNvCxnSpPr/>
-          <p:nvPr/>
-        </p:nvCxnSpPr>
-        <p:spPr>
-          <a:xfrm flipV="1">
-            <a:off x="9870294" y="1850536"/>
-            <a:ext cx="114954" cy="18312"/>
-          </a:xfrm>
-          <a:prstGeom prst="line">
-            <a:avLst/>
-          </a:prstGeom>
-          <a:ln w="25400">
-            <a:solidFill>
-              <a:srgbClr val="8EDBD4"/>
-            </a:solidFill>
-          </a:ln>
-          <a:effectLst/>
-        </p:spPr>
-      </p:cxnSp>
-      <p:cxnSp>
-        <p:nvCxnSpPr>
-          <p:cNvPr id="38" name="line37" descr="sci-ppt:C2-E17-037"/>
-          <p:cNvCxnSpPr/>
-          <p:nvPr/>
-        </p:nvCxnSpPr>
-        <p:spPr>
-          <a:xfrm flipV="1">
-            <a:off x="9985248" y="1833728"/>
-            <a:ext cx="114953" cy="16808"/>
-          </a:xfrm>
-          <a:prstGeom prst="line">
-            <a:avLst/>
-          </a:prstGeom>
-          <a:ln w="25400">
-            <a:solidFill>
-              <a:srgbClr val="8EDBD4"/>
-            </a:solidFill>
-          </a:ln>
-          <a:effectLst/>
-        </p:spPr>
-      </p:cxnSp>
-      <p:cxnSp>
-        <p:nvCxnSpPr>
-          <p:cNvPr id="39" name="line38" descr="sci-ppt:C2-E17-038"/>
-          <p:cNvCxnSpPr/>
-          <p:nvPr/>
-        </p:nvCxnSpPr>
-        <p:spPr>
-          <a:xfrm flipV="1">
-            <a:off x="10100201" y="1818301"/>
-            <a:ext cx="114953" cy="15427"/>
-          </a:xfrm>
-          <a:prstGeom prst="line">
-            <a:avLst/>
-          </a:prstGeom>
-          <a:ln w="25400">
-            <a:solidFill>
-              <a:srgbClr val="8EDBD4"/>
-            </a:solidFill>
-          </a:ln>
-          <a:effectLst/>
-        </p:spPr>
-      </p:cxnSp>
-      <p:cxnSp>
-        <p:nvCxnSpPr>
-          <p:cNvPr id="40" name="line39" descr="sci-ppt:C2-E17-039"/>
-          <p:cNvCxnSpPr/>
-          <p:nvPr/>
-        </p:nvCxnSpPr>
-        <p:spPr>
-          <a:xfrm flipV="1">
-            <a:off x="10215154" y="1804141"/>
-            <a:ext cx="114953" cy="14160"/>
-          </a:xfrm>
-          <a:prstGeom prst="line">
-            <a:avLst/>
-          </a:prstGeom>
-          <a:ln w="25400">
-            <a:solidFill>
-              <a:srgbClr val="8EDBD4"/>
-            </a:solidFill>
-          </a:ln>
-          <a:effectLst/>
-        </p:spPr>
-      </p:cxnSp>
-      <p:cxnSp>
-        <p:nvCxnSpPr>
-          <p:cNvPr id="41" name="line40" descr="sci-ppt:C2-E17-040"/>
-          <p:cNvCxnSpPr/>
-          <p:nvPr/>
-        </p:nvCxnSpPr>
-        <p:spPr>
-          <a:xfrm flipV="1">
-            <a:off x="10330107" y="1791144"/>
-            <a:ext cx="114953" cy="12997"/>
-          </a:xfrm>
-          <a:prstGeom prst="line">
-            <a:avLst/>
-          </a:prstGeom>
-          <a:ln w="25400">
-            <a:solidFill>
-              <a:srgbClr val="8EDBD4"/>
-            </a:solidFill>
-          </a:ln>
-          <a:effectLst/>
-        </p:spPr>
-      </p:cxnSp>
-      <p:cxnSp>
-        <p:nvCxnSpPr>
-          <p:cNvPr id="42" name="line41" descr="sci-ppt:C2-E17-041"/>
-          <p:cNvCxnSpPr/>
-          <p:nvPr/>
-        </p:nvCxnSpPr>
-        <p:spPr>
-          <a:xfrm flipV="1">
-            <a:off x="10445060" y="1779214"/>
-            <a:ext cx="114953" cy="11930"/>
-          </a:xfrm>
-          <a:prstGeom prst="line">
-            <a:avLst/>
-          </a:prstGeom>
-          <a:ln w="25400">
-            <a:solidFill>
-              <a:srgbClr val="8EDBD4"/>
-            </a:solidFill>
-          </a:ln>
-          <a:effectLst/>
-        </p:spPr>
-      </p:cxnSp>
-      <p:cxnSp>
-        <p:nvCxnSpPr>
-          <p:cNvPr id="43" name="line42" descr="sci-ppt:C2-E17-042"/>
-          <p:cNvCxnSpPr/>
-          <p:nvPr/>
-        </p:nvCxnSpPr>
-        <p:spPr>
-          <a:xfrm flipV="1">
-            <a:off x="10560013" y="1768265"/>
-            <a:ext cx="114953" cy="10949"/>
-          </a:xfrm>
-          <a:prstGeom prst="line">
-            <a:avLst/>
-          </a:prstGeom>
-          <a:ln w="25400">
-            <a:solidFill>
-              <a:srgbClr val="8EDBD4"/>
-            </a:solidFill>
-          </a:ln>
-          <a:effectLst/>
-        </p:spPr>
-      </p:cxnSp>
-      <p:cxnSp>
-        <p:nvCxnSpPr>
-          <p:cNvPr id="44" name="line43" descr="sci-ppt:C2-E17-043"/>
-          <p:cNvCxnSpPr/>
-          <p:nvPr/>
-        </p:nvCxnSpPr>
-        <p:spPr>
-          <a:xfrm flipV="1">
-            <a:off x="10674966" y="1758215"/>
-            <a:ext cx="114954" cy="10050"/>
-          </a:xfrm>
-          <a:prstGeom prst="line">
-            <a:avLst/>
-          </a:prstGeom>
-          <a:ln w="25400">
-            <a:solidFill>
-              <a:srgbClr val="8EDBD4"/>
-            </a:solidFill>
-          </a:ln>
-          <a:effectLst/>
-        </p:spPr>
-      </p:cxnSp>
-      <p:sp>
-        <p:nvSpPr>
-          <p:cNvPr id="45" name="text44" descr="sci-ppt:C2-E17-044"/>
+        <p:txBody>
+          <a:bodyPr rtlCol="0" anchor="ctr"/>
+          <a:lstStyle/>
+          <a:p>
+            <a:pPr algn="ctr"/>
+          </a:p>
+        </p:txBody>
+      </p:sp>
+      <p:sp>
+        <p:nvSpPr>
+          <p:cNvPr id="72" name="C2-E17 text 70" descr="sci-ppt:o070"/>
           <p:cNvSpPr txBox="1"/>
           <p:nvPr/>
         </p:nvSpPr>
         <p:spPr>
           <a:xfrm>
-            <a:off x="1341120" y="3657600"/>
-            <a:ext cx="9509760" cy="340156"/>
+            <a:off x="7269480" y="1920240"/>
+            <a:ext cx="2743200" cy="231648"/>
           </a:xfrm>
           <a:prstGeom prst="rect">
             <a:avLst/>
@@ -4148,7 +8202,7 @@
           <a:effectLst/>
         </p:spPr>
         <p:txBody>
-          <a:bodyPr wrap="none" lIns="27432" rIns="27432" tIns="18288" bIns="18288" anchor="ctr">
+          <a:bodyPr wrap="none" lIns="18288" rIns="18288" tIns="18288" bIns="18288" anchor="t">
             <a:spAutoFit/>
           </a:bodyPr>
           <a:lstStyle/>
@@ -4159,27 +8213,99 @@
               </a:spcAft>
             </a:pPr>
             <a:r>
-              <a:rPr sz="1728" b="0" i="0">
+              <a:rPr sz="1200" b="1" i="0">
+                <a:solidFill>
+                  <a:srgbClr val="8EDBD4"/>
+                </a:solidFill>
+                <a:latin typeface="Arial"/>
+              </a:rPr>
+              <a:t>A: Λ = 2/µs for 1 µs</a:t>
+            </a:r>
+          </a:p>
+        </p:txBody>
+      </p:sp>
+      <p:sp>
+        <p:nvSpPr>
+          <p:cNvPr id="73" name="C2-E17 text 71" descr="sci-ppt:o071"/>
+          <p:cNvSpPr txBox="1"/>
+          <p:nvPr/>
+        </p:nvSpPr>
+        <p:spPr>
+          <a:xfrm>
+            <a:off x="9966960" y="1920240"/>
+            <a:ext cx="1828800" cy="223900"/>
+          </a:xfrm>
+          <a:prstGeom prst="rect">
+            <a:avLst/>
+          </a:prstGeom>
+          <a:noFill/>
+          <a:effectLst/>
+        </p:spPr>
+        <p:txBody>
+          <a:bodyPr wrap="none" lIns="18288" rIns="18288" tIns="18288" bIns="18288" anchor="t">
+            <a:spAutoFit/>
+          </a:bodyPr>
+          <a:lstStyle/>
+          <a:p>
+            <a:pPr algn="l">
+              <a:spcAft>
+                <a:spcPts val="0"/>
+              </a:spcAft>
+            </a:pPr>
+            <a:r>
+              <a:rPr sz="1150" b="0" i="0">
                 <a:solidFill>
                   <a:srgbClr val="E7F0F3"/>
                 </a:solidFill>
                 <a:latin typeface="Arial"/>
               </a:rPr>
-              <a:t>Integrate the local rate over space and time.</a:t>
-            </a:r>
-          </a:p>
-        </p:txBody>
-      </p:sp>
-      <p:sp>
-        <p:nvSpPr>
-          <p:cNvPr id="46" name="text45" descr="sci-ppt:C2-E17-045"/>
+              <a:t>∫Λ dt = 2.0  →  P = 0.86</a:t>
+            </a:r>
+          </a:p>
+        </p:txBody>
+      </p:sp>
+      <p:sp>
+        <p:nvSpPr>
+          <p:cNvPr id="74" name="C2-E17 rect 72" descr="sci-ppt:o072"/>
+          <p:cNvSpPr/>
+          <p:nvPr/>
+        </p:nvSpPr>
+        <p:spPr>
+          <a:xfrm>
+            <a:off x="6858000" y="2532888"/>
+            <a:ext cx="274320" cy="201168"/>
+          </a:xfrm>
+          <a:prstGeom prst="rect">
+            <a:avLst/>
+          </a:prstGeom>
+          <a:solidFill>
+            <a:srgbClr val="F2B880"/>
+          </a:solidFill>
+          <a:ln w="12700">
+            <a:solidFill>
+              <a:srgbClr val="F2B880"/>
+            </a:solidFill>
+          </a:ln>
+          <a:effectLst/>
+        </p:spPr>
+        <p:txBody>
+          <a:bodyPr rtlCol="0" anchor="ctr"/>
+          <a:lstStyle/>
+          <a:p>
+            <a:pPr algn="ctr"/>
+          </a:p>
+        </p:txBody>
+      </p:sp>
+      <p:sp>
+        <p:nvSpPr>
+          <p:cNvPr id="75" name="C2-E17 text 73" descr="sci-ppt:o073"/>
           <p:cNvSpPr txBox="1"/>
           <p:nvPr/>
         </p:nvSpPr>
         <p:spPr>
           <a:xfrm>
-            <a:off x="365760" y="4974336"/>
-            <a:ext cx="5547360" cy="321259"/>
+            <a:off x="7269480" y="2487168"/>
+            <a:ext cx="2743200" cy="231648"/>
           </a:xfrm>
           <a:prstGeom prst="rect">
             <a:avLst/>
@@ -4188,7 +8314,7 @@
           <a:effectLst/>
         </p:spPr>
         <p:txBody>
-          <a:bodyPr wrap="none" lIns="27432" rIns="27432" tIns="18288" bIns="18288" anchor="ctr">
+          <a:bodyPr wrap="none" lIns="18288" rIns="18288" tIns="18288" bIns="18288" anchor="t">
             <a:spAutoFit/>
           </a:bodyPr>
           <a:lstStyle/>
@@ -4199,27 +8325,99 @@
               </a:spcAft>
             </a:pPr>
             <a:r>
-              <a:rPr sz="1632" b="0" i="0">
+              <a:rPr sz="1200" b="1" i="0">
+                <a:solidFill>
+                  <a:srgbClr val="F2B880"/>
+                </a:solidFill>
+                <a:latin typeface="Arial"/>
+              </a:rPr>
+              <a:t>B: Λ = 0.5/µs for 4 µs</a:t>
+            </a:r>
+          </a:p>
+        </p:txBody>
+      </p:sp>
+      <p:sp>
+        <p:nvSpPr>
+          <p:cNvPr id="76" name="C2-E17 text 74" descr="sci-ppt:o074"/>
+          <p:cNvSpPr txBox="1"/>
+          <p:nvPr/>
+        </p:nvSpPr>
+        <p:spPr>
+          <a:xfrm>
+            <a:off x="9966960" y="2487168"/>
+            <a:ext cx="1828800" cy="223900"/>
+          </a:xfrm>
+          <a:prstGeom prst="rect">
+            <a:avLst/>
+          </a:prstGeom>
+          <a:noFill/>
+          <a:effectLst/>
+        </p:spPr>
+        <p:txBody>
+          <a:bodyPr wrap="none" lIns="18288" rIns="18288" tIns="18288" bIns="18288" anchor="t">
+            <a:spAutoFit/>
+          </a:bodyPr>
+          <a:lstStyle/>
+          <a:p>
+            <a:pPr algn="l">
+              <a:spcAft>
+                <a:spcPts val="0"/>
+              </a:spcAft>
+            </a:pPr>
+            <a:r>
+              <a:rPr sz="1150" b="0" i="0">
                 <a:solidFill>
                   <a:srgbClr val="E7F0F3"/>
                 </a:solidFill>
                 <a:latin typeface="Arial"/>
               </a:rPr>
-              <a:t>V_d(t): remaining liquid region</a:t>
-            </a:r>
-          </a:p>
-        </p:txBody>
-      </p:sp>
-      <p:sp>
-        <p:nvSpPr>
-          <p:cNvPr id="47" name="text46" descr="sci-ppt:C2-E17-046"/>
+              <a:t>∫Λ dt = 2.0  →  P = 0.86</a:t>
+            </a:r>
+          </a:p>
+        </p:txBody>
+      </p:sp>
+      <p:sp>
+        <p:nvSpPr>
+          <p:cNvPr id="77" name="C2-E17 rect 75" descr="sci-ppt:o075"/>
+          <p:cNvSpPr/>
+          <p:nvPr/>
+        </p:nvSpPr>
+        <p:spPr>
+          <a:xfrm>
+            <a:off x="6858000" y="3099815"/>
+            <a:ext cx="274320" cy="201168"/>
+          </a:xfrm>
+          <a:prstGeom prst="rect">
+            <a:avLst/>
+          </a:prstGeom>
+          <a:solidFill>
+            <a:srgbClr val="F28BA0"/>
+          </a:solidFill>
+          <a:ln w="12700">
+            <a:solidFill>
+              <a:srgbClr val="F28BA0"/>
+            </a:solidFill>
+          </a:ln>
+          <a:effectLst/>
+        </p:spPr>
+        <p:txBody>
+          <a:bodyPr rtlCol="0" anchor="ctr"/>
+          <a:lstStyle/>
+          <a:p>
+            <a:pPr algn="ctr"/>
+          </a:p>
+        </p:txBody>
+      </p:sp>
+      <p:sp>
+        <p:nvSpPr>
+          <p:cNvPr id="78" name="C2-E17 text 76" descr="sci-ppt:o076"/>
           <p:cNvSpPr txBox="1"/>
           <p:nvPr/>
         </p:nvSpPr>
         <p:spPr>
           <a:xfrm>
-            <a:off x="365760" y="5266944"/>
-            <a:ext cx="5547360" cy="321259"/>
+            <a:off x="7269480" y="3054096"/>
+            <a:ext cx="2743200" cy="231648"/>
           </a:xfrm>
           <a:prstGeom prst="rect">
             <a:avLst/>
@@ -4228,7 +8426,7 @@
           <a:effectLst/>
         </p:spPr>
         <p:txBody>
-          <a:bodyPr wrap="none" lIns="27432" rIns="27432" tIns="18288" bIns="18288" anchor="ctr">
+          <a:bodyPr wrap="none" lIns="18288" rIns="18288" tIns="18288" bIns="18288" anchor="t">
             <a:spAutoFit/>
           </a:bodyPr>
           <a:lstStyle/>
@@ -4239,27 +8437,67 @@
               </a:spcAft>
             </a:pPr>
             <a:r>
-              <a:rPr sz="1632" b="0" i="0">
+              <a:rPr sz="1200" b="1" i="0">
+                <a:solidFill>
+                  <a:srgbClr val="F28BA0"/>
+                </a:solidFill>
+                <a:latin typeface="Arial"/>
+              </a:rPr>
+              <a:t>C: Λ = 2/µs for 0.2 µs</a:t>
+            </a:r>
+          </a:p>
+        </p:txBody>
+      </p:sp>
+      <p:sp>
+        <p:nvSpPr>
+          <p:cNvPr id="79" name="C2-E17 text 77" descr="sci-ppt:o077"/>
+          <p:cNvSpPr txBox="1"/>
+          <p:nvPr/>
+        </p:nvSpPr>
+        <p:spPr>
+          <a:xfrm>
+            <a:off x="9966960" y="3054096"/>
+            <a:ext cx="1828800" cy="223900"/>
+          </a:xfrm>
+          <a:prstGeom prst="rect">
+            <a:avLst/>
+          </a:prstGeom>
+          <a:noFill/>
+          <a:effectLst/>
+        </p:spPr>
+        <p:txBody>
+          <a:bodyPr wrap="none" lIns="18288" rIns="18288" tIns="18288" bIns="18288" anchor="t">
+            <a:spAutoFit/>
+          </a:bodyPr>
+          <a:lstStyle/>
+          <a:p>
+            <a:pPr algn="l">
+              <a:spcAft>
+                <a:spcPts val="0"/>
+              </a:spcAft>
+            </a:pPr>
+            <a:r>
+              <a:rPr sz="1150" b="0" i="0">
                 <a:solidFill>
                   <a:srgbClr val="E7F0F3"/>
                 </a:solidFill>
                 <a:latin typeface="Arial"/>
               </a:rPr>
-              <a:t>J: events per volume per time</a:t>
-            </a:r>
-          </a:p>
-        </p:txBody>
-      </p:sp>
-      <p:sp>
-        <p:nvSpPr>
-          <p:cNvPr id="48" name="text47" descr="sci-ppt:C2-E17-047"/>
+              <a:t>∫Λ dt = 0.4  →  P = 0.33</a:t>
+            </a:r>
+          </a:p>
+        </p:txBody>
+      </p:sp>
+      <p:sp>
+        <p:nvSpPr>
+          <p:cNvPr id="80" name="C2-E17 text 78" descr="sci-ppt:o078"/>
           <p:cNvSpPr txBox="1"/>
           <p:nvPr/>
         </p:nvSpPr>
         <p:spPr>
           <a:xfrm>
-            <a:off x="365760" y="5559552"/>
-            <a:ext cx="5547360" cy="321259"/>
+            <a:off x="6858000" y="3749039"/>
+            <a:ext cx="4846320" cy="626745"/>
           </a:xfrm>
           <a:prstGeom prst="rect">
             <a:avLst/>
@@ -4268,7 +8506,7 @@
           <a:effectLst/>
         </p:spPr>
         <p:txBody>
-          <a:bodyPr wrap="none" lIns="27432" rIns="27432" tIns="18288" bIns="18288" anchor="ctr">
+          <a:bodyPr wrap="none" lIns="18288" rIns="18288" tIns="18288" bIns="18288" anchor="t">
             <a:spAutoFit/>
           </a:bodyPr>
           <a:lstStyle/>
@@ -4279,27 +8517,59 @@
               </a:spcAft>
             </a:pPr>
             <a:r>
-              <a:rPr sz="1632" b="0" i="0">
+              <a:rPr sz="1250" b="0" i="0">
                 <a:solidFill>
                   <a:srgbClr val="E7F0F3"/>
                 </a:solidFill>
                 <a:latin typeface="Arial"/>
               </a:rPr>
-              <a:t>S(0) = 1; S(t): survival</a:t>
-            </a:r>
-          </a:p>
-        </p:txBody>
-      </p:sp>
-      <p:sp>
-        <p:nvSpPr>
-          <p:cNvPr id="49" name="text48" descr="sci-ppt:C2-E17-048"/>
+              <a:t>A and B have different rates and durations but the same</a:t>
+            </a:r>
+          </a:p>
+          <a:p>
+            <a:pPr algn="l">
+              <a:spcAft>
+                <a:spcPts val="0"/>
+              </a:spcAft>
+            </a:pPr>
+            <a:r>
+              <a:rPr sz="1250" b="0" i="0">
+                <a:solidFill>
+                  <a:srgbClr val="E7F0F3"/>
+                </a:solidFill>
+                <a:latin typeface="Arial"/>
+              </a:rPr>
+              <a:t>integral, so they end at the same activation probability.</a:t>
+            </a:r>
+          </a:p>
+          <a:p>
+            <a:pPr algn="l">
+              <a:spcAft>
+                <a:spcPts val="0"/>
+              </a:spcAft>
+            </a:pPr>
+            <a:r>
+              <a:rPr sz="1250" b="0" i="0">
+                <a:solidFill>
+                  <a:srgbClr val="E7F0F3"/>
+                </a:solidFill>
+                <a:latin typeface="Arial"/>
+              </a:rPr>
+              <a:t>C has the high rate but too little time.</a:t>
+            </a:r>
+          </a:p>
+        </p:txBody>
+      </p:sp>
+      <p:sp>
+        <p:nvSpPr>
+          <p:cNvPr id="81" name="C2-E17 text 79" descr="sci-ppt:o079"/>
           <p:cNvSpPr txBox="1"/>
           <p:nvPr/>
         </p:nvSpPr>
         <p:spPr>
           <a:xfrm>
-            <a:off x="365760" y="5852160"/>
-            <a:ext cx="5547360" cy="321259"/>
+            <a:off x="914400" y="5733288"/>
+            <a:ext cx="10972800" cy="433070"/>
           </a:xfrm>
           <a:prstGeom prst="rect">
             <a:avLst/>
@@ -4308,7 +8578,7 @@
           <a:effectLst/>
         </p:spPr>
         <p:txBody>
-          <a:bodyPr wrap="none" lIns="27432" rIns="27432" tIns="18288" bIns="18288" anchor="ctr">
+          <a:bodyPr wrap="none" lIns="18288" rIns="18288" tIns="18288" bIns="18288" anchor="t">
             <a:spAutoFit/>
           </a:bodyPr>
           <a:lstStyle/>
@@ -4319,27 +8589,43 @@
               </a:spcAft>
             </a:pPr>
             <a:r>
-              <a:rPr sz="1632" b="0" i="0">
+              <a:rPr sz="1250" b="0" i="0">
                 <a:solidFill>
-                  <a:srgbClr val="E7F0F3"/>
+                  <a:srgbClr val="F2B880"/>
                 </a:solidFill>
                 <a:latin typeface="Arial"/>
               </a:rPr>
-              <a:t>t, t′, dV: integration domain</a:t>
-            </a:r>
-          </a:p>
-        </p:txBody>
-      </p:sp>
-      <p:sp>
-        <p:nvSpPr>
-          <p:cNvPr id="50" name="text49" descr="sci-ppt:C2-E17-049"/>
+              <a:t>Rate alone does not decide activation: the product of rate and time spent in the activating state does. J(T, p) must be supplied</a:t>
+            </a:r>
+          </a:p>
+          <a:p>
+            <a:pPr algn="l">
+              <a:spcAft>
+                <a:spcPts val="0"/>
+              </a:spcAft>
+            </a:pPr>
+            <a:r>
+              <a:rPr sz="1250" b="0" i="0">
+                <a:solidFill>
+                  <a:srgbClr val="F2B880"/>
+                </a:solidFill>
+                <a:latin typeface="Arial"/>
+              </a:rPr>
+              <a:t>by the material.</a:t>
+            </a:r>
+          </a:p>
+        </p:txBody>
+      </p:sp>
+      <p:sp>
+        <p:nvSpPr>
+          <p:cNvPr id="82" name="C2-E17 text 80" descr="sci-ppt:o080"/>
           <p:cNvSpPr txBox="1"/>
           <p:nvPr/>
         </p:nvSpPr>
         <p:spPr>
           <a:xfrm>
-            <a:off x="6156960" y="4974336"/>
-            <a:ext cx="5547360" cy="321259"/>
+            <a:off x="320040" y="6510528"/>
+            <a:ext cx="11521440" cy="200660"/>
           </a:xfrm>
           <a:prstGeom prst="rect">
             <a:avLst/>
@@ -4348,7 +8634,7 @@
           <a:effectLst/>
         </p:spPr>
         <p:txBody>
-          <a:bodyPr wrap="none" lIns="27432" rIns="27432" tIns="18288" bIns="18288" anchor="ctr">
+          <a:bodyPr wrap="none" lIns="18288" rIns="18288" tIns="18288" bIns="18288" anchor="t">
             <a:spAutoFit/>
           </a:bodyPr>
           <a:lstStyle/>
@@ -4359,173 +8645,13 @@
               </a:spcAft>
             </a:pPr>
             <a:r>
-              <a:rPr sz="1632" b="0" i="0">
-                <a:solidFill>
-                  <a:srgbClr val="E7F0F3"/>
-                </a:solidFill>
-                <a:latin typeface="Arial"/>
-              </a:rPr>
-              <a:t>T, p: local state</a:t>
-            </a:r>
-          </a:p>
-        </p:txBody>
-      </p:sp>
-      <p:sp>
-        <p:nvSpPr>
-          <p:cNvPr id="51" name="text50" descr="sci-ppt:C2-E17-050"/>
-          <p:cNvSpPr txBox="1"/>
-          <p:nvPr/>
-        </p:nvSpPr>
-        <p:spPr>
-          <a:xfrm>
-            <a:off x="6156960" y="5266944"/>
-            <a:ext cx="5547360" cy="321259"/>
-          </a:xfrm>
-          <a:prstGeom prst="rect">
-            <a:avLst/>
-          </a:prstGeom>
-          <a:noFill/>
-          <a:effectLst/>
-        </p:spPr>
-        <p:txBody>
-          <a:bodyPr wrap="none" lIns="27432" rIns="27432" tIns="18288" bIns="18288" anchor="ctr">
-            <a:spAutoFit/>
-          </a:bodyPr>
-          <a:lstStyle/>
-          <a:p>
-            <a:pPr algn="l">
-              <a:spcAft>
-                <a:spcPts val="0"/>
-              </a:spcAft>
-            </a:pPr>
-            <a:r>
-              <a:rPr sz="1632" b="0" i="0">
-                <a:solidFill>
-                  <a:srgbClr val="E7F0F3"/>
-                </a:solidFill>
-                <a:latin typeface="Arial"/>
-              </a:rPr>
-              <a:t>Λ(t): integrated event rate</a:t>
-            </a:r>
-          </a:p>
-        </p:txBody>
-      </p:sp>
-      <p:sp>
-        <p:nvSpPr>
-          <p:cNvPr id="52" name="text51" descr="sci-ppt:C2-E17-051"/>
-          <p:cNvSpPr txBox="1"/>
-          <p:nvPr/>
-        </p:nvSpPr>
-        <p:spPr>
-          <a:xfrm>
-            <a:off x="6156960" y="5559552"/>
-            <a:ext cx="5547360" cy="321259"/>
-          </a:xfrm>
-          <a:prstGeom prst="rect">
-            <a:avLst/>
-          </a:prstGeom>
-          <a:noFill/>
-          <a:effectLst/>
-        </p:spPr>
-        <p:txBody>
-          <a:bodyPr wrap="none" lIns="27432" rIns="27432" tIns="18288" bIns="18288" anchor="ctr">
-            <a:spAutoFit/>
-          </a:bodyPr>
-          <a:lstStyle/>
-          <a:p>
-            <a:pPr algn="l">
-              <a:spcAft>
-                <a:spcPts val="0"/>
-              </a:spcAft>
-            </a:pPr>
-            <a:r>
-              <a:rPr sz="1632" b="0" i="0">
-                <a:solidFill>
-                  <a:srgbClr val="E7F0F3"/>
-                </a:solidFill>
-                <a:latin typeface="Arial"/>
-              </a:rPr>
-              <a:t>P_act = 1 − S</a:t>
-            </a:r>
-          </a:p>
-        </p:txBody>
-      </p:sp>
-      <p:sp>
-        <p:nvSpPr>
-          <p:cNvPr id="53" name="text52" descr="sci-ppt:C2-E17-052"/>
-          <p:cNvSpPr txBox="1"/>
-          <p:nvPr/>
-        </p:nvSpPr>
-        <p:spPr>
-          <a:xfrm>
-            <a:off x="365760" y="6339840"/>
-            <a:ext cx="11277600" cy="302361"/>
-          </a:xfrm>
-          <a:prstGeom prst="rect">
-            <a:avLst/>
-          </a:prstGeom>
-          <a:noFill/>
-          <a:effectLst/>
-        </p:spPr>
-        <p:txBody>
-          <a:bodyPr wrap="none" lIns="27432" rIns="27432" tIns="18288" bIns="18288" anchor="ctr">
-            <a:spAutoFit/>
-          </a:bodyPr>
-          <a:lstStyle/>
-          <a:p>
-            <a:pPr algn="l">
-              <a:spcAft>
-                <a:spcPts val="0"/>
-              </a:spcAft>
-            </a:pPr>
-            <a:r>
-              <a:rPr sz="1536" b="0" i="0">
+              <a:rPr sz="1000" b="0" i="0">
                 <a:solidFill>
                   <a:srgbClr val="B4C7D2"/>
                 </a:solidFill>
                 <a:latin typeface="Arial"/>
               </a:rPr>
-              <a:t>Integrate the hot, pressurized region rather than only its average temperature</a:t>
-            </a:r>
-          </a:p>
-        </p:txBody>
-      </p:sp>
-      <p:sp>
-        <p:nvSpPr>
-          <p:cNvPr id="54" name="text53" descr="sci-ppt:C2-E17-053"/>
-          <p:cNvSpPr txBox="1"/>
-          <p:nvPr/>
-        </p:nvSpPr>
-        <p:spPr>
-          <a:xfrm>
-            <a:off x="365760" y="6632448"/>
-            <a:ext cx="11277600" cy="302361"/>
-          </a:xfrm>
-          <a:prstGeom prst="rect">
-            <a:avLst/>
-          </a:prstGeom>
-          <a:noFill/>
-          <a:effectLst/>
-        </p:spPr>
-        <p:txBody>
-          <a:bodyPr wrap="none" lIns="27432" rIns="27432" tIns="18288" bIns="18288" anchor="ctr">
-            <a:spAutoFit/>
-          </a:bodyPr>
-          <a:lstStyle/>
-          <a:p>
-            <a:pPr algn="l">
-              <a:spcAft>
-                <a:spcPts val="0"/>
-              </a:spcAft>
-            </a:pPr>
-            <a:r>
-              <a:rPr sz="1536" b="0" i="0">
-                <a:solidFill>
-                  <a:srgbClr val="B4C7D2"/>
-                </a:solidFill>
-                <a:latin typeface="Arial"/>
-              </a:rPr>
-              <a:t>An absent event can mean low probability, not impossibility</a:t>
+              <a:t>Independent Poisson events; survival S = exp(−∫Λ dt) (Eq. C2-E17). Rates are illustrative.</a:t>
             </a:r>
           </a:p>
         </p:txBody>
